--- a/docs/Times_Hub_Sunum.pptx
+++ b/docs/Times_Hub_Sunum.pptx
@@ -18,6 +18,7 @@
     <p:sldId id="266" r:id="rId17"/>
     <p:sldId id="267" r:id="rId18"/>
     <p:sldId id="268" r:id="rId19"/>
+    <p:sldId id="269" r:id="rId20"/>
   </p:sldIdLst>
   <p:sldSz cx="12191695" cy="6858000" type="screen4x3"/>
   <p:notesSz cx="6858000" cy="9144000"/>
@@ -3503,7 +3504,7 @@
               </a:defRPr>
             </a:pPr>
             <a:r>
-              <a:t>1 / 13</a:t>
+              <a:t>1 / 14</a:t>
             </a:r>
           </a:p>
         </p:txBody>
@@ -3543,7 +3544,7 @@
         <p:spPr>
           <a:xfrm>
             <a:off x="731520" y="457200"/>
-            <a:ext cx="5486400" cy="365760"/>
+            <a:ext cx="7315200" cy="365760"/>
           </a:xfrm>
           <a:prstGeom prst="rect">
             <a:avLst/>
@@ -3565,7 +3566,7 @@
               </a:defRPr>
             </a:pPr>
             <a:r>
-              <a:t>KATMA DEĞER</a:t>
+              <a:t>REKABET ANALİZİ</a:t>
             </a:r>
           </a:p>
         </p:txBody>
@@ -3579,21 +3580,21 @@
         <p:spPr>
           <a:xfrm>
             <a:off x="731520" y="914400"/>
-            <a:ext cx="9144000" cy="640080"/>
-          </a:xfrm>
-          <a:prstGeom prst="rect">
-            <a:avLst/>
-          </a:prstGeom>
-          <a:noFill/>
-        </p:spPr>
-        <p:txBody>
-          <a:bodyPr wrap="square">
-            <a:spAutoFit/>
-          </a:bodyPr>
-          <a:lstStyle/>
-          <a:p>
-            <a:pPr algn="l">
-              <a:defRPr sz="3200" b="1">
+            <a:ext cx="10058400" cy="640080"/>
+          </a:xfrm>
+          <a:prstGeom prst="rect">
+            <a:avLst/>
+          </a:prstGeom>
+          <a:noFill/>
+        </p:spPr>
+        <p:txBody>
+          <a:bodyPr wrap="square">
+            <a:spAutoFit/>
+          </a:bodyPr>
+          <a:lstStyle/>
+          <a:p>
+            <a:pPr algn="l">
+              <a:defRPr sz="3000" b="1">
                 <a:solidFill>
                   <a:srgbClr val="E2E8F0"/>
                 </a:solidFill>
@@ -3601,7 +3602,7 @@
               </a:defRPr>
             </a:pPr>
             <a:r>
-              <a:t>Time's Hub ne kazandırır?</a:t>
+              <a:t>Google Meridian / Meta Robyn vs Time's Hub</a:t>
             </a:r>
           </a:p>
         </p:txBody>
@@ -3615,7 +3616,7 @@
         <p:spPr>
           <a:xfrm>
             <a:off x="731520" y="1828800"/>
-            <a:ext cx="3383280" cy="2377440"/>
+            <a:ext cx="5120640" cy="2743200"/>
           </a:xfrm>
           <a:prstGeom prst="roundRect">
             <a:avLst/>
@@ -3654,129 +3655,163 @@
       </p:sp>
       <p:sp>
         <p:nvSpPr>
-          <p:cNvPr id="5" name="Rectangle 4"/>
+          <p:cNvPr id="5" name="TextBox 4"/>
+          <p:cNvSpPr txBox="1"/>
+          <p:nvPr/>
+        </p:nvSpPr>
+        <p:spPr>
+          <a:xfrm>
+            <a:off x="1097280" y="1965960"/>
+            <a:ext cx="4572000" cy="365760"/>
+          </a:xfrm>
+          <a:prstGeom prst="rect">
+            <a:avLst/>
+          </a:prstGeom>
+          <a:noFill/>
+        </p:spPr>
+        <p:txBody>
+          <a:bodyPr wrap="square">
+            <a:spAutoFit/>
+          </a:bodyPr>
+          <a:lstStyle/>
+          <a:p>
+            <a:pPr algn="l">
+              <a:defRPr sz="1700" b="1">
+                <a:solidFill>
+                  <a:srgbClr val="EF4444"/>
+                </a:solidFill>
+                <a:latin typeface="Calibri"/>
+              </a:defRPr>
+            </a:pPr>
+            <a:r>
+              <a:t>Meridian / Robyn Problemi</a:t>
+            </a:r>
+          </a:p>
+        </p:txBody>
+      </p:sp>
+      <p:sp>
+        <p:nvSpPr>
+          <p:cNvPr id="6" name="TextBox 5"/>
+          <p:cNvSpPr txBox="1"/>
+          <p:nvPr/>
+        </p:nvSpPr>
+        <p:spPr>
+          <a:xfrm>
+            <a:off x="1097280" y="2468880"/>
+            <a:ext cx="4572000" cy="2011680"/>
+          </a:xfrm>
+          <a:prstGeom prst="rect">
+            <a:avLst/>
+          </a:prstGeom>
+          <a:noFill/>
+        </p:spPr>
+        <p:txBody>
+          <a:bodyPr wrap="square">
+            <a:spAutoFit/>
+          </a:bodyPr>
+          <a:lstStyle/>
+          <a:p>
+            <a:pPr algn="l">
+              <a:defRPr sz="1300" b="0">
+                <a:solidFill>
+                  <a:srgbClr val="E2E8F0"/>
+                </a:solidFill>
+                <a:latin typeface="Calibri"/>
+              </a:defRPr>
+            </a:pPr>
+          </a:p>
+          <a:p>
+            <a:pPr>
+              <a:spcBef>
+                <a:spcPts val="600"/>
+              </a:spcBef>
+              <a:defRPr sz="1300" b="0">
+                <a:solidFill>
+                  <a:srgbClr val="94A3B8"/>
+                </a:solidFill>
+                <a:latin typeface="Calibri"/>
+              </a:defRPr>
+            </a:pPr>
+            <a:r>
+              <a:t>•  Sadece MMM katmanı — DDA ve Incrementality yok</a:t>
+            </a:r>
+          </a:p>
+          <a:p>
+            <a:pPr>
+              <a:spcBef>
+                <a:spcPts val="600"/>
+              </a:spcBef>
+              <a:defRPr sz="1300" b="0">
+                <a:solidFill>
+                  <a:srgbClr val="94A3B8"/>
+                </a:solidFill>
+                <a:latin typeface="Calibri"/>
+              </a:defRPr>
+            </a:pPr>
+            <a:r>
+              <a:t>•  Platform yanlılığı: kendi kanalını iyi gösterir</a:t>
+            </a:r>
+          </a:p>
+          <a:p>
+            <a:pPr>
+              <a:spcBef>
+                <a:spcPts val="600"/>
+              </a:spcBef>
+              <a:defRPr sz="1300" b="0">
+                <a:solidFill>
+                  <a:srgbClr val="94A3B8"/>
+                </a:solidFill>
+                <a:latin typeface="Calibri"/>
+              </a:defRPr>
+            </a:pPr>
+            <a:r>
+              <a:t>•  Offline (TV, radyo, DOOH) entegrasyonu sınırlı</a:t>
+            </a:r>
+          </a:p>
+          <a:p>
+            <a:pPr>
+              <a:spcBef>
+                <a:spcPts val="600"/>
+              </a:spcBef>
+              <a:defRPr sz="1300" b="0">
+                <a:solidFill>
+                  <a:srgbClr val="94A3B8"/>
+                </a:solidFill>
+                <a:latin typeface="Calibri"/>
+              </a:defRPr>
+            </a:pPr>
+            <a:r>
+              <a:t>•  CRM journey verisi kullanmaz</a:t>
+            </a:r>
+          </a:p>
+          <a:p>
+            <a:pPr>
+              <a:spcBef>
+                <a:spcPts val="600"/>
+              </a:spcBef>
+              <a:defRPr sz="1300" b="0">
+                <a:solidFill>
+                  <a:srgbClr val="94A3B8"/>
+                </a:solidFill>
+                <a:latin typeface="Calibri"/>
+              </a:defRPr>
+            </a:pPr>
+            <a:r>
+              <a:t>•  Cross-validation mekanizması yok</a:t>
+            </a:r>
+          </a:p>
+        </p:txBody>
+      </p:sp>
+      <p:sp>
+        <p:nvSpPr>
+          <p:cNvPr id="7" name="Rounded Rectangle 6"/>
           <p:cNvSpPr/>
           <p:nvPr/>
         </p:nvSpPr>
         <p:spPr>
           <a:xfrm>
-            <a:off x="731520" y="1828800"/>
-            <a:ext cx="3383280" cy="38100"/>
-          </a:xfrm>
-          <a:prstGeom prst="rect">
-            <a:avLst/>
-          </a:prstGeom>
-          <a:solidFill>
-            <a:srgbClr val="F97316"/>
-          </a:solidFill>
-          <a:ln>
-            <a:noFill/>
-          </a:ln>
-        </p:spPr>
-        <p:style>
-          <a:lnRef idx="1">
-            <a:schemeClr val="accent1"/>
-          </a:lnRef>
-          <a:fillRef idx="3">
-            <a:schemeClr val="accent1"/>
-          </a:fillRef>
-          <a:effectRef idx="2">
-            <a:schemeClr val="accent1"/>
-          </a:effectRef>
-          <a:fontRef idx="minor">
-            <a:schemeClr val="lt1"/>
-          </a:fontRef>
-        </p:style>
-        <p:txBody>
-          <a:bodyPr rtlCol="0" anchor="ctr"/>
-          <a:lstStyle/>
-          <a:p>
-            <a:pPr algn="ctr"/>
-          </a:p>
-        </p:txBody>
-      </p:sp>
-      <p:sp>
-        <p:nvSpPr>
-          <p:cNvPr id="6" name="TextBox 5"/>
-          <p:cNvSpPr txBox="1"/>
-          <p:nvPr/>
-        </p:nvSpPr>
-        <p:spPr>
-          <a:xfrm>
-            <a:off x="914400" y="2011680"/>
-            <a:ext cx="3017520" cy="365760"/>
-          </a:xfrm>
-          <a:prstGeom prst="rect">
-            <a:avLst/>
-          </a:prstGeom>
-          <a:noFill/>
-        </p:spPr>
-        <p:txBody>
-          <a:bodyPr wrap="square">
-            <a:spAutoFit/>
-          </a:bodyPr>
-          <a:lstStyle/>
-          <a:p>
-            <a:pPr algn="l">
-              <a:defRPr sz="1700" b="1">
-                <a:solidFill>
-                  <a:srgbClr val="F97316"/>
-                </a:solidFill>
-                <a:latin typeface="Calibri"/>
-              </a:defRPr>
-            </a:pPr>
-            <a:r>
-              <a:t>₺  Bütçe Optimizasyonu</a:t>
-            </a:r>
-          </a:p>
-        </p:txBody>
-      </p:sp>
-      <p:sp>
-        <p:nvSpPr>
-          <p:cNvPr id="7" name="TextBox 6"/>
-          <p:cNvSpPr txBox="1"/>
-          <p:nvPr/>
-        </p:nvSpPr>
-        <p:spPr>
-          <a:xfrm>
-            <a:off x="914400" y="2514600"/>
-            <a:ext cx="3017520" cy="1371600"/>
-          </a:xfrm>
-          <a:prstGeom prst="rect">
-            <a:avLst/>
-          </a:prstGeom>
-          <a:noFill/>
-        </p:spPr>
-        <p:txBody>
-          <a:bodyPr wrap="square">
-            <a:spAutoFit/>
-          </a:bodyPr>
-          <a:lstStyle/>
-          <a:p>
-            <a:pPr algn="l">
-              <a:defRPr sz="1300" b="0">
-                <a:solidFill>
-                  <a:srgbClr val="94A3B8"/>
-                </a:solidFill>
-                <a:latin typeface="Calibri"/>
-              </a:defRPr>
-            </a:pPr>
-            <a:r>
-              <a:t>Düşük ROI kanallardan yüksek ROI kanallara veri odaklı kaydırma. Aynı bütçeyle daha fazla lead.</a:t>
-            </a:r>
-          </a:p>
-        </p:txBody>
-      </p:sp>
-      <p:sp>
-        <p:nvSpPr>
-          <p:cNvPr id="8" name="Rounded Rectangle 7"/>
-          <p:cNvSpPr/>
-          <p:nvPr/>
-        </p:nvSpPr>
-        <p:spPr>
-          <a:xfrm>
-            <a:off x="4480559" y="1828800"/>
-            <a:ext cx="3383280" cy="2377440"/>
+            <a:off x="6309360" y="1828800"/>
+            <a:ext cx="5120640" cy="2743200"/>
           </a:xfrm>
           <a:prstGeom prst="roundRect">
             <a:avLst/>
@@ -3815,14 +3850,57 @@
       </p:sp>
       <p:sp>
         <p:nvSpPr>
+          <p:cNvPr id="8" name="Rectangle 7"/>
+          <p:cNvSpPr/>
+          <p:nvPr/>
+        </p:nvSpPr>
+        <p:spPr>
+          <a:xfrm>
+            <a:off x="6309360" y="1828800"/>
+            <a:ext cx="5120640" cy="38100"/>
+          </a:xfrm>
+          <a:prstGeom prst="rect">
+            <a:avLst/>
+          </a:prstGeom>
+          <a:solidFill>
+            <a:srgbClr val="F97316"/>
+          </a:solidFill>
+          <a:ln>
+            <a:noFill/>
+          </a:ln>
+        </p:spPr>
+        <p:style>
+          <a:lnRef idx="1">
+            <a:schemeClr val="accent1"/>
+          </a:lnRef>
+          <a:fillRef idx="3">
+            <a:schemeClr val="accent1"/>
+          </a:fillRef>
+          <a:effectRef idx="2">
+            <a:schemeClr val="accent1"/>
+          </a:effectRef>
+          <a:fontRef idx="minor">
+            <a:schemeClr val="lt1"/>
+          </a:fontRef>
+        </p:style>
+        <p:txBody>
+          <a:bodyPr rtlCol="0" anchor="ctr"/>
+          <a:lstStyle/>
+          <a:p>
+            <a:pPr algn="ctr"/>
+          </a:p>
+        </p:txBody>
+      </p:sp>
+      <p:sp>
+        <p:nvSpPr>
           <p:cNvPr id="9" name="TextBox 8"/>
           <p:cNvSpPr txBox="1"/>
           <p:nvPr/>
         </p:nvSpPr>
         <p:spPr>
           <a:xfrm>
-            <a:off x="4663440" y="2011680"/>
-            <a:ext cx="3017520" cy="365760"/>
+            <a:off x="6675120" y="1965960"/>
+            <a:ext cx="4572000" cy="365760"/>
           </a:xfrm>
           <a:prstGeom prst="rect">
             <a:avLst/>
@@ -3838,13 +3916,13 @@
             <a:pPr algn="l">
               <a:defRPr sz="1700" b="1">
                 <a:solidFill>
-                  <a:srgbClr val="60A5FA"/>
-                </a:solidFill>
-                <a:latin typeface="Calibri"/>
-              </a:defRPr>
-            </a:pPr>
-            <a:r>
-              <a:t>🔍  Şeffaflık</a:t>
+                  <a:srgbClr val="F97316"/>
+                </a:solidFill>
+                <a:latin typeface="Calibri"/>
+              </a:defRPr>
+            </a:pPr>
+            <a:r>
+              <a:t>Time's Hub Farkı</a:t>
             </a:r>
           </a:p>
         </p:txBody>
@@ -3857,8 +3935,8 @@
         </p:nvSpPr>
         <p:spPr>
           <a:xfrm>
-            <a:off x="4663440" y="2514600"/>
-            <a:ext cx="3017520" cy="1371600"/>
+            <a:off x="6675120" y="2468880"/>
+            <a:ext cx="4572000" cy="2011680"/>
           </a:xfrm>
           <a:prstGeom prst="rect">
             <a:avLst/>
@@ -3874,13 +3952,90 @@
             <a:pPr algn="l">
               <a:defRPr sz="1300" b="0">
                 <a:solidFill>
-                  <a:srgbClr val="94A3B8"/>
-                </a:solidFill>
-                <a:latin typeface="Calibri"/>
-              </a:defRPr>
-            </a:pPr>
-            <a:r>
-              <a:t>Her kanalın gerçek katkısı veri ile kanıtlanır. Platform raporlarına bağımlılık azalır.</a:t>
+                  <a:srgbClr val="E2E8F0"/>
+                </a:solidFill>
+                <a:latin typeface="Calibri"/>
+              </a:defRPr>
+            </a:pPr>
+          </a:p>
+          <a:p>
+            <a:pPr>
+              <a:spcBef>
+                <a:spcPts val="600"/>
+              </a:spcBef>
+              <a:defRPr sz="1300" b="0">
+                <a:solidFill>
+                  <a:srgbClr val="E2E8F0"/>
+                </a:solidFill>
+                <a:latin typeface="Calibri"/>
+              </a:defRPr>
+            </a:pPr>
+            <a:r>
+              <a:t>•  3 model katmanı: MMM + DDA + Incrementality</a:t>
+            </a:r>
+          </a:p>
+          <a:p>
+            <a:pPr>
+              <a:spcBef>
+                <a:spcPts val="600"/>
+              </a:spcBef>
+              <a:defRPr sz="1300" b="0">
+                <a:solidFill>
+                  <a:srgbClr val="E2E8F0"/>
+                </a:solidFill>
+                <a:latin typeface="Calibri"/>
+              </a:defRPr>
+            </a:pPr>
+            <a:r>
+              <a:t>•  Platform bağımsız, tarafsız ölçüm</a:t>
+            </a:r>
+          </a:p>
+          <a:p>
+            <a:pPr>
+              <a:spcBef>
+                <a:spcPts val="600"/>
+              </a:spcBef>
+              <a:defRPr sz="1300" b="0">
+                <a:solidFill>
+                  <a:srgbClr val="E2E8F0"/>
+                </a:solidFill>
+                <a:latin typeface="Calibri"/>
+              </a:defRPr>
+            </a:pPr>
+            <a:r>
+              <a:t>•  Online + offline tüm kanallar tek çatıda</a:t>
+            </a:r>
+          </a:p>
+          <a:p>
+            <a:pPr>
+              <a:spcBef>
+                <a:spcPts val="600"/>
+              </a:spcBef>
+              <a:defRPr sz="1300" b="0">
+                <a:solidFill>
+                  <a:srgbClr val="E2E8F0"/>
+                </a:solidFill>
+                <a:latin typeface="Calibri"/>
+              </a:defRPr>
+            </a:pPr>
+            <a:r>
+              <a:t>•  CRM touchpoint verisiyle user-level attribution</a:t>
+            </a:r>
+          </a:p>
+          <a:p>
+            <a:pPr>
+              <a:spcBef>
+                <a:spcPts val="600"/>
+              </a:spcBef>
+              <a:defRPr sz="1300" b="0">
+                <a:solidFill>
+                  <a:srgbClr val="E2E8F0"/>
+                </a:solidFill>
+                <a:latin typeface="Calibri"/>
+              </a:defRPr>
+            </a:pPr>
+            <a:r>
+              <a:t>•  Cross-validation: DDA vs MMM sapma uyarısı</a:t>
             </a:r>
           </a:p>
         </p:txBody>
@@ -3893,8 +4048,8 @@
         </p:nvSpPr>
         <p:spPr>
           <a:xfrm>
-            <a:off x="8229600" y="1828800"/>
-            <a:ext cx="3383280" cy="2377440"/>
+            <a:off x="731520" y="4754880"/>
+            <a:ext cx="10698480" cy="1828800"/>
           </a:xfrm>
           <a:prstGeom prst="roundRect">
             <a:avLst/>
@@ -3939,22 +4094,274 @@
         </p:nvSpPr>
         <p:spPr>
           <a:xfrm>
-            <a:off x="8412480" y="2011680"/>
-            <a:ext cx="3017520" cy="365760"/>
-          </a:xfrm>
-          <a:prstGeom prst="rect">
-            <a:avLst/>
-          </a:prstGeom>
-          <a:noFill/>
-        </p:spPr>
-        <p:txBody>
-          <a:bodyPr wrap="square">
-            <a:spAutoFit/>
-          </a:bodyPr>
-          <a:lstStyle/>
-          <a:p>
-            <a:pPr algn="l">
-              <a:defRPr sz="1700" b="1">
+            <a:off x="1097280" y="4846320"/>
+            <a:ext cx="2286000" cy="274320"/>
+          </a:xfrm>
+          <a:prstGeom prst="rect">
+            <a:avLst/>
+          </a:prstGeom>
+          <a:noFill/>
+        </p:spPr>
+        <p:txBody>
+          <a:bodyPr wrap="square">
+            <a:spAutoFit/>
+          </a:bodyPr>
+          <a:lstStyle/>
+          <a:p>
+            <a:pPr algn="l">
+              <a:defRPr sz="1100" b="1">
+                <a:solidFill>
+                  <a:srgbClr val="64748B"/>
+                </a:solidFill>
+                <a:latin typeface="Calibri"/>
+              </a:defRPr>
+            </a:pPr>
+            <a:r>
+              <a:t>Özellik</a:t>
+            </a:r>
+          </a:p>
+        </p:txBody>
+      </p:sp>
+      <p:sp>
+        <p:nvSpPr>
+          <p:cNvPr id="13" name="TextBox 12"/>
+          <p:cNvSpPr txBox="1"/>
+          <p:nvPr/>
+        </p:nvSpPr>
+        <p:spPr>
+          <a:xfrm>
+            <a:off x="4114800" y="4846320"/>
+            <a:ext cx="2286000" cy="274320"/>
+          </a:xfrm>
+          <a:prstGeom prst="rect">
+            <a:avLst/>
+          </a:prstGeom>
+          <a:noFill/>
+        </p:spPr>
+        <p:txBody>
+          <a:bodyPr wrap="square">
+            <a:spAutoFit/>
+          </a:bodyPr>
+          <a:lstStyle/>
+          <a:p>
+            <a:pPr algn="l">
+              <a:defRPr sz="1100" b="1">
+                <a:solidFill>
+                  <a:srgbClr val="64748B"/>
+                </a:solidFill>
+                <a:latin typeface="Calibri"/>
+              </a:defRPr>
+            </a:pPr>
+            <a:r>
+              <a:t>Meridian</a:t>
+            </a:r>
+          </a:p>
+        </p:txBody>
+      </p:sp>
+      <p:sp>
+        <p:nvSpPr>
+          <p:cNvPr id="14" name="TextBox 13"/>
+          <p:cNvSpPr txBox="1"/>
+          <p:nvPr/>
+        </p:nvSpPr>
+        <p:spPr>
+          <a:xfrm>
+            <a:off x="6400800" y="4846320"/>
+            <a:ext cx="2286000" cy="274320"/>
+          </a:xfrm>
+          <a:prstGeom prst="rect">
+            <a:avLst/>
+          </a:prstGeom>
+          <a:noFill/>
+        </p:spPr>
+        <p:txBody>
+          <a:bodyPr wrap="square">
+            <a:spAutoFit/>
+          </a:bodyPr>
+          <a:lstStyle/>
+          <a:p>
+            <a:pPr algn="l">
+              <a:defRPr sz="1100" b="1">
+                <a:solidFill>
+                  <a:srgbClr val="64748B"/>
+                </a:solidFill>
+                <a:latin typeface="Calibri"/>
+              </a:defRPr>
+            </a:pPr>
+            <a:r>
+              <a:t>Robyn</a:t>
+            </a:r>
+          </a:p>
+        </p:txBody>
+      </p:sp>
+      <p:sp>
+        <p:nvSpPr>
+          <p:cNvPr id="15" name="TextBox 14"/>
+          <p:cNvSpPr txBox="1"/>
+          <p:nvPr/>
+        </p:nvSpPr>
+        <p:spPr>
+          <a:xfrm>
+            <a:off x="8686800" y="4846320"/>
+            <a:ext cx="2286000" cy="274320"/>
+          </a:xfrm>
+          <a:prstGeom prst="rect">
+            <a:avLst/>
+          </a:prstGeom>
+          <a:noFill/>
+        </p:spPr>
+        <p:txBody>
+          <a:bodyPr wrap="square">
+            <a:spAutoFit/>
+          </a:bodyPr>
+          <a:lstStyle/>
+          <a:p>
+            <a:pPr algn="l">
+              <a:defRPr sz="1100" b="1">
+                <a:solidFill>
+                  <a:srgbClr val="64748B"/>
+                </a:solidFill>
+                <a:latin typeface="Calibri"/>
+              </a:defRPr>
+            </a:pPr>
+            <a:r>
+              <a:t>Time's Hub</a:t>
+            </a:r>
+          </a:p>
+        </p:txBody>
+      </p:sp>
+      <p:sp>
+        <p:nvSpPr>
+          <p:cNvPr id="16" name="TextBox 15"/>
+          <p:cNvSpPr txBox="1"/>
+          <p:nvPr/>
+        </p:nvSpPr>
+        <p:spPr>
+          <a:xfrm>
+            <a:off x="1097280" y="5166360"/>
+            <a:ext cx="2743200" cy="210312"/>
+          </a:xfrm>
+          <a:prstGeom prst="rect">
+            <a:avLst/>
+          </a:prstGeom>
+          <a:noFill/>
+        </p:spPr>
+        <p:txBody>
+          <a:bodyPr wrap="square">
+            <a:spAutoFit/>
+          </a:bodyPr>
+          <a:lstStyle/>
+          <a:p>
+            <a:pPr algn="l">
+              <a:defRPr sz="1000" b="0">
+                <a:solidFill>
+                  <a:srgbClr val="E2E8F0"/>
+                </a:solidFill>
+                <a:latin typeface="Calibri"/>
+              </a:defRPr>
+            </a:pPr>
+            <a:r>
+              <a:t>MMM</a:t>
+            </a:r>
+          </a:p>
+        </p:txBody>
+      </p:sp>
+      <p:sp>
+        <p:nvSpPr>
+          <p:cNvPr id="17" name="TextBox 16"/>
+          <p:cNvSpPr txBox="1"/>
+          <p:nvPr/>
+        </p:nvSpPr>
+        <p:spPr>
+          <a:xfrm>
+            <a:off x="4114800" y="5166360"/>
+            <a:ext cx="1828800" cy="210312"/>
+          </a:xfrm>
+          <a:prstGeom prst="rect">
+            <a:avLst/>
+          </a:prstGeom>
+          <a:noFill/>
+        </p:spPr>
+        <p:txBody>
+          <a:bodyPr wrap="square">
+            <a:spAutoFit/>
+          </a:bodyPr>
+          <a:lstStyle/>
+          <a:p>
+            <a:pPr algn="l">
+              <a:defRPr sz="1000" b="0">
+                <a:solidFill>
+                  <a:srgbClr val="94A3B8"/>
+                </a:solidFill>
+                <a:latin typeface="Calibri"/>
+              </a:defRPr>
+            </a:pPr>
+            <a:r>
+              <a:t>✓ Bayesian</a:t>
+            </a:r>
+          </a:p>
+        </p:txBody>
+      </p:sp>
+      <p:sp>
+        <p:nvSpPr>
+          <p:cNvPr id="18" name="TextBox 17"/>
+          <p:cNvSpPr txBox="1"/>
+          <p:nvPr/>
+        </p:nvSpPr>
+        <p:spPr>
+          <a:xfrm>
+            <a:off x="6400800" y="5166360"/>
+            <a:ext cx="1828800" cy="210312"/>
+          </a:xfrm>
+          <a:prstGeom prst="rect">
+            <a:avLst/>
+          </a:prstGeom>
+          <a:noFill/>
+        </p:spPr>
+        <p:txBody>
+          <a:bodyPr wrap="square">
+            <a:spAutoFit/>
+          </a:bodyPr>
+          <a:lstStyle/>
+          <a:p>
+            <a:pPr algn="l">
+              <a:defRPr sz="1000" b="0">
+                <a:solidFill>
+                  <a:srgbClr val="94A3B8"/>
+                </a:solidFill>
+                <a:latin typeface="Calibri"/>
+              </a:defRPr>
+            </a:pPr>
+            <a:r>
+              <a:t>✓ Ridge</a:t>
+            </a:r>
+          </a:p>
+        </p:txBody>
+      </p:sp>
+      <p:sp>
+        <p:nvSpPr>
+          <p:cNvPr id="19" name="TextBox 18"/>
+          <p:cNvSpPr txBox="1"/>
+          <p:nvPr/>
+        </p:nvSpPr>
+        <p:spPr>
+          <a:xfrm>
+            <a:off x="8686800" y="5166360"/>
+            <a:ext cx="2286000" cy="210312"/>
+          </a:xfrm>
+          <a:prstGeom prst="rect">
+            <a:avLst/>
+          </a:prstGeom>
+          <a:noFill/>
+        </p:spPr>
+        <p:txBody>
+          <a:bodyPr wrap="square">
+            <a:spAutoFit/>
+          </a:bodyPr>
+          <a:lstStyle/>
+          <a:p>
+            <a:pPr algn="l">
+              <a:defRPr sz="1000" b="0">
                 <a:solidFill>
                   <a:srgbClr val="4ADE80"/>
                 </a:solidFill>
@@ -3962,35 +4369,647 @@
               </a:defRPr>
             </a:pPr>
             <a:r>
-              <a:t>⚡  Hız</a:t>
-            </a:r>
-          </a:p>
-        </p:txBody>
-      </p:sp>
-      <p:sp>
-        <p:nvSpPr>
-          <p:cNvPr id="13" name="TextBox 12"/>
-          <p:cNvSpPr txBox="1"/>
-          <p:nvPr/>
-        </p:nvSpPr>
-        <p:spPr>
-          <a:xfrm>
-            <a:off x="8412480" y="2514600"/>
-            <a:ext cx="3017520" cy="1371600"/>
-          </a:xfrm>
-          <a:prstGeom prst="rect">
-            <a:avLst/>
-          </a:prstGeom>
-          <a:noFill/>
-        </p:spPr>
-        <p:txBody>
-          <a:bodyPr wrap="square">
-            <a:spAutoFit/>
-          </a:bodyPr>
-          <a:lstStyle/>
-          <a:p>
-            <a:pPr algn="l">
-              <a:defRPr sz="1300" b="0">
+              <a:t>✓ Adstock + Hill</a:t>
+            </a:r>
+          </a:p>
+        </p:txBody>
+      </p:sp>
+      <p:sp>
+        <p:nvSpPr>
+          <p:cNvPr id="20" name="TextBox 19"/>
+          <p:cNvSpPr txBox="1"/>
+          <p:nvPr/>
+        </p:nvSpPr>
+        <p:spPr>
+          <a:xfrm>
+            <a:off x="1097280" y="5376672"/>
+            <a:ext cx="2743200" cy="210312"/>
+          </a:xfrm>
+          <a:prstGeom prst="rect">
+            <a:avLst/>
+          </a:prstGeom>
+          <a:noFill/>
+        </p:spPr>
+        <p:txBody>
+          <a:bodyPr wrap="square">
+            <a:spAutoFit/>
+          </a:bodyPr>
+          <a:lstStyle/>
+          <a:p>
+            <a:pPr algn="l">
+              <a:defRPr sz="1000" b="0">
+                <a:solidFill>
+                  <a:srgbClr val="E2E8F0"/>
+                </a:solidFill>
+                <a:latin typeface="Calibri"/>
+              </a:defRPr>
+            </a:pPr>
+            <a:r>
+              <a:t>DDA (Markov + Shapley)</a:t>
+            </a:r>
+          </a:p>
+        </p:txBody>
+      </p:sp>
+      <p:sp>
+        <p:nvSpPr>
+          <p:cNvPr id="21" name="TextBox 20"/>
+          <p:cNvSpPr txBox="1"/>
+          <p:nvPr/>
+        </p:nvSpPr>
+        <p:spPr>
+          <a:xfrm>
+            <a:off x="4114800" y="5376672"/>
+            <a:ext cx="1828800" cy="210312"/>
+          </a:xfrm>
+          <a:prstGeom prst="rect">
+            <a:avLst/>
+          </a:prstGeom>
+          <a:noFill/>
+        </p:spPr>
+        <p:txBody>
+          <a:bodyPr wrap="square">
+            <a:spAutoFit/>
+          </a:bodyPr>
+          <a:lstStyle/>
+          <a:p>
+            <a:pPr algn="l">
+              <a:defRPr sz="1000" b="0">
+                <a:solidFill>
+                  <a:srgbClr val="EF4444"/>
+                </a:solidFill>
+                <a:latin typeface="Calibri"/>
+              </a:defRPr>
+            </a:pPr>
+            <a:r>
+              <a:t>✗</a:t>
+            </a:r>
+          </a:p>
+        </p:txBody>
+      </p:sp>
+      <p:sp>
+        <p:nvSpPr>
+          <p:cNvPr id="22" name="TextBox 21"/>
+          <p:cNvSpPr txBox="1"/>
+          <p:nvPr/>
+        </p:nvSpPr>
+        <p:spPr>
+          <a:xfrm>
+            <a:off x="6400800" y="5376672"/>
+            <a:ext cx="1828800" cy="210312"/>
+          </a:xfrm>
+          <a:prstGeom prst="rect">
+            <a:avLst/>
+          </a:prstGeom>
+          <a:noFill/>
+        </p:spPr>
+        <p:txBody>
+          <a:bodyPr wrap="square">
+            <a:spAutoFit/>
+          </a:bodyPr>
+          <a:lstStyle/>
+          <a:p>
+            <a:pPr algn="l">
+              <a:defRPr sz="1000" b="0">
+                <a:solidFill>
+                  <a:srgbClr val="EF4444"/>
+                </a:solidFill>
+                <a:latin typeface="Calibri"/>
+              </a:defRPr>
+            </a:pPr>
+            <a:r>
+              <a:t>✗</a:t>
+            </a:r>
+          </a:p>
+        </p:txBody>
+      </p:sp>
+      <p:sp>
+        <p:nvSpPr>
+          <p:cNvPr id="23" name="TextBox 22"/>
+          <p:cNvSpPr txBox="1"/>
+          <p:nvPr/>
+        </p:nvSpPr>
+        <p:spPr>
+          <a:xfrm>
+            <a:off x="8686800" y="5376672"/>
+            <a:ext cx="2286000" cy="210312"/>
+          </a:xfrm>
+          <a:prstGeom prst="rect">
+            <a:avLst/>
+          </a:prstGeom>
+          <a:noFill/>
+        </p:spPr>
+        <p:txBody>
+          <a:bodyPr wrap="square">
+            <a:spAutoFit/>
+          </a:bodyPr>
+          <a:lstStyle/>
+          <a:p>
+            <a:pPr algn="l">
+              <a:defRPr sz="1000" b="0">
+                <a:solidFill>
+                  <a:srgbClr val="4ADE80"/>
+                </a:solidFill>
+                <a:latin typeface="Calibri"/>
+              </a:defRPr>
+            </a:pPr>
+            <a:r>
+              <a:t>✓</a:t>
+            </a:r>
+          </a:p>
+        </p:txBody>
+      </p:sp>
+      <p:sp>
+        <p:nvSpPr>
+          <p:cNvPr id="24" name="TextBox 23"/>
+          <p:cNvSpPr txBox="1"/>
+          <p:nvPr/>
+        </p:nvSpPr>
+        <p:spPr>
+          <a:xfrm>
+            <a:off x="1097280" y="5586984"/>
+            <a:ext cx="2743200" cy="210312"/>
+          </a:xfrm>
+          <a:prstGeom prst="rect">
+            <a:avLst/>
+          </a:prstGeom>
+          <a:noFill/>
+        </p:spPr>
+        <p:txBody>
+          <a:bodyPr wrap="square">
+            <a:spAutoFit/>
+          </a:bodyPr>
+          <a:lstStyle/>
+          <a:p>
+            <a:pPr algn="l">
+              <a:defRPr sz="1000" b="0">
+                <a:solidFill>
+                  <a:srgbClr val="E2E8F0"/>
+                </a:solidFill>
+                <a:latin typeface="Calibri"/>
+              </a:defRPr>
+            </a:pPr>
+            <a:r>
+              <a:t>Incrementality</a:t>
+            </a:r>
+          </a:p>
+        </p:txBody>
+      </p:sp>
+      <p:sp>
+        <p:nvSpPr>
+          <p:cNvPr id="25" name="TextBox 24"/>
+          <p:cNvSpPr txBox="1"/>
+          <p:nvPr/>
+        </p:nvSpPr>
+        <p:spPr>
+          <a:xfrm>
+            <a:off x="4114800" y="5586984"/>
+            <a:ext cx="1828800" cy="210312"/>
+          </a:xfrm>
+          <a:prstGeom prst="rect">
+            <a:avLst/>
+          </a:prstGeom>
+          <a:noFill/>
+        </p:spPr>
+        <p:txBody>
+          <a:bodyPr wrap="square">
+            <a:spAutoFit/>
+          </a:bodyPr>
+          <a:lstStyle/>
+          <a:p>
+            <a:pPr algn="l">
+              <a:defRPr sz="1000" b="0">
+                <a:solidFill>
+                  <a:srgbClr val="EF4444"/>
+                </a:solidFill>
+                <a:latin typeface="Calibri"/>
+              </a:defRPr>
+            </a:pPr>
+            <a:r>
+              <a:t>✗</a:t>
+            </a:r>
+          </a:p>
+        </p:txBody>
+      </p:sp>
+      <p:sp>
+        <p:nvSpPr>
+          <p:cNvPr id="26" name="TextBox 25"/>
+          <p:cNvSpPr txBox="1"/>
+          <p:nvPr/>
+        </p:nvSpPr>
+        <p:spPr>
+          <a:xfrm>
+            <a:off x="6400800" y="5586984"/>
+            <a:ext cx="1828800" cy="210312"/>
+          </a:xfrm>
+          <a:prstGeom prst="rect">
+            <a:avLst/>
+          </a:prstGeom>
+          <a:noFill/>
+        </p:spPr>
+        <p:txBody>
+          <a:bodyPr wrap="square">
+            <a:spAutoFit/>
+          </a:bodyPr>
+          <a:lstStyle/>
+          <a:p>
+            <a:pPr algn="l">
+              <a:defRPr sz="1000" b="0">
+                <a:solidFill>
+                  <a:srgbClr val="EF4444"/>
+                </a:solidFill>
+                <a:latin typeface="Calibri"/>
+              </a:defRPr>
+            </a:pPr>
+            <a:r>
+              <a:t>✗</a:t>
+            </a:r>
+          </a:p>
+        </p:txBody>
+      </p:sp>
+      <p:sp>
+        <p:nvSpPr>
+          <p:cNvPr id="27" name="TextBox 26"/>
+          <p:cNvSpPr txBox="1"/>
+          <p:nvPr/>
+        </p:nvSpPr>
+        <p:spPr>
+          <a:xfrm>
+            <a:off x="8686800" y="5586984"/>
+            <a:ext cx="2286000" cy="210312"/>
+          </a:xfrm>
+          <a:prstGeom prst="rect">
+            <a:avLst/>
+          </a:prstGeom>
+          <a:noFill/>
+        </p:spPr>
+        <p:txBody>
+          <a:bodyPr wrap="square">
+            <a:spAutoFit/>
+          </a:bodyPr>
+          <a:lstStyle/>
+          <a:p>
+            <a:pPr algn="l">
+              <a:defRPr sz="1000" b="0">
+                <a:solidFill>
+                  <a:srgbClr val="4ADE80"/>
+                </a:solidFill>
+                <a:latin typeface="Calibri"/>
+              </a:defRPr>
+            </a:pPr>
+            <a:r>
+              <a:t>✓ (Faz 4)</a:t>
+            </a:r>
+          </a:p>
+        </p:txBody>
+      </p:sp>
+      <p:sp>
+        <p:nvSpPr>
+          <p:cNvPr id="28" name="TextBox 27"/>
+          <p:cNvSpPr txBox="1"/>
+          <p:nvPr/>
+        </p:nvSpPr>
+        <p:spPr>
+          <a:xfrm>
+            <a:off x="1097280" y="5797296"/>
+            <a:ext cx="2743200" cy="210312"/>
+          </a:xfrm>
+          <a:prstGeom prst="rect">
+            <a:avLst/>
+          </a:prstGeom>
+          <a:noFill/>
+        </p:spPr>
+        <p:txBody>
+          <a:bodyPr wrap="square">
+            <a:spAutoFit/>
+          </a:bodyPr>
+          <a:lstStyle/>
+          <a:p>
+            <a:pPr algn="l">
+              <a:defRPr sz="1000" b="0">
+                <a:solidFill>
+                  <a:srgbClr val="E2E8F0"/>
+                </a:solidFill>
+                <a:latin typeface="Calibri"/>
+              </a:defRPr>
+            </a:pPr>
+            <a:r>
+              <a:t>Cross-Validation</a:t>
+            </a:r>
+          </a:p>
+        </p:txBody>
+      </p:sp>
+      <p:sp>
+        <p:nvSpPr>
+          <p:cNvPr id="29" name="TextBox 28"/>
+          <p:cNvSpPr txBox="1"/>
+          <p:nvPr/>
+        </p:nvSpPr>
+        <p:spPr>
+          <a:xfrm>
+            <a:off x="4114800" y="5797296"/>
+            <a:ext cx="1828800" cy="210312"/>
+          </a:xfrm>
+          <a:prstGeom prst="rect">
+            <a:avLst/>
+          </a:prstGeom>
+          <a:noFill/>
+        </p:spPr>
+        <p:txBody>
+          <a:bodyPr wrap="square">
+            <a:spAutoFit/>
+          </a:bodyPr>
+          <a:lstStyle/>
+          <a:p>
+            <a:pPr algn="l">
+              <a:defRPr sz="1000" b="0">
+                <a:solidFill>
+                  <a:srgbClr val="EF4444"/>
+                </a:solidFill>
+                <a:latin typeface="Calibri"/>
+              </a:defRPr>
+            </a:pPr>
+            <a:r>
+              <a:t>✗</a:t>
+            </a:r>
+          </a:p>
+        </p:txBody>
+      </p:sp>
+      <p:sp>
+        <p:nvSpPr>
+          <p:cNvPr id="30" name="TextBox 29"/>
+          <p:cNvSpPr txBox="1"/>
+          <p:nvPr/>
+        </p:nvSpPr>
+        <p:spPr>
+          <a:xfrm>
+            <a:off x="6400800" y="5797296"/>
+            <a:ext cx="1828800" cy="210312"/>
+          </a:xfrm>
+          <a:prstGeom prst="rect">
+            <a:avLst/>
+          </a:prstGeom>
+          <a:noFill/>
+        </p:spPr>
+        <p:txBody>
+          <a:bodyPr wrap="square">
+            <a:spAutoFit/>
+          </a:bodyPr>
+          <a:lstStyle/>
+          <a:p>
+            <a:pPr algn="l">
+              <a:defRPr sz="1000" b="0">
+                <a:solidFill>
+                  <a:srgbClr val="EF4444"/>
+                </a:solidFill>
+                <a:latin typeface="Calibri"/>
+              </a:defRPr>
+            </a:pPr>
+            <a:r>
+              <a:t>✗</a:t>
+            </a:r>
+          </a:p>
+        </p:txBody>
+      </p:sp>
+      <p:sp>
+        <p:nvSpPr>
+          <p:cNvPr id="31" name="TextBox 30"/>
+          <p:cNvSpPr txBox="1"/>
+          <p:nvPr/>
+        </p:nvSpPr>
+        <p:spPr>
+          <a:xfrm>
+            <a:off x="8686800" y="5797296"/>
+            <a:ext cx="2286000" cy="210312"/>
+          </a:xfrm>
+          <a:prstGeom prst="rect">
+            <a:avLst/>
+          </a:prstGeom>
+          <a:noFill/>
+        </p:spPr>
+        <p:txBody>
+          <a:bodyPr wrap="square">
+            <a:spAutoFit/>
+          </a:bodyPr>
+          <a:lstStyle/>
+          <a:p>
+            <a:pPr algn="l">
+              <a:defRPr sz="1000" b="0">
+                <a:solidFill>
+                  <a:srgbClr val="4ADE80"/>
+                </a:solidFill>
+                <a:latin typeface="Calibri"/>
+              </a:defRPr>
+            </a:pPr>
+            <a:r>
+              <a:t>✓ &gt;%20 uyarı</a:t>
+            </a:r>
+          </a:p>
+        </p:txBody>
+      </p:sp>
+      <p:sp>
+        <p:nvSpPr>
+          <p:cNvPr id="32" name="TextBox 31"/>
+          <p:cNvSpPr txBox="1"/>
+          <p:nvPr/>
+        </p:nvSpPr>
+        <p:spPr>
+          <a:xfrm>
+            <a:off x="1097280" y="6007608"/>
+            <a:ext cx="2743200" cy="210312"/>
+          </a:xfrm>
+          <a:prstGeom prst="rect">
+            <a:avLst/>
+          </a:prstGeom>
+          <a:noFill/>
+        </p:spPr>
+        <p:txBody>
+          <a:bodyPr wrap="square">
+            <a:spAutoFit/>
+          </a:bodyPr>
+          <a:lstStyle/>
+          <a:p>
+            <a:pPr algn="l">
+              <a:defRPr sz="1000" b="0">
+                <a:solidFill>
+                  <a:srgbClr val="E2E8F0"/>
+                </a:solidFill>
+                <a:latin typeface="Calibri"/>
+              </a:defRPr>
+            </a:pPr>
+            <a:r>
+              <a:t>CRM Journey Analizi</a:t>
+            </a:r>
+          </a:p>
+        </p:txBody>
+      </p:sp>
+      <p:sp>
+        <p:nvSpPr>
+          <p:cNvPr id="33" name="TextBox 32"/>
+          <p:cNvSpPr txBox="1"/>
+          <p:nvPr/>
+        </p:nvSpPr>
+        <p:spPr>
+          <a:xfrm>
+            <a:off x="4114800" y="6007608"/>
+            <a:ext cx="1828800" cy="210312"/>
+          </a:xfrm>
+          <a:prstGeom prst="rect">
+            <a:avLst/>
+          </a:prstGeom>
+          <a:noFill/>
+        </p:spPr>
+        <p:txBody>
+          <a:bodyPr wrap="square">
+            <a:spAutoFit/>
+          </a:bodyPr>
+          <a:lstStyle/>
+          <a:p>
+            <a:pPr algn="l">
+              <a:defRPr sz="1000" b="0">
+                <a:solidFill>
+                  <a:srgbClr val="EF4444"/>
+                </a:solidFill>
+                <a:latin typeface="Calibri"/>
+              </a:defRPr>
+            </a:pPr>
+            <a:r>
+              <a:t>✗</a:t>
+            </a:r>
+          </a:p>
+        </p:txBody>
+      </p:sp>
+      <p:sp>
+        <p:nvSpPr>
+          <p:cNvPr id="34" name="TextBox 33"/>
+          <p:cNvSpPr txBox="1"/>
+          <p:nvPr/>
+        </p:nvSpPr>
+        <p:spPr>
+          <a:xfrm>
+            <a:off x="6400800" y="6007608"/>
+            <a:ext cx="1828800" cy="210312"/>
+          </a:xfrm>
+          <a:prstGeom prst="rect">
+            <a:avLst/>
+          </a:prstGeom>
+          <a:noFill/>
+        </p:spPr>
+        <p:txBody>
+          <a:bodyPr wrap="square">
+            <a:spAutoFit/>
+          </a:bodyPr>
+          <a:lstStyle/>
+          <a:p>
+            <a:pPr algn="l">
+              <a:defRPr sz="1000" b="0">
+                <a:solidFill>
+                  <a:srgbClr val="EF4444"/>
+                </a:solidFill>
+                <a:latin typeface="Calibri"/>
+              </a:defRPr>
+            </a:pPr>
+            <a:r>
+              <a:t>✗</a:t>
+            </a:r>
+          </a:p>
+        </p:txBody>
+      </p:sp>
+      <p:sp>
+        <p:nvSpPr>
+          <p:cNvPr id="35" name="TextBox 34"/>
+          <p:cNvSpPr txBox="1"/>
+          <p:nvPr/>
+        </p:nvSpPr>
+        <p:spPr>
+          <a:xfrm>
+            <a:off x="8686800" y="6007608"/>
+            <a:ext cx="2286000" cy="210312"/>
+          </a:xfrm>
+          <a:prstGeom prst="rect">
+            <a:avLst/>
+          </a:prstGeom>
+          <a:noFill/>
+        </p:spPr>
+        <p:txBody>
+          <a:bodyPr wrap="square">
+            <a:spAutoFit/>
+          </a:bodyPr>
+          <a:lstStyle/>
+          <a:p>
+            <a:pPr algn="l">
+              <a:defRPr sz="1000" b="0">
+                <a:solidFill>
+                  <a:srgbClr val="4ADE80"/>
+                </a:solidFill>
+                <a:latin typeface="Calibri"/>
+              </a:defRPr>
+            </a:pPr>
+            <a:r>
+              <a:t>✓</a:t>
+            </a:r>
+          </a:p>
+        </p:txBody>
+      </p:sp>
+      <p:sp>
+        <p:nvSpPr>
+          <p:cNvPr id="36" name="TextBox 35"/>
+          <p:cNvSpPr txBox="1"/>
+          <p:nvPr/>
+        </p:nvSpPr>
+        <p:spPr>
+          <a:xfrm>
+            <a:off x="1097280" y="6217920"/>
+            <a:ext cx="2743200" cy="210312"/>
+          </a:xfrm>
+          <a:prstGeom prst="rect">
+            <a:avLst/>
+          </a:prstGeom>
+          <a:noFill/>
+        </p:spPr>
+        <p:txBody>
+          <a:bodyPr wrap="square">
+            <a:spAutoFit/>
+          </a:bodyPr>
+          <a:lstStyle/>
+          <a:p>
+            <a:pPr algn="l">
+              <a:defRPr sz="1000" b="0">
+                <a:solidFill>
+                  <a:srgbClr val="E2E8F0"/>
+                </a:solidFill>
+                <a:latin typeface="Calibri"/>
+              </a:defRPr>
+            </a:pPr>
+            <a:r>
+              <a:t>Tarafsızlık</a:t>
+            </a:r>
+          </a:p>
+        </p:txBody>
+      </p:sp>
+      <p:sp>
+        <p:nvSpPr>
+          <p:cNvPr id="37" name="TextBox 36"/>
+          <p:cNvSpPr txBox="1"/>
+          <p:nvPr/>
+        </p:nvSpPr>
+        <p:spPr>
+          <a:xfrm>
+            <a:off x="4114800" y="6217920"/>
+            <a:ext cx="1828800" cy="210312"/>
+          </a:xfrm>
+          <a:prstGeom prst="rect">
+            <a:avLst/>
+          </a:prstGeom>
+          <a:noFill/>
+        </p:spPr>
+        <p:txBody>
+          <a:bodyPr wrap="square">
+            <a:spAutoFit/>
+          </a:bodyPr>
+          <a:lstStyle/>
+          <a:p>
+            <a:pPr algn="l">
+              <a:defRPr sz="1000" b="0">
                 <a:solidFill>
                   <a:srgbClr val="94A3B8"/>
                 </a:solidFill>
@@ -3998,130 +5017,35 @@
               </a:defRPr>
             </a:pPr>
             <a:r>
-              <a:t>Haftalık otomatik rapor. Manuel Excel analizi yerine gerçek zamanlı dashboard.</a:t>
-            </a:r>
-          </a:p>
-        </p:txBody>
-      </p:sp>
-      <p:sp>
-        <p:nvSpPr>
-          <p:cNvPr id="14" name="Rounded Rectangle 13"/>
-          <p:cNvSpPr/>
-          <p:nvPr/>
-        </p:nvSpPr>
-        <p:spPr>
-          <a:xfrm>
-            <a:off x="731520" y="4572000"/>
-            <a:ext cx="5120640" cy="2011680"/>
-          </a:xfrm>
-          <a:prstGeom prst="roundRect">
-            <a:avLst/>
-          </a:prstGeom>
-          <a:solidFill>
-            <a:srgbClr val="111827"/>
-          </a:solidFill>
-          <a:ln w="12700">
-            <a:solidFill>
-              <a:srgbClr val="1E293B"/>
-            </a:solidFill>
-          </a:ln>
-          <a:effectLst/>
-        </p:spPr>
-        <p:style>
-          <a:lnRef idx="1">
-            <a:schemeClr val="accent1"/>
-          </a:lnRef>
-          <a:fillRef idx="3">
-            <a:schemeClr val="accent1"/>
-          </a:fillRef>
-          <a:effectRef idx="2">
-            <a:schemeClr val="accent1"/>
-          </a:effectRef>
-          <a:fontRef idx="minor">
-            <a:schemeClr val="lt1"/>
-          </a:fontRef>
-        </p:style>
-        <p:txBody>
-          <a:bodyPr rtlCol="0" anchor="ctr"/>
-          <a:lstStyle/>
-          <a:p>
-            <a:pPr algn="ctr"/>
-          </a:p>
-        </p:txBody>
-      </p:sp>
-      <p:sp>
-        <p:nvSpPr>
-          <p:cNvPr id="15" name="TextBox 14"/>
-          <p:cNvSpPr txBox="1"/>
-          <p:nvPr/>
-        </p:nvSpPr>
-        <p:spPr>
-          <a:xfrm>
-            <a:off x="1097280" y="4663440"/>
-            <a:ext cx="3657600" cy="365760"/>
-          </a:xfrm>
-          <a:prstGeom prst="rect">
-            <a:avLst/>
-          </a:prstGeom>
-          <a:noFill/>
-        </p:spPr>
-        <p:txBody>
-          <a:bodyPr wrap="square">
-            <a:spAutoFit/>
-          </a:bodyPr>
-          <a:lstStyle/>
-          <a:p>
-            <a:pPr algn="l">
-              <a:defRPr sz="1700" b="1">
-                <a:solidFill>
-                  <a:srgbClr val="E2E8F0"/>
-                </a:solidFill>
-                <a:latin typeface="Calibri"/>
-              </a:defRPr>
-            </a:pPr>
-            <a:r>
-              <a:t>Ajans için</a:t>
-            </a:r>
-          </a:p>
-        </p:txBody>
-      </p:sp>
-      <p:sp>
-        <p:nvSpPr>
-          <p:cNvPr id="16" name="TextBox 15"/>
-          <p:cNvSpPr txBox="1"/>
-          <p:nvPr/>
-        </p:nvSpPr>
-        <p:spPr>
-          <a:xfrm>
-            <a:off x="1097280" y="5074920"/>
-            <a:ext cx="4572000" cy="1371600"/>
-          </a:xfrm>
-          <a:prstGeom prst="rect">
-            <a:avLst/>
-          </a:prstGeom>
-          <a:noFill/>
-        </p:spPr>
-        <p:txBody>
-          <a:bodyPr wrap="square">
-            <a:spAutoFit/>
-          </a:bodyPr>
-          <a:lstStyle/>
-          <a:p>
-            <a:pPr algn="l">
-              <a:defRPr sz="1200" b="0">
-                <a:solidFill>
-                  <a:srgbClr val="E2E8F0"/>
-                </a:solidFill>
-                <a:latin typeface="Calibri"/>
-              </a:defRPr>
-            </a:pPr>
-          </a:p>
-          <a:p>
-            <a:pPr>
-              <a:spcBef>
-                <a:spcPts val="400"/>
-              </a:spcBef>
-              <a:defRPr sz="1200" b="0">
+              <a:t>Google yanlı</a:t>
+            </a:r>
+          </a:p>
+        </p:txBody>
+      </p:sp>
+      <p:sp>
+        <p:nvSpPr>
+          <p:cNvPr id="38" name="TextBox 37"/>
+          <p:cNvSpPr txBox="1"/>
+          <p:nvPr/>
+        </p:nvSpPr>
+        <p:spPr>
+          <a:xfrm>
+            <a:off x="6400800" y="6217920"/>
+            <a:ext cx="1828800" cy="210312"/>
+          </a:xfrm>
+          <a:prstGeom prst="rect">
+            <a:avLst/>
+          </a:prstGeom>
+          <a:noFill/>
+        </p:spPr>
+        <p:txBody>
+          <a:bodyPr wrap="square">
+            <a:spAutoFit/>
+          </a:bodyPr>
+          <a:lstStyle/>
+          <a:p>
+            <a:pPr algn="l">
+              <a:defRPr sz="1000" b="0">
                 <a:solidFill>
                   <a:srgbClr val="94A3B8"/>
                 </a:solidFill>
@@ -4129,241 +5053,50 @@
               </a:defRPr>
             </a:pPr>
             <a:r>
-              <a:t>•  Müşteriye veri destekli strateji sunma kapasitesi</a:t>
-            </a:r>
-          </a:p>
-          <a:p>
-            <a:pPr>
-              <a:spcBef>
-                <a:spcPts val="400"/>
-              </a:spcBef>
-              <a:defRPr sz="1200" b="0">
-                <a:solidFill>
-                  <a:srgbClr val="94A3B8"/>
-                </a:solidFill>
-                <a:latin typeface="Calibri"/>
-              </a:defRPr>
-            </a:pPr>
-            <a:r>
-              <a:t>•  Platform bağımsız, tarafsız ölçüm</a:t>
-            </a:r>
-          </a:p>
-          <a:p>
-            <a:pPr>
-              <a:spcBef>
-                <a:spcPts val="400"/>
-              </a:spcBef>
-              <a:defRPr sz="1200" b="0">
-                <a:solidFill>
-                  <a:srgbClr val="94A3B8"/>
-                </a:solidFill>
-                <a:latin typeface="Calibri"/>
-              </a:defRPr>
-            </a:pPr>
-            <a:r>
-              <a:t>•  Yeni müşteri pitch'lerinde rekabet avantajı</a:t>
-            </a:r>
-          </a:p>
-          <a:p>
-            <a:pPr>
-              <a:spcBef>
-                <a:spcPts val="400"/>
-              </a:spcBef>
-              <a:defRPr sz="1200" b="0">
-                <a:solidFill>
-                  <a:srgbClr val="94A3B8"/>
-                </a:solidFill>
-                <a:latin typeface="Calibri"/>
-              </a:defRPr>
-            </a:pPr>
-            <a:r>
-              <a:t>•  Birden fazla müşteri/kampanyayı tek platformda yönetme</a:t>
-            </a:r>
-          </a:p>
-        </p:txBody>
-      </p:sp>
-      <p:sp>
-        <p:nvSpPr>
-          <p:cNvPr id="17" name="Rounded Rectangle 16"/>
-          <p:cNvSpPr/>
-          <p:nvPr/>
-        </p:nvSpPr>
-        <p:spPr>
-          <a:xfrm>
-            <a:off x="6309360" y="4572000"/>
-            <a:ext cx="5120640" cy="2011680"/>
-          </a:xfrm>
-          <a:prstGeom prst="roundRect">
-            <a:avLst/>
-          </a:prstGeom>
-          <a:solidFill>
-            <a:srgbClr val="111827"/>
-          </a:solidFill>
-          <a:ln w="12700">
-            <a:solidFill>
-              <a:srgbClr val="1E293B"/>
-            </a:solidFill>
-          </a:ln>
-          <a:effectLst/>
-        </p:spPr>
-        <p:style>
-          <a:lnRef idx="1">
-            <a:schemeClr val="accent1"/>
-          </a:lnRef>
-          <a:fillRef idx="3">
-            <a:schemeClr val="accent1"/>
-          </a:fillRef>
-          <a:effectRef idx="2">
-            <a:schemeClr val="accent1"/>
-          </a:effectRef>
-          <a:fontRef idx="minor">
-            <a:schemeClr val="lt1"/>
-          </a:fontRef>
-        </p:style>
-        <p:txBody>
-          <a:bodyPr rtlCol="0" anchor="ctr"/>
-          <a:lstStyle/>
-          <a:p>
-            <a:pPr algn="ctr"/>
-          </a:p>
-        </p:txBody>
-      </p:sp>
-      <p:sp>
-        <p:nvSpPr>
-          <p:cNvPr id="18" name="TextBox 17"/>
-          <p:cNvSpPr txBox="1"/>
-          <p:nvPr/>
-        </p:nvSpPr>
-        <p:spPr>
-          <a:xfrm>
-            <a:off x="6675120" y="4663440"/>
-            <a:ext cx="3657600" cy="365760"/>
-          </a:xfrm>
-          <a:prstGeom prst="rect">
-            <a:avLst/>
-          </a:prstGeom>
-          <a:noFill/>
-        </p:spPr>
-        <p:txBody>
-          <a:bodyPr wrap="square">
-            <a:spAutoFit/>
-          </a:bodyPr>
-          <a:lstStyle/>
-          <a:p>
-            <a:pPr algn="l">
-              <a:defRPr sz="1700" b="1">
-                <a:solidFill>
-                  <a:srgbClr val="E2E8F0"/>
-                </a:solidFill>
-                <a:latin typeface="Calibri"/>
-              </a:defRPr>
-            </a:pPr>
-            <a:r>
-              <a:t>Müşteri (Reklamveren) için</a:t>
-            </a:r>
-          </a:p>
-        </p:txBody>
-      </p:sp>
-      <p:sp>
-        <p:nvSpPr>
-          <p:cNvPr id="19" name="TextBox 18"/>
-          <p:cNvSpPr txBox="1"/>
-          <p:nvPr/>
-        </p:nvSpPr>
-        <p:spPr>
-          <a:xfrm>
-            <a:off x="6675120" y="5074920"/>
-            <a:ext cx="4572000" cy="1371600"/>
-          </a:xfrm>
-          <a:prstGeom prst="rect">
-            <a:avLst/>
-          </a:prstGeom>
-          <a:noFill/>
-        </p:spPr>
-        <p:txBody>
-          <a:bodyPr wrap="square">
-            <a:spAutoFit/>
-          </a:bodyPr>
-          <a:lstStyle/>
-          <a:p>
-            <a:pPr algn="l">
-              <a:defRPr sz="1200" b="0">
-                <a:solidFill>
-                  <a:srgbClr val="E2E8F0"/>
-                </a:solidFill>
-                <a:latin typeface="Calibri"/>
-              </a:defRPr>
-            </a:pPr>
-          </a:p>
-          <a:p>
-            <a:pPr>
-              <a:spcBef>
-                <a:spcPts val="400"/>
-              </a:spcBef>
-              <a:defRPr sz="1200" b="0">
-                <a:solidFill>
-                  <a:srgbClr val="94A3B8"/>
-                </a:solidFill>
-                <a:latin typeface="Calibri"/>
-              </a:defRPr>
-            </a:pPr>
-            <a:r>
-              <a:t>•  Bütçe israfının veri ile tespiti</a:t>
-            </a:r>
-          </a:p>
-          <a:p>
-            <a:pPr>
-              <a:spcBef>
-                <a:spcPts val="400"/>
-              </a:spcBef>
-              <a:defRPr sz="1200" b="0">
-                <a:solidFill>
-                  <a:srgbClr val="94A3B8"/>
-                </a:solidFill>
-                <a:latin typeface="Calibri"/>
-              </a:defRPr>
-            </a:pPr>
-            <a:r>
-              <a:t>•  Online ve offline birlikte ölçüm</a:t>
-            </a:r>
-          </a:p>
-          <a:p>
-            <a:pPr>
-              <a:spcBef>
-                <a:spcPts val="400"/>
-              </a:spcBef>
-              <a:defRPr sz="1200" b="0">
-                <a:solidFill>
-                  <a:srgbClr val="94A3B8"/>
-                </a:solidFill>
-                <a:latin typeface="Calibri"/>
-              </a:defRPr>
-            </a:pPr>
-            <a:r>
-              <a:t>•  Incrementality test ile kanıtlanmış ROI</a:t>
-            </a:r>
-          </a:p>
-          <a:p>
-            <a:pPr>
-              <a:spcBef>
-                <a:spcPts val="400"/>
-              </a:spcBef>
-              <a:defRPr sz="1200" b="0">
-                <a:solidFill>
-                  <a:srgbClr val="94A3B8"/>
-                </a:solidFill>
-                <a:latin typeface="Calibri"/>
-              </a:defRPr>
-            </a:pPr>
-            <a:r>
-              <a:t>•  Haftalık karar desteği ile çevik kampanya yönetimi</a:t>
-            </a:r>
-          </a:p>
-        </p:txBody>
-      </p:sp>
-      <p:sp>
-        <p:nvSpPr>
-          <p:cNvPr id="20" name="TextBox 19"/>
+              <a:t>Meta yanlı</a:t>
+            </a:r>
+          </a:p>
+        </p:txBody>
+      </p:sp>
+      <p:sp>
+        <p:nvSpPr>
+          <p:cNvPr id="39" name="TextBox 38"/>
+          <p:cNvSpPr txBox="1"/>
+          <p:nvPr/>
+        </p:nvSpPr>
+        <p:spPr>
+          <a:xfrm>
+            <a:off x="8686800" y="6217920"/>
+            <a:ext cx="2286000" cy="210312"/>
+          </a:xfrm>
+          <a:prstGeom prst="rect">
+            <a:avLst/>
+          </a:prstGeom>
+          <a:noFill/>
+        </p:spPr>
+        <p:txBody>
+          <a:bodyPr wrap="square">
+            <a:spAutoFit/>
+          </a:bodyPr>
+          <a:lstStyle/>
+          <a:p>
+            <a:pPr algn="l">
+              <a:defRPr sz="1000" b="0">
+                <a:solidFill>
+                  <a:srgbClr val="4ADE80"/>
+                </a:solidFill>
+                <a:latin typeface="Calibri"/>
+              </a:defRPr>
+            </a:pPr>
+            <a:r>
+              <a:t>✓ Bağımsız</a:t>
+            </a:r>
+          </a:p>
+        </p:txBody>
+      </p:sp>
+      <p:sp>
+        <p:nvSpPr>
+          <p:cNvPr id="40" name="TextBox 39"/>
           <p:cNvSpPr txBox="1"/>
           <p:nvPr/>
         </p:nvSpPr>
@@ -4392,7 +5125,7 @@
               </a:defRPr>
             </a:pPr>
             <a:r>
-              <a:t>10 / 13</a:t>
+              <a:t>10 / 14</a:t>
             </a:r>
           </a:p>
         </p:txBody>
@@ -4454,7 +5187,7 @@
               </a:defRPr>
             </a:pPr>
             <a:r>
-              <a:t>ÖLÇEKLENEBİLİRLİK</a:t>
+              <a:t>KATMA DEĞER</a:t>
             </a:r>
           </a:p>
         </p:txBody>
@@ -4468,7 +5201,7 @@
         <p:spPr>
           <a:xfrm>
             <a:off x="731520" y="914400"/>
-            <a:ext cx="10058400" cy="640080"/>
+            <a:ext cx="9144000" cy="640080"/>
           </a:xfrm>
           <a:prstGeom prst="rect">
             <a:avLst/>
@@ -4490,57 +5223,21 @@
               </a:defRPr>
             </a:pPr>
             <a:r>
-              <a:t>Tek platform, tüm müşteriler</a:t>
-            </a:r>
-          </a:p>
-        </p:txBody>
-      </p:sp>
-      <p:sp>
-        <p:nvSpPr>
-          <p:cNvPr id="4" name="TextBox 3"/>
-          <p:cNvSpPr txBox="1"/>
-          <p:nvPr/>
-        </p:nvSpPr>
-        <p:spPr>
-          <a:xfrm>
-            <a:off x="731520" y="1645920"/>
-            <a:ext cx="8229600" cy="457200"/>
-          </a:xfrm>
-          <a:prstGeom prst="rect">
-            <a:avLst/>
-          </a:prstGeom>
-          <a:noFill/>
-        </p:spPr>
-        <p:txBody>
-          <a:bodyPr wrap="square">
-            <a:spAutoFit/>
-          </a:bodyPr>
-          <a:lstStyle/>
-          <a:p>
-            <a:pPr algn="l">
-              <a:defRPr sz="1500" b="0">
-                <a:solidFill>
-                  <a:srgbClr val="94A3B8"/>
-                </a:solidFill>
-                <a:latin typeface="Calibri"/>
-              </a:defRPr>
-            </a:pPr>
-            <a:r>
-              <a:t>Time's Hub sadece tek bir kampanya için değil — tüm müşteri portföyünü yönetmek için tasarlandı.</a:t>
-            </a:r>
-          </a:p>
-        </p:txBody>
-      </p:sp>
-      <p:sp>
-        <p:nvSpPr>
-          <p:cNvPr id="5" name="Rounded Rectangle 4"/>
+              <a:t>Time's Hub ne kazandırır?</a:t>
+            </a:r>
+          </a:p>
+        </p:txBody>
+      </p:sp>
+      <p:sp>
+        <p:nvSpPr>
+          <p:cNvPr id="4" name="Rounded Rectangle 3"/>
           <p:cNvSpPr/>
           <p:nvPr/>
         </p:nvSpPr>
         <p:spPr>
           <a:xfrm>
-            <a:off x="731520" y="2377440"/>
-            <a:ext cx="6400800" cy="4114800"/>
+            <a:off x="731520" y="1828800"/>
+            <a:ext cx="3383280" cy="2377440"/>
           </a:xfrm>
           <a:prstGeom prst="roundRect">
             <a:avLst/>
@@ -4579,14 +5276,57 @@
       </p:sp>
       <p:sp>
         <p:nvSpPr>
+          <p:cNvPr id="5" name="Rectangle 4"/>
+          <p:cNvSpPr/>
+          <p:nvPr/>
+        </p:nvSpPr>
+        <p:spPr>
+          <a:xfrm>
+            <a:off x="731520" y="1828800"/>
+            <a:ext cx="3383280" cy="38100"/>
+          </a:xfrm>
+          <a:prstGeom prst="rect">
+            <a:avLst/>
+          </a:prstGeom>
+          <a:solidFill>
+            <a:srgbClr val="F97316"/>
+          </a:solidFill>
+          <a:ln>
+            <a:noFill/>
+          </a:ln>
+        </p:spPr>
+        <p:style>
+          <a:lnRef idx="1">
+            <a:schemeClr val="accent1"/>
+          </a:lnRef>
+          <a:fillRef idx="3">
+            <a:schemeClr val="accent1"/>
+          </a:fillRef>
+          <a:effectRef idx="2">
+            <a:schemeClr val="accent1"/>
+          </a:effectRef>
+          <a:fontRef idx="minor">
+            <a:schemeClr val="lt1"/>
+          </a:fontRef>
+        </p:style>
+        <p:txBody>
+          <a:bodyPr rtlCol="0" anchor="ctr"/>
+          <a:lstStyle/>
+          <a:p>
+            <a:pPr algn="ctr"/>
+          </a:p>
+        </p:txBody>
+      </p:sp>
+      <p:sp>
+        <p:nvSpPr>
           <p:cNvPr id="6" name="TextBox 5"/>
           <p:cNvSpPr txBox="1"/>
           <p:nvPr/>
         </p:nvSpPr>
         <p:spPr>
           <a:xfrm>
-            <a:off x="1097280" y="2514600"/>
-            <a:ext cx="3657600" cy="365760"/>
+            <a:off x="914400" y="2011680"/>
+            <a:ext cx="3017520" cy="365760"/>
           </a:xfrm>
           <a:prstGeom prst="rect">
             <a:avLst/>
@@ -4602,13 +5342,13 @@
             <a:pPr algn="l">
               <a:defRPr sz="1700" b="1">
                 <a:solidFill>
-                  <a:srgbClr val="E2E8F0"/>
-                </a:solidFill>
-                <a:latin typeface="Calibri"/>
-              </a:defRPr>
-            </a:pPr>
-            <a:r>
-              <a:t>Aktif Müşteriler</a:t>
+                  <a:srgbClr val="F97316"/>
+                </a:solidFill>
+                <a:latin typeface="Calibri"/>
+              </a:defRPr>
+            </a:pPr>
+            <a:r>
+              <a:t>₺  Bütçe Optimizasyonu</a:t>
             </a:r>
           </a:p>
         </p:txBody>
@@ -4621,130 +5361,22 @@
         </p:nvSpPr>
         <p:spPr>
           <a:xfrm>
-            <a:off x="1097280" y="3017520"/>
-            <a:ext cx="1828800" cy="274320"/>
-          </a:xfrm>
-          <a:prstGeom prst="rect">
-            <a:avLst/>
-          </a:prstGeom>
-          <a:noFill/>
-        </p:spPr>
-        <p:txBody>
-          <a:bodyPr wrap="square">
-            <a:spAutoFit/>
-          </a:bodyPr>
-          <a:lstStyle/>
-          <a:p>
-            <a:pPr algn="l">
-              <a:defRPr sz="1100" b="1">
-                <a:solidFill>
-                  <a:srgbClr val="64748B"/>
-                </a:solidFill>
-                <a:latin typeface="Calibri"/>
-              </a:defRPr>
-            </a:pPr>
-            <a:r>
-              <a:t>Müşteri</a:t>
-            </a:r>
-          </a:p>
-        </p:txBody>
-      </p:sp>
-      <p:sp>
-        <p:nvSpPr>
-          <p:cNvPr id="8" name="TextBox 7"/>
-          <p:cNvSpPr txBox="1"/>
-          <p:nvPr/>
-        </p:nvSpPr>
-        <p:spPr>
-          <a:xfrm>
-            <a:off x="3200400" y="3017520"/>
-            <a:ext cx="1828800" cy="274320"/>
-          </a:xfrm>
-          <a:prstGeom prst="rect">
-            <a:avLst/>
-          </a:prstGeom>
-          <a:noFill/>
-        </p:spPr>
-        <p:txBody>
-          <a:bodyPr wrap="square">
-            <a:spAutoFit/>
-          </a:bodyPr>
-          <a:lstStyle/>
-          <a:p>
-            <a:pPr algn="l">
-              <a:defRPr sz="1100" b="1">
-                <a:solidFill>
-                  <a:srgbClr val="64748B"/>
-                </a:solidFill>
-                <a:latin typeface="Calibri"/>
-              </a:defRPr>
-            </a:pPr>
-            <a:r>
-              <a:t>Kampanyalar</a:t>
-            </a:r>
-          </a:p>
-        </p:txBody>
-      </p:sp>
-      <p:sp>
-        <p:nvSpPr>
-          <p:cNvPr id="9" name="TextBox 8"/>
-          <p:cNvSpPr txBox="1"/>
-          <p:nvPr/>
-        </p:nvSpPr>
-        <p:spPr>
-          <a:xfrm>
-            <a:off x="1097280" y="3383280"/>
-            <a:ext cx="1828800" cy="274320"/>
-          </a:xfrm>
-          <a:prstGeom prst="rect">
-            <a:avLst/>
-          </a:prstGeom>
-          <a:noFill/>
-        </p:spPr>
-        <p:txBody>
-          <a:bodyPr wrap="square">
-            <a:spAutoFit/>
-          </a:bodyPr>
-          <a:lstStyle/>
-          <a:p>
-            <a:pPr algn="l">
-              <a:defRPr sz="1300" b="1">
-                <a:solidFill>
-                  <a:srgbClr val="E2E8F0"/>
-                </a:solidFill>
-                <a:latin typeface="Calibri"/>
-              </a:defRPr>
-            </a:pPr>
-            <a:r>
-              <a:t>Petrol Ofisi</a:t>
-            </a:r>
-          </a:p>
-        </p:txBody>
-      </p:sp>
-      <p:sp>
-        <p:nvSpPr>
-          <p:cNvPr id="10" name="TextBox 9"/>
-          <p:cNvSpPr txBox="1"/>
-          <p:nvPr/>
-        </p:nvSpPr>
-        <p:spPr>
-          <a:xfrm>
-            <a:off x="3200400" y="3383280"/>
-            <a:ext cx="3840480" cy="274320"/>
-          </a:xfrm>
-          <a:prstGeom prst="rect">
-            <a:avLst/>
-          </a:prstGeom>
-          <a:noFill/>
-        </p:spPr>
-        <p:txBody>
-          <a:bodyPr wrap="square">
-            <a:spAutoFit/>
-          </a:bodyPr>
-          <a:lstStyle/>
-          <a:p>
-            <a:pPr algn="l">
-              <a:defRPr sz="1200" b="0">
+            <a:off x="914400" y="2514600"/>
+            <a:ext cx="3017520" cy="1371600"/>
+          </a:xfrm>
+          <a:prstGeom prst="rect">
+            <a:avLst/>
+          </a:prstGeom>
+          <a:noFill/>
+        </p:spPr>
+        <p:txBody>
+          <a:bodyPr wrap="square">
+            <a:spAutoFit/>
+          </a:bodyPr>
+          <a:lstStyle/>
+          <a:p>
+            <a:pPr algn="l">
+              <a:defRPr sz="1300" b="0">
                 <a:solidFill>
                   <a:srgbClr val="94A3B8"/>
                 </a:solidFill>
@@ -4752,381 +5384,21 @@
               </a:defRPr>
             </a:pPr>
             <a:r>
-              <a:t>Premium Market, AutoMatic Filo</a:t>
-            </a:r>
-          </a:p>
-        </p:txBody>
-      </p:sp>
-      <p:sp>
-        <p:nvSpPr>
-          <p:cNvPr id="11" name="TextBox 10"/>
-          <p:cNvSpPr txBox="1"/>
-          <p:nvPr/>
-        </p:nvSpPr>
-        <p:spPr>
-          <a:xfrm>
-            <a:off x="1097280" y="3886200"/>
-            <a:ext cx="1828800" cy="274320"/>
-          </a:xfrm>
-          <a:prstGeom prst="rect">
-            <a:avLst/>
-          </a:prstGeom>
-          <a:noFill/>
-        </p:spPr>
-        <p:txBody>
-          <a:bodyPr wrap="square">
-            <a:spAutoFit/>
-          </a:bodyPr>
-          <a:lstStyle/>
-          <a:p>
-            <a:pPr algn="l">
-              <a:defRPr sz="1300" b="1">
-                <a:solidFill>
-                  <a:srgbClr val="E2E8F0"/>
-                </a:solidFill>
-                <a:latin typeface="Calibri"/>
-              </a:defRPr>
-            </a:pPr>
-            <a:r>
-              <a:t>EnerjiSA</a:t>
-            </a:r>
-          </a:p>
-        </p:txBody>
-      </p:sp>
-      <p:sp>
-        <p:nvSpPr>
-          <p:cNvPr id="12" name="TextBox 11"/>
-          <p:cNvSpPr txBox="1"/>
-          <p:nvPr/>
-        </p:nvSpPr>
-        <p:spPr>
-          <a:xfrm>
-            <a:off x="3200400" y="3886200"/>
-            <a:ext cx="3840480" cy="274320"/>
-          </a:xfrm>
-          <a:prstGeom prst="rect">
-            <a:avLst/>
-          </a:prstGeom>
-          <a:noFill/>
-        </p:spPr>
-        <p:txBody>
-          <a:bodyPr wrap="square">
-            <a:spAutoFit/>
-          </a:bodyPr>
-          <a:lstStyle/>
-          <a:p>
-            <a:pPr algn="l">
-              <a:defRPr sz="1200" b="0">
-                <a:solidFill>
-                  <a:srgbClr val="94A3B8"/>
-                </a:solidFill>
-                <a:latin typeface="Calibri"/>
-              </a:defRPr>
-            </a:pPr>
-            <a:r>
-              <a:t>30.Yıl İletişimi</a:t>
-            </a:r>
-          </a:p>
-        </p:txBody>
-      </p:sp>
-      <p:sp>
-        <p:nvSpPr>
-          <p:cNvPr id="13" name="TextBox 12"/>
-          <p:cNvSpPr txBox="1"/>
-          <p:nvPr/>
-        </p:nvSpPr>
-        <p:spPr>
-          <a:xfrm>
-            <a:off x="1097280" y="4389120"/>
-            <a:ext cx="1828800" cy="274320"/>
-          </a:xfrm>
-          <a:prstGeom prst="rect">
-            <a:avLst/>
-          </a:prstGeom>
-          <a:noFill/>
-        </p:spPr>
-        <p:txBody>
-          <a:bodyPr wrap="square">
-            <a:spAutoFit/>
-          </a:bodyPr>
-          <a:lstStyle/>
-          <a:p>
-            <a:pPr algn="l">
-              <a:defRPr sz="1300" b="1">
-                <a:solidFill>
-                  <a:srgbClr val="E2E8F0"/>
-                </a:solidFill>
-                <a:latin typeface="Calibri"/>
-              </a:defRPr>
-            </a:pPr>
-            <a:r>
-              <a:t>Uludağ İçecek</a:t>
-            </a:r>
-          </a:p>
-        </p:txBody>
-      </p:sp>
-      <p:sp>
-        <p:nvSpPr>
-          <p:cNvPr id="14" name="TextBox 13"/>
-          <p:cNvSpPr txBox="1"/>
-          <p:nvPr/>
-        </p:nvSpPr>
-        <p:spPr>
-          <a:xfrm>
-            <a:off x="3200400" y="4389120"/>
-            <a:ext cx="3840480" cy="274320"/>
-          </a:xfrm>
-          <a:prstGeom prst="rect">
-            <a:avLst/>
-          </a:prstGeom>
-          <a:noFill/>
-        </p:spPr>
-        <p:txBody>
-          <a:bodyPr wrap="square">
-            <a:spAutoFit/>
-          </a:bodyPr>
-          <a:lstStyle/>
-          <a:p>
-            <a:pPr algn="l">
-              <a:defRPr sz="1200" b="0">
-                <a:solidFill>
-                  <a:srgbClr val="94A3B8"/>
-                </a:solidFill>
-                <a:latin typeface="Calibri"/>
-              </a:defRPr>
-            </a:pPr>
-            <a:r>
-              <a:t>Limonata, Premium Su, Soda, Frutti, Portakallı</a:t>
-            </a:r>
-          </a:p>
-        </p:txBody>
-      </p:sp>
-      <p:sp>
-        <p:nvSpPr>
-          <p:cNvPr id="15" name="TextBox 14"/>
-          <p:cNvSpPr txBox="1"/>
-          <p:nvPr/>
-        </p:nvSpPr>
-        <p:spPr>
-          <a:xfrm>
-            <a:off x="1097280" y="4892040"/>
-            <a:ext cx="1828800" cy="274320"/>
-          </a:xfrm>
-          <a:prstGeom prst="rect">
-            <a:avLst/>
-          </a:prstGeom>
-          <a:noFill/>
-        </p:spPr>
-        <p:txBody>
-          <a:bodyPr wrap="square">
-            <a:spAutoFit/>
-          </a:bodyPr>
-          <a:lstStyle/>
-          <a:p>
-            <a:pPr algn="l">
-              <a:defRPr sz="1300" b="1">
-                <a:solidFill>
-                  <a:srgbClr val="E2E8F0"/>
-                </a:solidFill>
-                <a:latin typeface="Calibri"/>
-              </a:defRPr>
-            </a:pPr>
-            <a:r>
-              <a:t>UNICEF</a:t>
-            </a:r>
-          </a:p>
-        </p:txBody>
-      </p:sp>
-      <p:sp>
-        <p:nvSpPr>
-          <p:cNvPr id="16" name="TextBox 15"/>
-          <p:cNvSpPr txBox="1"/>
-          <p:nvPr/>
-        </p:nvSpPr>
-        <p:spPr>
-          <a:xfrm>
-            <a:off x="3200400" y="4892040"/>
-            <a:ext cx="3840480" cy="274320"/>
-          </a:xfrm>
-          <a:prstGeom prst="rect">
-            <a:avLst/>
-          </a:prstGeom>
-          <a:noFill/>
-        </p:spPr>
-        <p:txBody>
-          <a:bodyPr wrap="square">
-            <a:spAutoFit/>
-          </a:bodyPr>
-          <a:lstStyle/>
-          <a:p>
-            <a:pPr algn="l">
-              <a:defRPr sz="1200" b="0">
-                <a:solidFill>
-                  <a:srgbClr val="94A3B8"/>
-                </a:solidFill>
-                <a:latin typeface="Calibri"/>
-              </a:defRPr>
-            </a:pPr>
-            <a:r>
-              <a:t>6 Şubat Deprem, Dünya Kız Çocukları Günü, Dünya Günü</a:t>
-            </a:r>
-          </a:p>
-        </p:txBody>
-      </p:sp>
-      <p:sp>
-        <p:nvSpPr>
-          <p:cNvPr id="17" name="TextBox 16"/>
-          <p:cNvSpPr txBox="1"/>
-          <p:nvPr/>
-        </p:nvSpPr>
-        <p:spPr>
-          <a:xfrm>
-            <a:off x="1097280" y="5394960"/>
-            <a:ext cx="1828800" cy="274320"/>
-          </a:xfrm>
-          <a:prstGeom prst="rect">
-            <a:avLst/>
-          </a:prstGeom>
-          <a:noFill/>
-        </p:spPr>
-        <p:txBody>
-          <a:bodyPr wrap="square">
-            <a:spAutoFit/>
-          </a:bodyPr>
-          <a:lstStyle/>
-          <a:p>
-            <a:pPr algn="l">
-              <a:defRPr sz="1300" b="1">
-                <a:solidFill>
-                  <a:srgbClr val="E2E8F0"/>
-                </a:solidFill>
-                <a:latin typeface="Calibri"/>
-              </a:defRPr>
-            </a:pPr>
-            <a:r>
-              <a:t>Hayhay</a:t>
-            </a:r>
-          </a:p>
-        </p:txBody>
-      </p:sp>
-      <p:sp>
-        <p:nvSpPr>
-          <p:cNvPr id="18" name="TextBox 17"/>
-          <p:cNvSpPr txBox="1"/>
-          <p:nvPr/>
-        </p:nvSpPr>
-        <p:spPr>
-          <a:xfrm>
-            <a:off x="3200400" y="5394960"/>
-            <a:ext cx="3840480" cy="274320"/>
-          </a:xfrm>
-          <a:prstGeom prst="rect">
-            <a:avLst/>
-          </a:prstGeom>
-          <a:noFill/>
-        </p:spPr>
-        <p:txBody>
-          <a:bodyPr wrap="square">
-            <a:spAutoFit/>
-          </a:bodyPr>
-          <a:lstStyle/>
-          <a:p>
-            <a:pPr algn="l">
-              <a:defRPr sz="1200" b="0">
-                <a:solidFill>
-                  <a:srgbClr val="94A3B8"/>
-                </a:solidFill>
-                <a:latin typeface="Calibri"/>
-              </a:defRPr>
-            </a:pPr>
-            <a:r>
-              <a:t>POS Cihazı, Dijital Cüzdan, Tüketici Finansmanı</a:t>
-            </a:r>
-          </a:p>
-        </p:txBody>
-      </p:sp>
-      <p:sp>
-        <p:nvSpPr>
-          <p:cNvPr id="19" name="TextBox 18"/>
-          <p:cNvSpPr txBox="1"/>
-          <p:nvPr/>
-        </p:nvSpPr>
-        <p:spPr>
-          <a:xfrm>
-            <a:off x="1097280" y="5897880"/>
-            <a:ext cx="1828800" cy="274320"/>
-          </a:xfrm>
-          <a:prstGeom prst="rect">
-            <a:avLst/>
-          </a:prstGeom>
-          <a:noFill/>
-        </p:spPr>
-        <p:txBody>
-          <a:bodyPr wrap="square">
-            <a:spAutoFit/>
-          </a:bodyPr>
-          <a:lstStyle/>
-          <a:p>
-            <a:pPr algn="l">
-              <a:defRPr sz="1300" b="1">
-                <a:solidFill>
-                  <a:srgbClr val="E2E8F0"/>
-                </a:solidFill>
-                <a:latin typeface="Calibri"/>
-              </a:defRPr>
-            </a:pPr>
-            <a:r>
-              <a:t>TLC/Gree Klima</a:t>
-            </a:r>
-          </a:p>
-        </p:txBody>
-      </p:sp>
-      <p:sp>
-        <p:nvSpPr>
-          <p:cNvPr id="20" name="TextBox 19"/>
-          <p:cNvSpPr txBox="1"/>
-          <p:nvPr/>
-        </p:nvSpPr>
-        <p:spPr>
-          <a:xfrm>
-            <a:off x="3200400" y="5897880"/>
-            <a:ext cx="3840480" cy="274320"/>
-          </a:xfrm>
-          <a:prstGeom prst="rect">
-            <a:avLst/>
-          </a:prstGeom>
-          <a:noFill/>
-        </p:spPr>
-        <p:txBody>
-          <a:bodyPr wrap="square">
-            <a:spAutoFit/>
-          </a:bodyPr>
-          <a:lstStyle/>
-          <a:p>
-            <a:pPr algn="l">
-              <a:defRPr sz="1200" b="0">
-                <a:solidFill>
-                  <a:srgbClr val="94A3B8"/>
-                </a:solidFill>
-                <a:latin typeface="Calibri"/>
-              </a:defRPr>
-            </a:pPr>
-            <a:r>
-              <a:t>Sevgililer Günü, Yaz'a Merhaba, Kış Kampanyası</a:t>
-            </a:r>
-          </a:p>
-        </p:txBody>
-      </p:sp>
-      <p:sp>
-        <p:nvSpPr>
-          <p:cNvPr id="21" name="Rounded Rectangle 20"/>
+              <a:t>Düşük ROI kanallardan yüksek ROI kanallara veri odaklı kaydırma. Aynı bütçeyle daha fazla lead.</a:t>
+            </a:r>
+          </a:p>
+        </p:txBody>
+      </p:sp>
+      <p:sp>
+        <p:nvSpPr>
+          <p:cNvPr id="8" name="Rounded Rectangle 7"/>
           <p:cNvSpPr/>
           <p:nvPr/>
         </p:nvSpPr>
         <p:spPr>
           <a:xfrm>
-            <a:off x="7589520" y="2377440"/>
-            <a:ext cx="3840480" cy="4114800"/>
+            <a:off x="4480559" y="1828800"/>
+            <a:ext cx="3383280" cy="2377440"/>
           </a:xfrm>
           <a:prstGeom prst="roundRect">
             <a:avLst/>
@@ -5165,24 +5437,99 @@
       </p:sp>
       <p:sp>
         <p:nvSpPr>
-          <p:cNvPr id="22" name="Rectangle 21"/>
+          <p:cNvPr id="9" name="TextBox 8"/>
+          <p:cNvSpPr txBox="1"/>
+          <p:nvPr/>
+        </p:nvSpPr>
+        <p:spPr>
+          <a:xfrm>
+            <a:off x="4663440" y="2011680"/>
+            <a:ext cx="3017520" cy="365760"/>
+          </a:xfrm>
+          <a:prstGeom prst="rect">
+            <a:avLst/>
+          </a:prstGeom>
+          <a:noFill/>
+        </p:spPr>
+        <p:txBody>
+          <a:bodyPr wrap="square">
+            <a:spAutoFit/>
+          </a:bodyPr>
+          <a:lstStyle/>
+          <a:p>
+            <a:pPr algn="l">
+              <a:defRPr sz="1700" b="1">
+                <a:solidFill>
+                  <a:srgbClr val="60A5FA"/>
+                </a:solidFill>
+                <a:latin typeface="Calibri"/>
+              </a:defRPr>
+            </a:pPr>
+            <a:r>
+              <a:t>🔍  Şeffaflık</a:t>
+            </a:r>
+          </a:p>
+        </p:txBody>
+      </p:sp>
+      <p:sp>
+        <p:nvSpPr>
+          <p:cNvPr id="10" name="TextBox 9"/>
+          <p:cNvSpPr txBox="1"/>
+          <p:nvPr/>
+        </p:nvSpPr>
+        <p:spPr>
+          <a:xfrm>
+            <a:off x="4663440" y="2514600"/>
+            <a:ext cx="3017520" cy="1371600"/>
+          </a:xfrm>
+          <a:prstGeom prst="rect">
+            <a:avLst/>
+          </a:prstGeom>
+          <a:noFill/>
+        </p:spPr>
+        <p:txBody>
+          <a:bodyPr wrap="square">
+            <a:spAutoFit/>
+          </a:bodyPr>
+          <a:lstStyle/>
+          <a:p>
+            <a:pPr algn="l">
+              <a:defRPr sz="1300" b="0">
+                <a:solidFill>
+                  <a:srgbClr val="94A3B8"/>
+                </a:solidFill>
+                <a:latin typeface="Calibri"/>
+              </a:defRPr>
+            </a:pPr>
+            <a:r>
+              <a:t>Her kanalın gerçek katkısı veri ile kanıtlanır. Platform raporlarına bağımlılık azalır.</a:t>
+            </a:r>
+          </a:p>
+        </p:txBody>
+      </p:sp>
+      <p:sp>
+        <p:nvSpPr>
+          <p:cNvPr id="11" name="Rounded Rectangle 10"/>
           <p:cNvSpPr/>
           <p:nvPr/>
         </p:nvSpPr>
         <p:spPr>
           <a:xfrm>
-            <a:off x="7589520" y="2377440"/>
-            <a:ext cx="3840480" cy="38100"/>
-          </a:xfrm>
-          <a:prstGeom prst="rect">
+            <a:off x="8229600" y="1828800"/>
+            <a:ext cx="3383280" cy="2377440"/>
+          </a:xfrm>
+          <a:prstGeom prst="roundRect">
             <a:avLst/>
           </a:prstGeom>
           <a:solidFill>
-            <a:srgbClr val="F97316"/>
+            <a:srgbClr val="111827"/>
           </a:solidFill>
-          <a:ln>
-            <a:noFill/>
+          <a:ln w="12700">
+            <a:solidFill>
+              <a:srgbClr val="1E293B"/>
+            </a:solidFill>
           </a:ln>
+          <a:effectLst/>
         </p:spPr>
         <p:style>
           <a:lnRef idx="1">
@@ -5208,14 +5555,14 @@
       </p:sp>
       <p:sp>
         <p:nvSpPr>
-          <p:cNvPr id="23" name="TextBox 22"/>
-          <p:cNvSpPr txBox="1"/>
-          <p:nvPr/>
-        </p:nvSpPr>
-        <p:spPr>
-          <a:xfrm>
-            <a:off x="7863840" y="2560320"/>
-            <a:ext cx="3291840" cy="365760"/>
+          <p:cNvPr id="12" name="TextBox 11"/>
+          <p:cNvSpPr txBox="1"/>
+          <p:nvPr/>
+        </p:nvSpPr>
+        <p:spPr>
+          <a:xfrm>
+            <a:off x="8412480" y="2011680"/>
+            <a:ext cx="3017520" cy="365760"/>
           </a:xfrm>
           <a:prstGeom prst="rect">
             <a:avLst/>
@@ -5231,41 +5578,159 @@
             <a:pPr algn="l">
               <a:defRPr sz="1700" b="1">
                 <a:solidFill>
+                  <a:srgbClr val="4ADE80"/>
+                </a:solidFill>
+                <a:latin typeface="Calibri"/>
+              </a:defRPr>
+            </a:pPr>
+            <a:r>
+              <a:t>⚡  Hız</a:t>
+            </a:r>
+          </a:p>
+        </p:txBody>
+      </p:sp>
+      <p:sp>
+        <p:nvSpPr>
+          <p:cNvPr id="13" name="TextBox 12"/>
+          <p:cNvSpPr txBox="1"/>
+          <p:nvPr/>
+        </p:nvSpPr>
+        <p:spPr>
+          <a:xfrm>
+            <a:off x="8412480" y="2514600"/>
+            <a:ext cx="3017520" cy="1371600"/>
+          </a:xfrm>
+          <a:prstGeom prst="rect">
+            <a:avLst/>
+          </a:prstGeom>
+          <a:noFill/>
+        </p:spPr>
+        <p:txBody>
+          <a:bodyPr wrap="square">
+            <a:spAutoFit/>
+          </a:bodyPr>
+          <a:lstStyle/>
+          <a:p>
+            <a:pPr algn="l">
+              <a:defRPr sz="1300" b="0">
+                <a:solidFill>
+                  <a:srgbClr val="94A3B8"/>
+                </a:solidFill>
+                <a:latin typeface="Calibri"/>
+              </a:defRPr>
+            </a:pPr>
+            <a:r>
+              <a:t>Haftalık otomatik rapor. Manuel Excel analizi yerine gerçek zamanlı dashboard.</a:t>
+            </a:r>
+          </a:p>
+        </p:txBody>
+      </p:sp>
+      <p:sp>
+        <p:nvSpPr>
+          <p:cNvPr id="14" name="Rounded Rectangle 13"/>
+          <p:cNvSpPr/>
+          <p:nvPr/>
+        </p:nvSpPr>
+        <p:spPr>
+          <a:xfrm>
+            <a:off x="731520" y="4572000"/>
+            <a:ext cx="5120640" cy="2011680"/>
+          </a:xfrm>
+          <a:prstGeom prst="roundRect">
+            <a:avLst/>
+          </a:prstGeom>
+          <a:solidFill>
+            <a:srgbClr val="111827"/>
+          </a:solidFill>
+          <a:ln w="12700">
+            <a:solidFill>
+              <a:srgbClr val="1E293B"/>
+            </a:solidFill>
+          </a:ln>
+          <a:effectLst/>
+        </p:spPr>
+        <p:style>
+          <a:lnRef idx="1">
+            <a:schemeClr val="accent1"/>
+          </a:lnRef>
+          <a:fillRef idx="3">
+            <a:schemeClr val="accent1"/>
+          </a:fillRef>
+          <a:effectRef idx="2">
+            <a:schemeClr val="accent1"/>
+          </a:effectRef>
+          <a:fontRef idx="minor">
+            <a:schemeClr val="lt1"/>
+          </a:fontRef>
+        </p:style>
+        <p:txBody>
+          <a:bodyPr rtlCol="0" anchor="ctr"/>
+          <a:lstStyle/>
+          <a:p>
+            <a:pPr algn="ctr"/>
+          </a:p>
+        </p:txBody>
+      </p:sp>
+      <p:sp>
+        <p:nvSpPr>
+          <p:cNvPr id="15" name="TextBox 14"/>
+          <p:cNvSpPr txBox="1"/>
+          <p:nvPr/>
+        </p:nvSpPr>
+        <p:spPr>
+          <a:xfrm>
+            <a:off x="1097280" y="4663440"/>
+            <a:ext cx="3657600" cy="365760"/>
+          </a:xfrm>
+          <a:prstGeom prst="rect">
+            <a:avLst/>
+          </a:prstGeom>
+          <a:noFill/>
+        </p:spPr>
+        <p:txBody>
+          <a:bodyPr wrap="square">
+            <a:spAutoFit/>
+          </a:bodyPr>
+          <a:lstStyle/>
+          <a:p>
+            <a:pPr algn="l">
+              <a:defRPr sz="1700" b="1">
+                <a:solidFill>
                   <a:srgbClr val="E2E8F0"/>
                 </a:solidFill>
                 <a:latin typeface="Calibri"/>
               </a:defRPr>
             </a:pPr>
             <a:r>
-              <a:t>Her workspace'te</a:t>
-            </a:r>
-          </a:p>
-        </p:txBody>
-      </p:sp>
-      <p:sp>
-        <p:nvSpPr>
-          <p:cNvPr id="24" name="TextBox 23"/>
-          <p:cNvSpPr txBox="1"/>
-          <p:nvPr/>
-        </p:nvSpPr>
-        <p:spPr>
-          <a:xfrm>
-            <a:off x="7863840" y="3063240"/>
-            <a:ext cx="3291840" cy="2286000"/>
-          </a:xfrm>
-          <a:prstGeom prst="rect">
-            <a:avLst/>
-          </a:prstGeom>
-          <a:noFill/>
-        </p:spPr>
-        <p:txBody>
-          <a:bodyPr wrap="square">
-            <a:spAutoFit/>
-          </a:bodyPr>
-          <a:lstStyle/>
-          <a:p>
-            <a:pPr algn="l">
-              <a:defRPr sz="1300" b="0">
+              <a:t>Ajans için</a:t>
+            </a:r>
+          </a:p>
+        </p:txBody>
+      </p:sp>
+      <p:sp>
+        <p:nvSpPr>
+          <p:cNvPr id="16" name="TextBox 15"/>
+          <p:cNvSpPr txBox="1"/>
+          <p:nvPr/>
+        </p:nvSpPr>
+        <p:spPr>
+          <a:xfrm>
+            <a:off x="1097280" y="5074920"/>
+            <a:ext cx="4572000" cy="1371600"/>
+          </a:xfrm>
+          <a:prstGeom prst="rect">
+            <a:avLst/>
+          </a:prstGeom>
+          <a:noFill/>
+        </p:spPr>
+        <p:txBody>
+          <a:bodyPr wrap="square">
+            <a:spAutoFit/>
+          </a:bodyPr>
+          <a:lstStyle/>
+          <a:p>
+            <a:pPr algn="l">
+              <a:defRPr sz="1200" b="0">
                 <a:solidFill>
                   <a:srgbClr val="E2E8F0"/>
                 </a:solidFill>
@@ -5276,9 +5741,9 @@
           <a:p>
             <a:pPr>
               <a:spcBef>
-                <a:spcPts val="800"/>
+                <a:spcPts val="400"/>
               </a:spcBef>
-              <a:defRPr sz="1300" b="0">
+              <a:defRPr sz="1200" b="0">
                 <a:solidFill>
                   <a:srgbClr val="94A3B8"/>
                 </a:solidFill>
@@ -5286,15 +5751,15 @@
               </a:defRPr>
             </a:pPr>
             <a:r>
-              <a:t>•  Ayrı veri yükleme ve model çalıştırma</a:t>
+              <a:t>•  Müşteriye veri destekli strateji sunma kapasitesi</a:t>
             </a:r>
           </a:p>
           <a:p>
             <a:pPr>
               <a:spcBef>
-                <a:spcPts val="800"/>
+                <a:spcPts val="400"/>
               </a:spcBef>
-              <a:defRPr sz="1300" b="0">
+              <a:defRPr sz="1200" b="0">
                 <a:solidFill>
                   <a:srgbClr val="94A3B8"/>
                 </a:solidFill>
@@ -5302,15 +5767,15 @@
               </a:defRPr>
             </a:pPr>
             <a:r>
-              <a:t>•  Kampanyaya özel bütçe ve kanal seti</a:t>
+              <a:t>•  Platform bağımsız, tarafsız ölçüm</a:t>
             </a:r>
           </a:p>
           <a:p>
             <a:pPr>
               <a:spcBef>
-                <a:spcPts val="800"/>
+                <a:spcPts val="400"/>
               </a:spcBef>
-              <a:defRPr sz="1300" b="0">
+              <a:defRPr sz="1200" b="0">
                 <a:solidFill>
                   <a:srgbClr val="94A3B8"/>
                 </a:solidFill>
@@ -5318,15 +5783,15 @@
               </a:defRPr>
             </a:pPr>
             <a:r>
-              <a:t>•  İzole unified scoring ve rapor</a:t>
+              <a:t>•  Yeni müşteri pitch'lerinde rekabet avantajı</a:t>
             </a:r>
           </a:p>
           <a:p>
             <a:pPr>
               <a:spcBef>
-                <a:spcPts val="800"/>
+                <a:spcPts val="400"/>
               </a:spcBef>
-              <a:defRPr sz="1300" b="0">
+              <a:defRPr sz="1200" b="0">
                 <a:solidFill>
                   <a:srgbClr val="94A3B8"/>
                 </a:solidFill>
@@ -5334,50 +5799,193 @@
               </a:defRPr>
             </a:pPr>
             <a:r>
-              <a:t>•  Müşteriler arası karşılaştırma imkanı</a:t>
-            </a:r>
-          </a:p>
-        </p:txBody>
-      </p:sp>
-      <p:sp>
-        <p:nvSpPr>
-          <p:cNvPr id="25" name="TextBox 24"/>
-          <p:cNvSpPr txBox="1"/>
-          <p:nvPr/>
-        </p:nvSpPr>
-        <p:spPr>
-          <a:xfrm>
-            <a:off x="7863840" y="5303520"/>
-            <a:ext cx="3291840" cy="640080"/>
-          </a:xfrm>
-          <a:prstGeom prst="rect">
-            <a:avLst/>
-          </a:prstGeom>
-          <a:noFill/>
-        </p:spPr>
-        <p:txBody>
-          <a:bodyPr wrap="square">
-            <a:spAutoFit/>
-          </a:bodyPr>
-          <a:lstStyle/>
-          <a:p>
-            <a:pPr algn="l">
-              <a:defRPr sz="1100" b="0">
-                <a:solidFill>
-                  <a:srgbClr val="64748B"/>
-                </a:solidFill>
-                <a:latin typeface="Calibri"/>
-              </a:defRPr>
-            </a:pPr>
-            <a:r>
-              <a:t>6 müşteri × 16 kampanya halihazırda tanımlı. Yeni müşteri eklemek tek tıklama.</a:t>
-            </a:r>
-          </a:p>
-        </p:txBody>
-      </p:sp>
-      <p:sp>
-        <p:nvSpPr>
-          <p:cNvPr id="26" name="TextBox 25"/>
+              <a:t>•  Birden fazla müşteri/kampanyayı tek platformda yönetme</a:t>
+            </a:r>
+          </a:p>
+        </p:txBody>
+      </p:sp>
+      <p:sp>
+        <p:nvSpPr>
+          <p:cNvPr id="17" name="Rounded Rectangle 16"/>
+          <p:cNvSpPr/>
+          <p:nvPr/>
+        </p:nvSpPr>
+        <p:spPr>
+          <a:xfrm>
+            <a:off x="6309360" y="4572000"/>
+            <a:ext cx="5120640" cy="2011680"/>
+          </a:xfrm>
+          <a:prstGeom prst="roundRect">
+            <a:avLst/>
+          </a:prstGeom>
+          <a:solidFill>
+            <a:srgbClr val="111827"/>
+          </a:solidFill>
+          <a:ln w="12700">
+            <a:solidFill>
+              <a:srgbClr val="1E293B"/>
+            </a:solidFill>
+          </a:ln>
+          <a:effectLst/>
+        </p:spPr>
+        <p:style>
+          <a:lnRef idx="1">
+            <a:schemeClr val="accent1"/>
+          </a:lnRef>
+          <a:fillRef idx="3">
+            <a:schemeClr val="accent1"/>
+          </a:fillRef>
+          <a:effectRef idx="2">
+            <a:schemeClr val="accent1"/>
+          </a:effectRef>
+          <a:fontRef idx="minor">
+            <a:schemeClr val="lt1"/>
+          </a:fontRef>
+        </p:style>
+        <p:txBody>
+          <a:bodyPr rtlCol="0" anchor="ctr"/>
+          <a:lstStyle/>
+          <a:p>
+            <a:pPr algn="ctr"/>
+          </a:p>
+        </p:txBody>
+      </p:sp>
+      <p:sp>
+        <p:nvSpPr>
+          <p:cNvPr id="18" name="TextBox 17"/>
+          <p:cNvSpPr txBox="1"/>
+          <p:nvPr/>
+        </p:nvSpPr>
+        <p:spPr>
+          <a:xfrm>
+            <a:off x="6675120" y="4663440"/>
+            <a:ext cx="3657600" cy="365760"/>
+          </a:xfrm>
+          <a:prstGeom prst="rect">
+            <a:avLst/>
+          </a:prstGeom>
+          <a:noFill/>
+        </p:spPr>
+        <p:txBody>
+          <a:bodyPr wrap="square">
+            <a:spAutoFit/>
+          </a:bodyPr>
+          <a:lstStyle/>
+          <a:p>
+            <a:pPr algn="l">
+              <a:defRPr sz="1700" b="1">
+                <a:solidFill>
+                  <a:srgbClr val="E2E8F0"/>
+                </a:solidFill>
+                <a:latin typeface="Calibri"/>
+              </a:defRPr>
+            </a:pPr>
+            <a:r>
+              <a:t>Müşteri (Reklamveren) için</a:t>
+            </a:r>
+          </a:p>
+        </p:txBody>
+      </p:sp>
+      <p:sp>
+        <p:nvSpPr>
+          <p:cNvPr id="19" name="TextBox 18"/>
+          <p:cNvSpPr txBox="1"/>
+          <p:nvPr/>
+        </p:nvSpPr>
+        <p:spPr>
+          <a:xfrm>
+            <a:off x="6675120" y="5074920"/>
+            <a:ext cx="4572000" cy="1371600"/>
+          </a:xfrm>
+          <a:prstGeom prst="rect">
+            <a:avLst/>
+          </a:prstGeom>
+          <a:noFill/>
+        </p:spPr>
+        <p:txBody>
+          <a:bodyPr wrap="square">
+            <a:spAutoFit/>
+          </a:bodyPr>
+          <a:lstStyle/>
+          <a:p>
+            <a:pPr algn="l">
+              <a:defRPr sz="1200" b="0">
+                <a:solidFill>
+                  <a:srgbClr val="E2E8F0"/>
+                </a:solidFill>
+                <a:latin typeface="Calibri"/>
+              </a:defRPr>
+            </a:pPr>
+          </a:p>
+          <a:p>
+            <a:pPr>
+              <a:spcBef>
+                <a:spcPts val="400"/>
+              </a:spcBef>
+              <a:defRPr sz="1200" b="0">
+                <a:solidFill>
+                  <a:srgbClr val="94A3B8"/>
+                </a:solidFill>
+                <a:latin typeface="Calibri"/>
+              </a:defRPr>
+            </a:pPr>
+            <a:r>
+              <a:t>•  Bütçe israfının veri ile tespiti</a:t>
+            </a:r>
+          </a:p>
+          <a:p>
+            <a:pPr>
+              <a:spcBef>
+                <a:spcPts val="400"/>
+              </a:spcBef>
+              <a:defRPr sz="1200" b="0">
+                <a:solidFill>
+                  <a:srgbClr val="94A3B8"/>
+                </a:solidFill>
+                <a:latin typeface="Calibri"/>
+              </a:defRPr>
+            </a:pPr>
+            <a:r>
+              <a:t>•  Online ve offline birlikte ölçüm</a:t>
+            </a:r>
+          </a:p>
+          <a:p>
+            <a:pPr>
+              <a:spcBef>
+                <a:spcPts val="400"/>
+              </a:spcBef>
+              <a:defRPr sz="1200" b="0">
+                <a:solidFill>
+                  <a:srgbClr val="94A3B8"/>
+                </a:solidFill>
+                <a:latin typeface="Calibri"/>
+              </a:defRPr>
+            </a:pPr>
+            <a:r>
+              <a:t>•  Incrementality test ile kanıtlanmış ROI</a:t>
+            </a:r>
+          </a:p>
+          <a:p>
+            <a:pPr>
+              <a:spcBef>
+                <a:spcPts val="400"/>
+              </a:spcBef>
+              <a:defRPr sz="1200" b="0">
+                <a:solidFill>
+                  <a:srgbClr val="94A3B8"/>
+                </a:solidFill>
+                <a:latin typeface="Calibri"/>
+              </a:defRPr>
+            </a:pPr>
+            <a:r>
+              <a:t>•  Haftalık karar desteği ile çevik kampanya yönetimi</a:t>
+            </a:r>
+          </a:p>
+        </p:txBody>
+      </p:sp>
+      <p:sp>
+        <p:nvSpPr>
+          <p:cNvPr id="20" name="TextBox 19"/>
           <p:cNvSpPr txBox="1"/>
           <p:nvPr/>
         </p:nvSpPr>
@@ -5406,7 +6014,7 @@
               </a:defRPr>
             </a:pPr>
             <a:r>
-              <a:t>11 / 13</a:t>
+              <a:t>11 / 14</a:t>
             </a:r>
           </a:p>
         </p:txBody>
@@ -5446,7 +6054,7 @@
         <p:spPr>
           <a:xfrm>
             <a:off x="731520" y="457200"/>
-            <a:ext cx="3657600" cy="365760"/>
+            <a:ext cx="5486400" cy="365760"/>
           </a:xfrm>
           <a:prstGeom prst="rect">
             <a:avLst/>
@@ -5468,7 +6076,7 @@
               </a:defRPr>
             </a:pPr>
             <a:r>
-              <a:t>YOL HARİTASI</a:t>
+              <a:t>ÖLÇEKLENEBİLİRLİK</a:t>
             </a:r>
           </a:p>
         </p:txBody>
@@ -5482,7 +6090,7 @@
         <p:spPr>
           <a:xfrm>
             <a:off x="731520" y="914400"/>
-            <a:ext cx="9144000" cy="640080"/>
+            <a:ext cx="10058400" cy="640080"/>
           </a:xfrm>
           <a:prstGeom prst="rect">
             <a:avLst/>
@@ -5504,21 +6112,57 @@
               </a:defRPr>
             </a:pPr>
             <a:r>
-              <a:t>Geliştirme fazları</a:t>
-            </a:r>
-          </a:p>
-        </p:txBody>
-      </p:sp>
-      <p:sp>
-        <p:nvSpPr>
-          <p:cNvPr id="4" name="Rounded Rectangle 3"/>
+              <a:t>Tek platform, tüm müşteriler</a:t>
+            </a:r>
+          </a:p>
+        </p:txBody>
+      </p:sp>
+      <p:sp>
+        <p:nvSpPr>
+          <p:cNvPr id="4" name="TextBox 3"/>
+          <p:cNvSpPr txBox="1"/>
+          <p:nvPr/>
+        </p:nvSpPr>
+        <p:spPr>
+          <a:xfrm>
+            <a:off x="731520" y="1645920"/>
+            <a:ext cx="8229600" cy="457200"/>
+          </a:xfrm>
+          <a:prstGeom prst="rect">
+            <a:avLst/>
+          </a:prstGeom>
+          <a:noFill/>
+        </p:spPr>
+        <p:txBody>
+          <a:bodyPr wrap="square">
+            <a:spAutoFit/>
+          </a:bodyPr>
+          <a:lstStyle/>
+          <a:p>
+            <a:pPr algn="l">
+              <a:defRPr sz="1500" b="0">
+                <a:solidFill>
+                  <a:srgbClr val="94A3B8"/>
+                </a:solidFill>
+                <a:latin typeface="Calibri"/>
+              </a:defRPr>
+            </a:pPr>
+            <a:r>
+              <a:t>Time's Hub sadece tek bir kampanya için değil — tüm müşteri portföyünü yönetmek için tasarlandı.</a:t>
+            </a:r>
+          </a:p>
+        </p:txBody>
+      </p:sp>
+      <p:sp>
+        <p:nvSpPr>
+          <p:cNvPr id="5" name="Rounded Rectangle 4"/>
           <p:cNvSpPr/>
           <p:nvPr/>
         </p:nvSpPr>
         <p:spPr>
           <a:xfrm>
-            <a:off x="1371600" y="1737360"/>
-            <a:ext cx="9418320" cy="777240"/>
+            <a:off x="731520" y="2377440"/>
+            <a:ext cx="6400800" cy="4114800"/>
           </a:xfrm>
           <a:prstGeom prst="roundRect">
             <a:avLst/>
@@ -5557,218 +6201,554 @@
       </p:sp>
       <p:sp>
         <p:nvSpPr>
-          <p:cNvPr id="5" name="Rectangle 4"/>
+          <p:cNvPr id="6" name="TextBox 5"/>
+          <p:cNvSpPr txBox="1"/>
+          <p:nvPr/>
+        </p:nvSpPr>
+        <p:spPr>
+          <a:xfrm>
+            <a:off x="1097280" y="2514600"/>
+            <a:ext cx="3657600" cy="365760"/>
+          </a:xfrm>
+          <a:prstGeom prst="rect">
+            <a:avLst/>
+          </a:prstGeom>
+          <a:noFill/>
+        </p:spPr>
+        <p:txBody>
+          <a:bodyPr wrap="square">
+            <a:spAutoFit/>
+          </a:bodyPr>
+          <a:lstStyle/>
+          <a:p>
+            <a:pPr algn="l">
+              <a:defRPr sz="1700" b="1">
+                <a:solidFill>
+                  <a:srgbClr val="E2E8F0"/>
+                </a:solidFill>
+                <a:latin typeface="Calibri"/>
+              </a:defRPr>
+            </a:pPr>
+            <a:r>
+              <a:t>Aktif Müşteriler</a:t>
+            </a:r>
+          </a:p>
+        </p:txBody>
+      </p:sp>
+      <p:sp>
+        <p:nvSpPr>
+          <p:cNvPr id="7" name="TextBox 6"/>
+          <p:cNvSpPr txBox="1"/>
+          <p:nvPr/>
+        </p:nvSpPr>
+        <p:spPr>
+          <a:xfrm>
+            <a:off x="1097280" y="3017520"/>
+            <a:ext cx="1828800" cy="274320"/>
+          </a:xfrm>
+          <a:prstGeom prst="rect">
+            <a:avLst/>
+          </a:prstGeom>
+          <a:noFill/>
+        </p:spPr>
+        <p:txBody>
+          <a:bodyPr wrap="square">
+            <a:spAutoFit/>
+          </a:bodyPr>
+          <a:lstStyle/>
+          <a:p>
+            <a:pPr algn="l">
+              <a:defRPr sz="1100" b="1">
+                <a:solidFill>
+                  <a:srgbClr val="64748B"/>
+                </a:solidFill>
+                <a:latin typeface="Calibri"/>
+              </a:defRPr>
+            </a:pPr>
+            <a:r>
+              <a:t>Müşteri</a:t>
+            </a:r>
+          </a:p>
+        </p:txBody>
+      </p:sp>
+      <p:sp>
+        <p:nvSpPr>
+          <p:cNvPr id="8" name="TextBox 7"/>
+          <p:cNvSpPr txBox="1"/>
+          <p:nvPr/>
+        </p:nvSpPr>
+        <p:spPr>
+          <a:xfrm>
+            <a:off x="3200400" y="3017520"/>
+            <a:ext cx="1828800" cy="274320"/>
+          </a:xfrm>
+          <a:prstGeom prst="rect">
+            <a:avLst/>
+          </a:prstGeom>
+          <a:noFill/>
+        </p:spPr>
+        <p:txBody>
+          <a:bodyPr wrap="square">
+            <a:spAutoFit/>
+          </a:bodyPr>
+          <a:lstStyle/>
+          <a:p>
+            <a:pPr algn="l">
+              <a:defRPr sz="1100" b="1">
+                <a:solidFill>
+                  <a:srgbClr val="64748B"/>
+                </a:solidFill>
+                <a:latin typeface="Calibri"/>
+              </a:defRPr>
+            </a:pPr>
+            <a:r>
+              <a:t>Kampanyalar</a:t>
+            </a:r>
+          </a:p>
+        </p:txBody>
+      </p:sp>
+      <p:sp>
+        <p:nvSpPr>
+          <p:cNvPr id="9" name="TextBox 8"/>
+          <p:cNvSpPr txBox="1"/>
+          <p:nvPr/>
+        </p:nvSpPr>
+        <p:spPr>
+          <a:xfrm>
+            <a:off x="1097280" y="3383280"/>
+            <a:ext cx="1828800" cy="274320"/>
+          </a:xfrm>
+          <a:prstGeom prst="rect">
+            <a:avLst/>
+          </a:prstGeom>
+          <a:noFill/>
+        </p:spPr>
+        <p:txBody>
+          <a:bodyPr wrap="square">
+            <a:spAutoFit/>
+          </a:bodyPr>
+          <a:lstStyle/>
+          <a:p>
+            <a:pPr algn="l">
+              <a:defRPr sz="1300" b="1">
+                <a:solidFill>
+                  <a:srgbClr val="E2E8F0"/>
+                </a:solidFill>
+                <a:latin typeface="Calibri"/>
+              </a:defRPr>
+            </a:pPr>
+            <a:r>
+              <a:t>Petrol Ofisi</a:t>
+            </a:r>
+          </a:p>
+        </p:txBody>
+      </p:sp>
+      <p:sp>
+        <p:nvSpPr>
+          <p:cNvPr id="10" name="TextBox 9"/>
+          <p:cNvSpPr txBox="1"/>
+          <p:nvPr/>
+        </p:nvSpPr>
+        <p:spPr>
+          <a:xfrm>
+            <a:off x="3200400" y="3383280"/>
+            <a:ext cx="3840480" cy="274320"/>
+          </a:xfrm>
+          <a:prstGeom prst="rect">
+            <a:avLst/>
+          </a:prstGeom>
+          <a:noFill/>
+        </p:spPr>
+        <p:txBody>
+          <a:bodyPr wrap="square">
+            <a:spAutoFit/>
+          </a:bodyPr>
+          <a:lstStyle/>
+          <a:p>
+            <a:pPr algn="l">
+              <a:defRPr sz="1200" b="0">
+                <a:solidFill>
+                  <a:srgbClr val="94A3B8"/>
+                </a:solidFill>
+                <a:latin typeface="Calibri"/>
+              </a:defRPr>
+            </a:pPr>
+            <a:r>
+              <a:t>Premium Market, AutoMatic Filo</a:t>
+            </a:r>
+          </a:p>
+        </p:txBody>
+      </p:sp>
+      <p:sp>
+        <p:nvSpPr>
+          <p:cNvPr id="11" name="TextBox 10"/>
+          <p:cNvSpPr txBox="1"/>
+          <p:nvPr/>
+        </p:nvSpPr>
+        <p:spPr>
+          <a:xfrm>
+            <a:off x="1097280" y="3886200"/>
+            <a:ext cx="1828800" cy="274320"/>
+          </a:xfrm>
+          <a:prstGeom prst="rect">
+            <a:avLst/>
+          </a:prstGeom>
+          <a:noFill/>
+        </p:spPr>
+        <p:txBody>
+          <a:bodyPr wrap="square">
+            <a:spAutoFit/>
+          </a:bodyPr>
+          <a:lstStyle/>
+          <a:p>
+            <a:pPr algn="l">
+              <a:defRPr sz="1300" b="1">
+                <a:solidFill>
+                  <a:srgbClr val="E2E8F0"/>
+                </a:solidFill>
+                <a:latin typeface="Calibri"/>
+              </a:defRPr>
+            </a:pPr>
+            <a:r>
+              <a:t>EnerjiSA</a:t>
+            </a:r>
+          </a:p>
+        </p:txBody>
+      </p:sp>
+      <p:sp>
+        <p:nvSpPr>
+          <p:cNvPr id="12" name="TextBox 11"/>
+          <p:cNvSpPr txBox="1"/>
+          <p:nvPr/>
+        </p:nvSpPr>
+        <p:spPr>
+          <a:xfrm>
+            <a:off x="3200400" y="3886200"/>
+            <a:ext cx="3840480" cy="274320"/>
+          </a:xfrm>
+          <a:prstGeom prst="rect">
+            <a:avLst/>
+          </a:prstGeom>
+          <a:noFill/>
+        </p:spPr>
+        <p:txBody>
+          <a:bodyPr wrap="square">
+            <a:spAutoFit/>
+          </a:bodyPr>
+          <a:lstStyle/>
+          <a:p>
+            <a:pPr algn="l">
+              <a:defRPr sz="1200" b="0">
+                <a:solidFill>
+                  <a:srgbClr val="94A3B8"/>
+                </a:solidFill>
+                <a:latin typeface="Calibri"/>
+              </a:defRPr>
+            </a:pPr>
+            <a:r>
+              <a:t>30.Yıl İletişimi</a:t>
+            </a:r>
+          </a:p>
+        </p:txBody>
+      </p:sp>
+      <p:sp>
+        <p:nvSpPr>
+          <p:cNvPr id="13" name="TextBox 12"/>
+          <p:cNvSpPr txBox="1"/>
+          <p:nvPr/>
+        </p:nvSpPr>
+        <p:spPr>
+          <a:xfrm>
+            <a:off x="1097280" y="4389120"/>
+            <a:ext cx="1828800" cy="274320"/>
+          </a:xfrm>
+          <a:prstGeom prst="rect">
+            <a:avLst/>
+          </a:prstGeom>
+          <a:noFill/>
+        </p:spPr>
+        <p:txBody>
+          <a:bodyPr wrap="square">
+            <a:spAutoFit/>
+          </a:bodyPr>
+          <a:lstStyle/>
+          <a:p>
+            <a:pPr algn="l">
+              <a:defRPr sz="1300" b="1">
+                <a:solidFill>
+                  <a:srgbClr val="E2E8F0"/>
+                </a:solidFill>
+                <a:latin typeface="Calibri"/>
+              </a:defRPr>
+            </a:pPr>
+            <a:r>
+              <a:t>Uludağ İçecek</a:t>
+            </a:r>
+          </a:p>
+        </p:txBody>
+      </p:sp>
+      <p:sp>
+        <p:nvSpPr>
+          <p:cNvPr id="14" name="TextBox 13"/>
+          <p:cNvSpPr txBox="1"/>
+          <p:nvPr/>
+        </p:nvSpPr>
+        <p:spPr>
+          <a:xfrm>
+            <a:off x="3200400" y="4389120"/>
+            <a:ext cx="3840480" cy="274320"/>
+          </a:xfrm>
+          <a:prstGeom prst="rect">
+            <a:avLst/>
+          </a:prstGeom>
+          <a:noFill/>
+        </p:spPr>
+        <p:txBody>
+          <a:bodyPr wrap="square">
+            <a:spAutoFit/>
+          </a:bodyPr>
+          <a:lstStyle/>
+          <a:p>
+            <a:pPr algn="l">
+              <a:defRPr sz="1200" b="0">
+                <a:solidFill>
+                  <a:srgbClr val="94A3B8"/>
+                </a:solidFill>
+                <a:latin typeface="Calibri"/>
+              </a:defRPr>
+            </a:pPr>
+            <a:r>
+              <a:t>Limonata, Premium Su, Soda, Frutti, Portakallı</a:t>
+            </a:r>
+          </a:p>
+        </p:txBody>
+      </p:sp>
+      <p:sp>
+        <p:nvSpPr>
+          <p:cNvPr id="15" name="TextBox 14"/>
+          <p:cNvSpPr txBox="1"/>
+          <p:nvPr/>
+        </p:nvSpPr>
+        <p:spPr>
+          <a:xfrm>
+            <a:off x="1097280" y="4892040"/>
+            <a:ext cx="1828800" cy="274320"/>
+          </a:xfrm>
+          <a:prstGeom prst="rect">
+            <a:avLst/>
+          </a:prstGeom>
+          <a:noFill/>
+        </p:spPr>
+        <p:txBody>
+          <a:bodyPr wrap="square">
+            <a:spAutoFit/>
+          </a:bodyPr>
+          <a:lstStyle/>
+          <a:p>
+            <a:pPr algn="l">
+              <a:defRPr sz="1300" b="1">
+                <a:solidFill>
+                  <a:srgbClr val="E2E8F0"/>
+                </a:solidFill>
+                <a:latin typeface="Calibri"/>
+              </a:defRPr>
+            </a:pPr>
+            <a:r>
+              <a:t>UNICEF</a:t>
+            </a:r>
+          </a:p>
+        </p:txBody>
+      </p:sp>
+      <p:sp>
+        <p:nvSpPr>
+          <p:cNvPr id="16" name="TextBox 15"/>
+          <p:cNvSpPr txBox="1"/>
+          <p:nvPr/>
+        </p:nvSpPr>
+        <p:spPr>
+          <a:xfrm>
+            <a:off x="3200400" y="4892040"/>
+            <a:ext cx="3840480" cy="274320"/>
+          </a:xfrm>
+          <a:prstGeom prst="rect">
+            <a:avLst/>
+          </a:prstGeom>
+          <a:noFill/>
+        </p:spPr>
+        <p:txBody>
+          <a:bodyPr wrap="square">
+            <a:spAutoFit/>
+          </a:bodyPr>
+          <a:lstStyle/>
+          <a:p>
+            <a:pPr algn="l">
+              <a:defRPr sz="1200" b="0">
+                <a:solidFill>
+                  <a:srgbClr val="94A3B8"/>
+                </a:solidFill>
+                <a:latin typeface="Calibri"/>
+              </a:defRPr>
+            </a:pPr>
+            <a:r>
+              <a:t>6 Şubat Deprem, Dünya Kız Çocukları Günü, Dünya Günü</a:t>
+            </a:r>
+          </a:p>
+        </p:txBody>
+      </p:sp>
+      <p:sp>
+        <p:nvSpPr>
+          <p:cNvPr id="17" name="TextBox 16"/>
+          <p:cNvSpPr txBox="1"/>
+          <p:nvPr/>
+        </p:nvSpPr>
+        <p:spPr>
+          <a:xfrm>
+            <a:off x="1097280" y="5394960"/>
+            <a:ext cx="1828800" cy="274320"/>
+          </a:xfrm>
+          <a:prstGeom prst="rect">
+            <a:avLst/>
+          </a:prstGeom>
+          <a:noFill/>
+        </p:spPr>
+        <p:txBody>
+          <a:bodyPr wrap="square">
+            <a:spAutoFit/>
+          </a:bodyPr>
+          <a:lstStyle/>
+          <a:p>
+            <a:pPr algn="l">
+              <a:defRPr sz="1300" b="1">
+                <a:solidFill>
+                  <a:srgbClr val="E2E8F0"/>
+                </a:solidFill>
+                <a:latin typeface="Calibri"/>
+              </a:defRPr>
+            </a:pPr>
+            <a:r>
+              <a:t>Hayhay</a:t>
+            </a:r>
+          </a:p>
+        </p:txBody>
+      </p:sp>
+      <p:sp>
+        <p:nvSpPr>
+          <p:cNvPr id="18" name="TextBox 17"/>
+          <p:cNvSpPr txBox="1"/>
+          <p:nvPr/>
+        </p:nvSpPr>
+        <p:spPr>
+          <a:xfrm>
+            <a:off x="3200400" y="5394960"/>
+            <a:ext cx="3840480" cy="274320"/>
+          </a:xfrm>
+          <a:prstGeom prst="rect">
+            <a:avLst/>
+          </a:prstGeom>
+          <a:noFill/>
+        </p:spPr>
+        <p:txBody>
+          <a:bodyPr wrap="square">
+            <a:spAutoFit/>
+          </a:bodyPr>
+          <a:lstStyle/>
+          <a:p>
+            <a:pPr algn="l">
+              <a:defRPr sz="1200" b="0">
+                <a:solidFill>
+                  <a:srgbClr val="94A3B8"/>
+                </a:solidFill>
+                <a:latin typeface="Calibri"/>
+              </a:defRPr>
+            </a:pPr>
+            <a:r>
+              <a:t>POS Cihazı, Dijital Cüzdan, Tüketici Finansmanı</a:t>
+            </a:r>
+          </a:p>
+        </p:txBody>
+      </p:sp>
+      <p:sp>
+        <p:nvSpPr>
+          <p:cNvPr id="19" name="TextBox 18"/>
+          <p:cNvSpPr txBox="1"/>
+          <p:nvPr/>
+        </p:nvSpPr>
+        <p:spPr>
+          <a:xfrm>
+            <a:off x="1097280" y="5897880"/>
+            <a:ext cx="1828800" cy="274320"/>
+          </a:xfrm>
+          <a:prstGeom prst="rect">
+            <a:avLst/>
+          </a:prstGeom>
+          <a:noFill/>
+        </p:spPr>
+        <p:txBody>
+          <a:bodyPr wrap="square">
+            <a:spAutoFit/>
+          </a:bodyPr>
+          <a:lstStyle/>
+          <a:p>
+            <a:pPr algn="l">
+              <a:defRPr sz="1300" b="1">
+                <a:solidFill>
+                  <a:srgbClr val="E2E8F0"/>
+                </a:solidFill>
+                <a:latin typeface="Calibri"/>
+              </a:defRPr>
+            </a:pPr>
+            <a:r>
+              <a:t>TLC/Gree Klima</a:t>
+            </a:r>
+          </a:p>
+        </p:txBody>
+      </p:sp>
+      <p:sp>
+        <p:nvSpPr>
+          <p:cNvPr id="20" name="TextBox 19"/>
+          <p:cNvSpPr txBox="1"/>
+          <p:nvPr/>
+        </p:nvSpPr>
+        <p:spPr>
+          <a:xfrm>
+            <a:off x="3200400" y="5897880"/>
+            <a:ext cx="3840480" cy="274320"/>
+          </a:xfrm>
+          <a:prstGeom prst="rect">
+            <a:avLst/>
+          </a:prstGeom>
+          <a:noFill/>
+        </p:spPr>
+        <p:txBody>
+          <a:bodyPr wrap="square">
+            <a:spAutoFit/>
+          </a:bodyPr>
+          <a:lstStyle/>
+          <a:p>
+            <a:pPr algn="l">
+              <a:defRPr sz="1200" b="0">
+                <a:solidFill>
+                  <a:srgbClr val="94A3B8"/>
+                </a:solidFill>
+                <a:latin typeface="Calibri"/>
+              </a:defRPr>
+            </a:pPr>
+            <a:r>
+              <a:t>Sevgililer Günü, Yaz'a Merhaba, Kış Kampanyası</a:t>
+            </a:r>
+          </a:p>
+        </p:txBody>
+      </p:sp>
+      <p:sp>
+        <p:nvSpPr>
+          <p:cNvPr id="21" name="Rounded Rectangle 20"/>
           <p:cNvSpPr/>
           <p:nvPr/>
         </p:nvSpPr>
         <p:spPr>
           <a:xfrm>
-            <a:off x="1371600" y="1737360"/>
-            <a:ext cx="50800" cy="777240"/>
-          </a:xfrm>
-          <a:prstGeom prst="rect">
-            <a:avLst/>
-          </a:prstGeom>
-          <a:solidFill>
-            <a:srgbClr val="4ADE80"/>
-          </a:solidFill>
-          <a:ln>
-            <a:noFill/>
-          </a:ln>
-        </p:spPr>
-        <p:style>
-          <a:lnRef idx="1">
-            <a:schemeClr val="accent1"/>
-          </a:lnRef>
-          <a:fillRef idx="3">
-            <a:schemeClr val="accent1"/>
-          </a:fillRef>
-          <a:effectRef idx="2">
-            <a:schemeClr val="accent1"/>
-          </a:effectRef>
-          <a:fontRef idx="minor">
-            <a:schemeClr val="lt1"/>
-          </a:fontRef>
-        </p:style>
-        <p:txBody>
-          <a:bodyPr rtlCol="0" anchor="ctr"/>
-          <a:lstStyle/>
-          <a:p>
-            <a:pPr algn="ctr"/>
-          </a:p>
-        </p:txBody>
-      </p:sp>
-      <p:sp>
-        <p:nvSpPr>
-          <p:cNvPr id="6" name="Rounded Rectangle 5"/>
-          <p:cNvSpPr/>
-          <p:nvPr/>
-        </p:nvSpPr>
-        <p:spPr>
-          <a:xfrm>
-            <a:off x="1645920" y="1984248"/>
-            <a:ext cx="1005840" cy="292608"/>
-          </a:xfrm>
-          <a:prstGeom prst="roundRect">
-            <a:avLst/>
-          </a:prstGeom>
-          <a:solidFill>
-            <a:srgbClr val="0E2C19"/>
-          </a:solidFill>
-          <a:ln>
-            <a:noFill/>
-          </a:ln>
-        </p:spPr>
-        <p:style>
-          <a:lnRef idx="1">
-            <a:schemeClr val="accent1"/>
-          </a:lnRef>
-          <a:fillRef idx="3">
-            <a:schemeClr val="accent1"/>
-          </a:fillRef>
-          <a:effectRef idx="2">
-            <a:schemeClr val="accent1"/>
-          </a:effectRef>
-          <a:fontRef idx="minor">
-            <a:schemeClr val="lt1"/>
-          </a:fontRef>
-        </p:style>
-        <p:txBody>
-          <a:bodyPr rtlCol="0" anchor="ctr"/>
-          <a:lstStyle/>
-          <a:p>
-            <a:pPr algn="ctr">
-              <a:defRPr sz="1000" b="1">
-                <a:solidFill>
-                  <a:srgbClr val="4ADE80"/>
-                </a:solidFill>
-                <a:latin typeface="Calibri"/>
-              </a:defRPr>
-            </a:pPr>
-            <a:r>
-              <a:t>FAZ 1</a:t>
-            </a:r>
-          </a:p>
-        </p:txBody>
-      </p:sp>
-      <p:sp>
-        <p:nvSpPr>
-          <p:cNvPr id="7" name="TextBox 6"/>
-          <p:cNvSpPr txBox="1"/>
-          <p:nvPr/>
-        </p:nvSpPr>
-        <p:spPr>
-          <a:xfrm>
-            <a:off x="2926080" y="1828800"/>
-            <a:ext cx="3657600" cy="320040"/>
-          </a:xfrm>
-          <a:prstGeom prst="rect">
-            <a:avLst/>
-          </a:prstGeom>
-          <a:noFill/>
-        </p:spPr>
-        <p:txBody>
-          <a:bodyPr wrap="square">
-            <a:spAutoFit/>
-          </a:bodyPr>
-          <a:lstStyle/>
-          <a:p>
-            <a:pPr algn="l">
-              <a:defRPr sz="1600" b="1">
-                <a:solidFill>
-                  <a:srgbClr val="E2E8F0"/>
-                </a:solidFill>
-                <a:latin typeface="Calibri"/>
-              </a:defRPr>
-            </a:pPr>
-            <a:r>
-              <a:t>Veri Altyapısı + MMM</a:t>
-            </a:r>
-          </a:p>
-        </p:txBody>
-      </p:sp>
-      <p:sp>
-        <p:nvSpPr>
-          <p:cNvPr id="8" name="TextBox 7"/>
-          <p:cNvSpPr txBox="1"/>
-          <p:nvPr/>
-        </p:nvSpPr>
-        <p:spPr>
-          <a:xfrm>
-            <a:off x="2926080" y="2167128"/>
-            <a:ext cx="5029200" cy="274320"/>
-          </a:xfrm>
-          <a:prstGeom prst="rect">
-            <a:avLst/>
-          </a:prstGeom>
-          <a:noFill/>
-        </p:spPr>
-        <p:txBody>
-          <a:bodyPr wrap="square">
-            <a:spAutoFit/>
-          </a:bodyPr>
-          <a:lstStyle/>
-          <a:p>
-            <a:pPr algn="l">
-              <a:defRPr sz="1100" b="0">
-                <a:solidFill>
-                  <a:srgbClr val="94A3B8"/>
-                </a:solidFill>
-                <a:latin typeface="Calibri"/>
-              </a:defRPr>
-            </a:pPr>
-            <a:r>
-              <a:t>Haftalık CSV yükleme, adstock/saturation/response model, kanal decomposition.</a:t>
-            </a:r>
-          </a:p>
-        </p:txBody>
-      </p:sp>
-      <p:sp>
-        <p:nvSpPr>
-          <p:cNvPr id="9" name="TextBox 8"/>
-          <p:cNvSpPr txBox="1"/>
-          <p:nvPr/>
-        </p:nvSpPr>
-        <p:spPr>
-          <a:xfrm>
-            <a:off x="8503920" y="1984248"/>
-            <a:ext cx="2011680" cy="274320"/>
-          </a:xfrm>
-          <a:prstGeom prst="rect">
-            <a:avLst/>
-          </a:prstGeom>
-          <a:noFill/>
-        </p:spPr>
-        <p:txBody>
-          <a:bodyPr wrap="square">
-            <a:spAutoFit/>
-          </a:bodyPr>
-          <a:lstStyle/>
-          <a:p>
-            <a:pPr algn="l">
-              <a:defRPr sz="1300" b="1">
-                <a:solidFill>
-                  <a:srgbClr val="4ADE80"/>
-                </a:solidFill>
-                <a:latin typeface="Calibri"/>
-              </a:defRPr>
-            </a:pPr>
-            <a:r>
-              <a:t>✓ Tamamlandı</a:t>
-            </a:r>
-          </a:p>
-        </p:txBody>
-      </p:sp>
-      <p:sp>
-        <p:nvSpPr>
-          <p:cNvPr id="10" name="Rounded Rectangle 9"/>
-          <p:cNvSpPr/>
-          <p:nvPr/>
-        </p:nvSpPr>
-        <p:spPr>
-          <a:xfrm>
-            <a:off x="1371600" y="2697480"/>
-            <a:ext cx="9418320" cy="777240"/>
+            <a:off x="7589520" y="2377440"/>
+            <a:ext cx="3840480" cy="4114800"/>
           </a:xfrm>
           <a:prstGeom prst="roundRect">
             <a:avLst/>
@@ -5807,514 +6787,14 @@
       </p:sp>
       <p:sp>
         <p:nvSpPr>
-          <p:cNvPr id="11" name="Rectangle 10"/>
+          <p:cNvPr id="22" name="Rectangle 21"/>
           <p:cNvSpPr/>
           <p:nvPr/>
         </p:nvSpPr>
         <p:spPr>
           <a:xfrm>
-            <a:off x="1371600" y="2697480"/>
-            <a:ext cx="50800" cy="777240"/>
-          </a:xfrm>
-          <a:prstGeom prst="rect">
-            <a:avLst/>
-          </a:prstGeom>
-          <a:solidFill>
-            <a:srgbClr val="4ADE80"/>
-          </a:solidFill>
-          <a:ln>
-            <a:noFill/>
-          </a:ln>
-        </p:spPr>
-        <p:style>
-          <a:lnRef idx="1">
-            <a:schemeClr val="accent1"/>
-          </a:lnRef>
-          <a:fillRef idx="3">
-            <a:schemeClr val="accent1"/>
-          </a:fillRef>
-          <a:effectRef idx="2">
-            <a:schemeClr val="accent1"/>
-          </a:effectRef>
-          <a:fontRef idx="minor">
-            <a:schemeClr val="lt1"/>
-          </a:fontRef>
-        </p:style>
-        <p:txBody>
-          <a:bodyPr rtlCol="0" anchor="ctr"/>
-          <a:lstStyle/>
-          <a:p>
-            <a:pPr algn="ctr"/>
-          </a:p>
-        </p:txBody>
-      </p:sp>
-      <p:sp>
-        <p:nvSpPr>
-          <p:cNvPr id="12" name="Rounded Rectangle 11"/>
-          <p:cNvSpPr/>
-          <p:nvPr/>
-        </p:nvSpPr>
-        <p:spPr>
-          <a:xfrm>
-            <a:off x="1645920" y="2944368"/>
-            <a:ext cx="1005840" cy="292608"/>
-          </a:xfrm>
-          <a:prstGeom prst="roundRect">
-            <a:avLst/>
-          </a:prstGeom>
-          <a:solidFill>
-            <a:srgbClr val="0E2C19"/>
-          </a:solidFill>
-          <a:ln>
-            <a:noFill/>
-          </a:ln>
-        </p:spPr>
-        <p:style>
-          <a:lnRef idx="1">
-            <a:schemeClr val="accent1"/>
-          </a:lnRef>
-          <a:fillRef idx="3">
-            <a:schemeClr val="accent1"/>
-          </a:fillRef>
-          <a:effectRef idx="2">
-            <a:schemeClr val="accent1"/>
-          </a:effectRef>
-          <a:fontRef idx="minor">
-            <a:schemeClr val="lt1"/>
-          </a:fontRef>
-        </p:style>
-        <p:txBody>
-          <a:bodyPr rtlCol="0" anchor="ctr"/>
-          <a:lstStyle/>
-          <a:p>
-            <a:pPr algn="ctr">
-              <a:defRPr sz="1000" b="1">
-                <a:solidFill>
-                  <a:srgbClr val="4ADE80"/>
-                </a:solidFill>
-                <a:latin typeface="Calibri"/>
-              </a:defRPr>
-            </a:pPr>
-            <a:r>
-              <a:t>FAZ 2</a:t>
-            </a:r>
-          </a:p>
-        </p:txBody>
-      </p:sp>
-      <p:sp>
-        <p:nvSpPr>
-          <p:cNvPr id="13" name="TextBox 12"/>
-          <p:cNvSpPr txBox="1"/>
-          <p:nvPr/>
-        </p:nvSpPr>
-        <p:spPr>
-          <a:xfrm>
-            <a:off x="2926080" y="2788920"/>
-            <a:ext cx="3657600" cy="320040"/>
-          </a:xfrm>
-          <a:prstGeom prst="rect">
-            <a:avLst/>
-          </a:prstGeom>
-          <a:noFill/>
-        </p:spPr>
-        <p:txBody>
-          <a:bodyPr wrap="square">
-            <a:spAutoFit/>
-          </a:bodyPr>
-          <a:lstStyle/>
-          <a:p>
-            <a:pPr algn="l">
-              <a:defRPr sz="1600" b="1">
-                <a:solidFill>
-                  <a:srgbClr val="E2E8F0"/>
-                </a:solidFill>
-                <a:latin typeface="Calibri"/>
-              </a:defRPr>
-            </a:pPr>
-            <a:r>
-              <a:t>DDA Markov + Shapley</a:t>
-            </a:r>
-          </a:p>
-        </p:txBody>
-      </p:sp>
-      <p:sp>
-        <p:nvSpPr>
-          <p:cNvPr id="14" name="TextBox 13"/>
-          <p:cNvSpPr txBox="1"/>
-          <p:nvPr/>
-        </p:nvSpPr>
-        <p:spPr>
-          <a:xfrm>
-            <a:off x="2926080" y="3127248"/>
-            <a:ext cx="5029200" cy="274320"/>
-          </a:xfrm>
-          <a:prstGeom prst="rect">
-            <a:avLst/>
-          </a:prstGeom>
-          <a:noFill/>
-        </p:spPr>
-        <p:txBody>
-          <a:bodyPr wrap="square">
-            <a:spAutoFit/>
-          </a:bodyPr>
-          <a:lstStyle/>
-          <a:p>
-            <a:pPr algn="l">
-              <a:defRPr sz="1100" b="0">
-                <a:solidFill>
-                  <a:srgbClr val="94A3B8"/>
-                </a:solidFill>
-                <a:latin typeface="Calibri"/>
-              </a:defRPr>
-            </a:pPr>
-            <a:r>
-              <a:t>CRM touchpoint analizi, Markov chain, Shapley value, DDA blend.</a:t>
-            </a:r>
-          </a:p>
-        </p:txBody>
-      </p:sp>
-      <p:sp>
-        <p:nvSpPr>
-          <p:cNvPr id="15" name="TextBox 14"/>
-          <p:cNvSpPr txBox="1"/>
-          <p:nvPr/>
-        </p:nvSpPr>
-        <p:spPr>
-          <a:xfrm>
-            <a:off x="8503920" y="2944368"/>
-            <a:ext cx="2011680" cy="274320"/>
-          </a:xfrm>
-          <a:prstGeom prst="rect">
-            <a:avLst/>
-          </a:prstGeom>
-          <a:noFill/>
-        </p:spPr>
-        <p:txBody>
-          <a:bodyPr wrap="square">
-            <a:spAutoFit/>
-          </a:bodyPr>
-          <a:lstStyle/>
-          <a:p>
-            <a:pPr algn="l">
-              <a:defRPr sz="1300" b="1">
-                <a:solidFill>
-                  <a:srgbClr val="4ADE80"/>
-                </a:solidFill>
-                <a:latin typeface="Calibri"/>
-              </a:defRPr>
-            </a:pPr>
-            <a:r>
-              <a:t>✓ Tamamlandı</a:t>
-            </a:r>
-          </a:p>
-        </p:txBody>
-      </p:sp>
-      <p:sp>
-        <p:nvSpPr>
-          <p:cNvPr id="16" name="Rounded Rectangle 15"/>
-          <p:cNvSpPr/>
-          <p:nvPr/>
-        </p:nvSpPr>
-        <p:spPr>
-          <a:xfrm>
-            <a:off x="1371600" y="3657600"/>
-            <a:ext cx="9418320" cy="777240"/>
-          </a:xfrm>
-          <a:prstGeom prst="roundRect">
-            <a:avLst/>
-          </a:prstGeom>
-          <a:solidFill>
-            <a:srgbClr val="111827"/>
-          </a:solidFill>
-          <a:ln w="12700">
-            <a:solidFill>
-              <a:srgbClr val="1E293B"/>
-            </a:solidFill>
-          </a:ln>
-          <a:effectLst/>
-        </p:spPr>
-        <p:style>
-          <a:lnRef idx="1">
-            <a:schemeClr val="accent1"/>
-          </a:lnRef>
-          <a:fillRef idx="3">
-            <a:schemeClr val="accent1"/>
-          </a:fillRef>
-          <a:effectRef idx="2">
-            <a:schemeClr val="accent1"/>
-          </a:effectRef>
-          <a:fontRef idx="minor">
-            <a:schemeClr val="lt1"/>
-          </a:fontRef>
-        </p:style>
-        <p:txBody>
-          <a:bodyPr rtlCol="0" anchor="ctr"/>
-          <a:lstStyle/>
-          <a:p>
-            <a:pPr algn="ctr"/>
-          </a:p>
-        </p:txBody>
-      </p:sp>
-      <p:sp>
-        <p:nvSpPr>
-          <p:cNvPr id="17" name="Rectangle 16"/>
-          <p:cNvSpPr/>
-          <p:nvPr/>
-        </p:nvSpPr>
-        <p:spPr>
-          <a:xfrm>
-            <a:off x="1371600" y="3657600"/>
-            <a:ext cx="50800" cy="777240"/>
-          </a:xfrm>
-          <a:prstGeom prst="rect">
-            <a:avLst/>
-          </a:prstGeom>
-          <a:solidFill>
-            <a:srgbClr val="4ADE80"/>
-          </a:solidFill>
-          <a:ln>
-            <a:noFill/>
-          </a:ln>
-        </p:spPr>
-        <p:style>
-          <a:lnRef idx="1">
-            <a:schemeClr val="accent1"/>
-          </a:lnRef>
-          <a:fillRef idx="3">
-            <a:schemeClr val="accent1"/>
-          </a:fillRef>
-          <a:effectRef idx="2">
-            <a:schemeClr val="accent1"/>
-          </a:effectRef>
-          <a:fontRef idx="minor">
-            <a:schemeClr val="lt1"/>
-          </a:fontRef>
-        </p:style>
-        <p:txBody>
-          <a:bodyPr rtlCol="0" anchor="ctr"/>
-          <a:lstStyle/>
-          <a:p>
-            <a:pPr algn="ctr"/>
-          </a:p>
-        </p:txBody>
-      </p:sp>
-      <p:sp>
-        <p:nvSpPr>
-          <p:cNvPr id="18" name="Rounded Rectangle 17"/>
-          <p:cNvSpPr/>
-          <p:nvPr/>
-        </p:nvSpPr>
-        <p:spPr>
-          <a:xfrm>
-            <a:off x="1645920" y="3904487"/>
-            <a:ext cx="1005840" cy="292608"/>
-          </a:xfrm>
-          <a:prstGeom prst="roundRect">
-            <a:avLst/>
-          </a:prstGeom>
-          <a:solidFill>
-            <a:srgbClr val="0E2C19"/>
-          </a:solidFill>
-          <a:ln>
-            <a:noFill/>
-          </a:ln>
-        </p:spPr>
-        <p:style>
-          <a:lnRef idx="1">
-            <a:schemeClr val="accent1"/>
-          </a:lnRef>
-          <a:fillRef idx="3">
-            <a:schemeClr val="accent1"/>
-          </a:fillRef>
-          <a:effectRef idx="2">
-            <a:schemeClr val="accent1"/>
-          </a:effectRef>
-          <a:fontRef idx="minor">
-            <a:schemeClr val="lt1"/>
-          </a:fontRef>
-        </p:style>
-        <p:txBody>
-          <a:bodyPr rtlCol="0" anchor="ctr"/>
-          <a:lstStyle/>
-          <a:p>
-            <a:pPr algn="ctr">
-              <a:defRPr sz="1000" b="1">
-                <a:solidFill>
-                  <a:srgbClr val="4ADE80"/>
-                </a:solidFill>
-                <a:latin typeface="Calibri"/>
-              </a:defRPr>
-            </a:pPr>
-            <a:r>
-              <a:t>FAZ 3</a:t>
-            </a:r>
-          </a:p>
-        </p:txBody>
-      </p:sp>
-      <p:sp>
-        <p:nvSpPr>
-          <p:cNvPr id="19" name="TextBox 18"/>
-          <p:cNvSpPr txBox="1"/>
-          <p:nvPr/>
-        </p:nvSpPr>
-        <p:spPr>
-          <a:xfrm>
-            <a:off x="2926080" y="3749039"/>
-            <a:ext cx="3657600" cy="320040"/>
-          </a:xfrm>
-          <a:prstGeom prst="rect">
-            <a:avLst/>
-          </a:prstGeom>
-          <a:noFill/>
-        </p:spPr>
-        <p:txBody>
-          <a:bodyPr wrap="square">
-            <a:spAutoFit/>
-          </a:bodyPr>
-          <a:lstStyle/>
-          <a:p>
-            <a:pPr algn="l">
-              <a:defRPr sz="1600" b="1">
-                <a:solidFill>
-                  <a:srgbClr val="E2E8F0"/>
-                </a:solidFill>
-                <a:latin typeface="Calibri"/>
-              </a:defRPr>
-            </a:pPr>
-            <a:r>
-              <a:t>Unified Scoring Dashboard</a:t>
-            </a:r>
-          </a:p>
-        </p:txBody>
-      </p:sp>
-      <p:sp>
-        <p:nvSpPr>
-          <p:cNvPr id="20" name="TextBox 19"/>
-          <p:cNvSpPr txBox="1"/>
-          <p:nvPr/>
-        </p:nvSpPr>
-        <p:spPr>
-          <a:xfrm>
-            <a:off x="2926080" y="4087368"/>
-            <a:ext cx="5029200" cy="274320"/>
-          </a:xfrm>
-          <a:prstGeom prst="rect">
-            <a:avLst/>
-          </a:prstGeom>
-          <a:noFill/>
-        </p:spPr>
-        <p:txBody>
-          <a:bodyPr wrap="square">
-            <a:spAutoFit/>
-          </a:bodyPr>
-          <a:lstStyle/>
-          <a:p>
-            <a:pPr algn="l">
-              <a:defRPr sz="1100" b="0">
-                <a:solidFill>
-                  <a:srgbClr val="94A3B8"/>
-                </a:solidFill>
-                <a:latin typeface="Calibri"/>
-              </a:defRPr>
-            </a:pPr>
-            <a:r>
-              <a:t>Unified rapor, cross-validation, bütçe reallocation, multi-client workspace, güvenlik.</a:t>
-            </a:r>
-          </a:p>
-        </p:txBody>
-      </p:sp>
-      <p:sp>
-        <p:nvSpPr>
-          <p:cNvPr id="21" name="TextBox 20"/>
-          <p:cNvSpPr txBox="1"/>
-          <p:nvPr/>
-        </p:nvSpPr>
-        <p:spPr>
-          <a:xfrm>
-            <a:off x="8503920" y="3904487"/>
-            <a:ext cx="2011680" cy="274320"/>
-          </a:xfrm>
-          <a:prstGeom prst="rect">
-            <a:avLst/>
-          </a:prstGeom>
-          <a:noFill/>
-        </p:spPr>
-        <p:txBody>
-          <a:bodyPr wrap="square">
-            <a:spAutoFit/>
-          </a:bodyPr>
-          <a:lstStyle/>
-          <a:p>
-            <a:pPr algn="l">
-              <a:defRPr sz="1300" b="1">
-                <a:solidFill>
-                  <a:srgbClr val="4ADE80"/>
-                </a:solidFill>
-                <a:latin typeface="Calibri"/>
-              </a:defRPr>
-            </a:pPr>
-            <a:r>
-              <a:t>✓ Tamamlandı</a:t>
-            </a:r>
-          </a:p>
-        </p:txBody>
-      </p:sp>
-      <p:sp>
-        <p:nvSpPr>
-          <p:cNvPr id="22" name="Rounded Rectangle 21"/>
-          <p:cNvSpPr/>
-          <p:nvPr/>
-        </p:nvSpPr>
-        <p:spPr>
-          <a:xfrm>
-            <a:off x="1371600" y="4617720"/>
-            <a:ext cx="9418320" cy="777240"/>
-          </a:xfrm>
-          <a:prstGeom prst="roundRect">
-            <a:avLst/>
-          </a:prstGeom>
-          <a:solidFill>
-            <a:srgbClr val="111827"/>
-          </a:solidFill>
-          <a:ln w="12700">
-            <a:solidFill>
-              <a:srgbClr val="1E293B"/>
-            </a:solidFill>
-          </a:ln>
-          <a:effectLst/>
-        </p:spPr>
-        <p:style>
-          <a:lnRef idx="1">
-            <a:schemeClr val="accent1"/>
-          </a:lnRef>
-          <a:fillRef idx="3">
-            <a:schemeClr val="accent1"/>
-          </a:fillRef>
-          <a:effectRef idx="2">
-            <a:schemeClr val="accent1"/>
-          </a:effectRef>
-          <a:fontRef idx="minor">
-            <a:schemeClr val="lt1"/>
-          </a:fontRef>
-        </p:style>
-        <p:txBody>
-          <a:bodyPr rtlCol="0" anchor="ctr"/>
-          <a:lstStyle/>
-          <a:p>
-            <a:pPr algn="ctr"/>
-          </a:p>
-        </p:txBody>
-      </p:sp>
-      <p:sp>
-        <p:nvSpPr>
-          <p:cNvPr id="23" name="Rectangle 22"/>
-          <p:cNvSpPr/>
-          <p:nvPr/>
-        </p:nvSpPr>
-        <p:spPr>
-          <a:xfrm>
-            <a:off x="1371600" y="4617720"/>
-            <a:ext cx="50800" cy="777240"/>
+            <a:off x="7589520" y="2377440"/>
+            <a:ext cx="3840480" cy="38100"/>
           </a:xfrm>
           <a:prstGeom prst="rect">
             <a:avLst/>
@@ -6350,53 +6830,133 @@
       </p:sp>
       <p:sp>
         <p:nvSpPr>
-          <p:cNvPr id="24" name="Rounded Rectangle 23"/>
-          <p:cNvSpPr/>
-          <p:nvPr/>
-        </p:nvSpPr>
-        <p:spPr>
-          <a:xfrm>
-            <a:off x="1645920" y="4864608"/>
-            <a:ext cx="1005840" cy="292608"/>
-          </a:xfrm>
-          <a:prstGeom prst="roundRect">
-            <a:avLst/>
-          </a:prstGeom>
-          <a:solidFill>
-            <a:srgbClr val="311704"/>
-          </a:solidFill>
-          <a:ln>
-            <a:noFill/>
-          </a:ln>
-        </p:spPr>
-        <p:style>
-          <a:lnRef idx="1">
-            <a:schemeClr val="accent1"/>
-          </a:lnRef>
-          <a:fillRef idx="3">
-            <a:schemeClr val="accent1"/>
-          </a:fillRef>
-          <a:effectRef idx="2">
-            <a:schemeClr val="accent1"/>
-          </a:effectRef>
-          <a:fontRef idx="minor">
-            <a:schemeClr val="lt1"/>
-          </a:fontRef>
-        </p:style>
-        <p:txBody>
-          <a:bodyPr rtlCol="0" anchor="ctr"/>
-          <a:lstStyle/>
-          <a:p>
-            <a:pPr algn="ctr">
-              <a:defRPr sz="1000" b="1">
-                <a:solidFill>
-                  <a:srgbClr val="F97316"/>
-                </a:solidFill>
-                <a:latin typeface="Calibri"/>
-              </a:defRPr>
-            </a:pPr>
-            <a:r>
-              <a:t>FAZ 4</a:t>
+          <p:cNvPr id="23" name="TextBox 22"/>
+          <p:cNvSpPr txBox="1"/>
+          <p:nvPr/>
+        </p:nvSpPr>
+        <p:spPr>
+          <a:xfrm>
+            <a:off x="7863840" y="2560320"/>
+            <a:ext cx="3291840" cy="365760"/>
+          </a:xfrm>
+          <a:prstGeom prst="rect">
+            <a:avLst/>
+          </a:prstGeom>
+          <a:noFill/>
+        </p:spPr>
+        <p:txBody>
+          <a:bodyPr wrap="square">
+            <a:spAutoFit/>
+          </a:bodyPr>
+          <a:lstStyle/>
+          <a:p>
+            <a:pPr algn="l">
+              <a:defRPr sz="1700" b="1">
+                <a:solidFill>
+                  <a:srgbClr val="E2E8F0"/>
+                </a:solidFill>
+                <a:latin typeface="Calibri"/>
+              </a:defRPr>
+            </a:pPr>
+            <a:r>
+              <a:t>Her workspace'te</a:t>
+            </a:r>
+          </a:p>
+        </p:txBody>
+      </p:sp>
+      <p:sp>
+        <p:nvSpPr>
+          <p:cNvPr id="24" name="TextBox 23"/>
+          <p:cNvSpPr txBox="1"/>
+          <p:nvPr/>
+        </p:nvSpPr>
+        <p:spPr>
+          <a:xfrm>
+            <a:off x="7863840" y="3063240"/>
+            <a:ext cx="3291840" cy="2286000"/>
+          </a:xfrm>
+          <a:prstGeom prst="rect">
+            <a:avLst/>
+          </a:prstGeom>
+          <a:noFill/>
+        </p:spPr>
+        <p:txBody>
+          <a:bodyPr wrap="square">
+            <a:spAutoFit/>
+          </a:bodyPr>
+          <a:lstStyle/>
+          <a:p>
+            <a:pPr algn="l">
+              <a:defRPr sz="1300" b="0">
+                <a:solidFill>
+                  <a:srgbClr val="E2E8F0"/>
+                </a:solidFill>
+                <a:latin typeface="Calibri"/>
+              </a:defRPr>
+            </a:pPr>
+          </a:p>
+          <a:p>
+            <a:pPr>
+              <a:spcBef>
+                <a:spcPts val="800"/>
+              </a:spcBef>
+              <a:defRPr sz="1300" b="0">
+                <a:solidFill>
+                  <a:srgbClr val="94A3B8"/>
+                </a:solidFill>
+                <a:latin typeface="Calibri"/>
+              </a:defRPr>
+            </a:pPr>
+            <a:r>
+              <a:t>•  Ayrı veri yükleme ve model çalıştırma</a:t>
+            </a:r>
+          </a:p>
+          <a:p>
+            <a:pPr>
+              <a:spcBef>
+                <a:spcPts val="800"/>
+              </a:spcBef>
+              <a:defRPr sz="1300" b="0">
+                <a:solidFill>
+                  <a:srgbClr val="94A3B8"/>
+                </a:solidFill>
+                <a:latin typeface="Calibri"/>
+              </a:defRPr>
+            </a:pPr>
+            <a:r>
+              <a:t>•  Kampanyaya özel bütçe ve kanal seti</a:t>
+            </a:r>
+          </a:p>
+          <a:p>
+            <a:pPr>
+              <a:spcBef>
+                <a:spcPts val="800"/>
+              </a:spcBef>
+              <a:defRPr sz="1300" b="0">
+                <a:solidFill>
+                  <a:srgbClr val="94A3B8"/>
+                </a:solidFill>
+                <a:latin typeface="Calibri"/>
+              </a:defRPr>
+            </a:pPr>
+            <a:r>
+              <a:t>•  İzole unified scoring ve rapor</a:t>
+            </a:r>
+          </a:p>
+          <a:p>
+            <a:pPr>
+              <a:spcBef>
+                <a:spcPts val="800"/>
+              </a:spcBef>
+              <a:defRPr sz="1300" b="0">
+                <a:solidFill>
+                  <a:srgbClr val="94A3B8"/>
+                </a:solidFill>
+                <a:latin typeface="Calibri"/>
+              </a:defRPr>
+            </a:pPr>
+            <a:r>
+              <a:t>•  Müşteriler arası karşılaştırma imkanı</a:t>
             </a:r>
           </a:p>
         </p:txBody>
@@ -6409,30 +6969,30 @@
         </p:nvSpPr>
         <p:spPr>
           <a:xfrm>
-            <a:off x="2926080" y="4709160"/>
-            <a:ext cx="3657600" cy="320040"/>
-          </a:xfrm>
-          <a:prstGeom prst="rect">
-            <a:avLst/>
-          </a:prstGeom>
-          <a:noFill/>
-        </p:spPr>
-        <p:txBody>
-          <a:bodyPr wrap="square">
-            <a:spAutoFit/>
-          </a:bodyPr>
-          <a:lstStyle/>
-          <a:p>
-            <a:pPr algn="l">
-              <a:defRPr sz="1600" b="1">
-                <a:solidFill>
-                  <a:srgbClr val="E2E8F0"/>
-                </a:solidFill>
-                <a:latin typeface="Calibri"/>
-              </a:defRPr>
-            </a:pPr>
-            <a:r>
-              <a:t>Incrementality Testing Framework</a:t>
+            <a:off x="7863840" y="5303520"/>
+            <a:ext cx="3291840" cy="640080"/>
+          </a:xfrm>
+          <a:prstGeom prst="rect">
+            <a:avLst/>
+          </a:prstGeom>
+          <a:noFill/>
+        </p:spPr>
+        <p:txBody>
+          <a:bodyPr wrap="square">
+            <a:spAutoFit/>
+          </a:bodyPr>
+          <a:lstStyle/>
+          <a:p>
+            <a:pPr algn="l">
+              <a:defRPr sz="1100" b="0">
+                <a:solidFill>
+                  <a:srgbClr val="64748B"/>
+                </a:solidFill>
+                <a:latin typeface="Calibri"/>
+              </a:defRPr>
+            </a:pPr>
+            <a:r>
+              <a:t>6 müşteri × 16 kampanya halihazırda tanımlı. Yeni müşteri eklemek tek tıklama.</a:t>
             </a:r>
           </a:p>
         </p:txBody>
@@ -6440,328 +7000,6 @@
       <p:sp>
         <p:nvSpPr>
           <p:cNvPr id="26" name="TextBox 25"/>
-          <p:cNvSpPr txBox="1"/>
-          <p:nvPr/>
-        </p:nvSpPr>
-        <p:spPr>
-          <a:xfrm>
-            <a:off x="2926080" y="5047488"/>
-            <a:ext cx="5029200" cy="274320"/>
-          </a:xfrm>
-          <a:prstGeom prst="rect">
-            <a:avLst/>
-          </a:prstGeom>
-          <a:noFill/>
-        </p:spPr>
-        <p:txBody>
-          <a:bodyPr wrap="square">
-            <a:spAutoFit/>
-          </a:bodyPr>
-          <a:lstStyle/>
-          <a:p>
-            <a:pPr algn="l">
-              <a:defRPr sz="1100" b="0">
-                <a:solidFill>
-                  <a:srgbClr val="94A3B8"/>
-                </a:solidFill>
-                <a:latin typeface="Calibri"/>
-              </a:defRPr>
-            </a:pPr>
-            <a:r>
-              <a:t>Geo-lift, holdout, PSA test motoru, otomatik kalibrasyon.</a:t>
-            </a:r>
-          </a:p>
-        </p:txBody>
-      </p:sp>
-      <p:sp>
-        <p:nvSpPr>
-          <p:cNvPr id="27" name="TextBox 26"/>
-          <p:cNvSpPr txBox="1"/>
-          <p:nvPr/>
-        </p:nvSpPr>
-        <p:spPr>
-          <a:xfrm>
-            <a:off x="8503920" y="4864608"/>
-            <a:ext cx="2011680" cy="274320"/>
-          </a:xfrm>
-          <a:prstGeom prst="rect">
-            <a:avLst/>
-          </a:prstGeom>
-          <a:noFill/>
-        </p:spPr>
-        <p:txBody>
-          <a:bodyPr wrap="square">
-            <a:spAutoFit/>
-          </a:bodyPr>
-          <a:lstStyle/>
-          <a:p>
-            <a:pPr algn="l">
-              <a:defRPr sz="1300" b="1">
-                <a:solidFill>
-                  <a:srgbClr val="F97316"/>
-                </a:solidFill>
-                <a:latin typeface="Calibri"/>
-              </a:defRPr>
-            </a:pPr>
-            <a:r>
-              <a:t>Sırada</a:t>
-            </a:r>
-          </a:p>
-        </p:txBody>
-      </p:sp>
-      <p:sp>
-        <p:nvSpPr>
-          <p:cNvPr id="28" name="Rounded Rectangle 27"/>
-          <p:cNvSpPr/>
-          <p:nvPr/>
-        </p:nvSpPr>
-        <p:spPr>
-          <a:xfrm>
-            <a:off x="1371600" y="5577840"/>
-            <a:ext cx="9418320" cy="777240"/>
-          </a:xfrm>
-          <a:prstGeom prst="roundRect">
-            <a:avLst/>
-          </a:prstGeom>
-          <a:solidFill>
-            <a:srgbClr val="111827"/>
-          </a:solidFill>
-          <a:ln w="12700">
-            <a:solidFill>
-              <a:srgbClr val="1E293B"/>
-            </a:solidFill>
-          </a:ln>
-          <a:effectLst/>
-        </p:spPr>
-        <p:style>
-          <a:lnRef idx="1">
-            <a:schemeClr val="accent1"/>
-          </a:lnRef>
-          <a:fillRef idx="3">
-            <a:schemeClr val="accent1"/>
-          </a:fillRef>
-          <a:effectRef idx="2">
-            <a:schemeClr val="accent1"/>
-          </a:effectRef>
-          <a:fontRef idx="minor">
-            <a:schemeClr val="lt1"/>
-          </a:fontRef>
-        </p:style>
-        <p:txBody>
-          <a:bodyPr rtlCol="0" anchor="ctr"/>
-          <a:lstStyle/>
-          <a:p>
-            <a:pPr algn="ctr"/>
-          </a:p>
-        </p:txBody>
-      </p:sp>
-      <p:sp>
-        <p:nvSpPr>
-          <p:cNvPr id="29" name="Rectangle 28"/>
-          <p:cNvSpPr/>
-          <p:nvPr/>
-        </p:nvSpPr>
-        <p:spPr>
-          <a:xfrm>
-            <a:off x="1371600" y="5577840"/>
-            <a:ext cx="50800" cy="777240"/>
-          </a:xfrm>
-          <a:prstGeom prst="rect">
-            <a:avLst/>
-          </a:prstGeom>
-          <a:solidFill>
-            <a:srgbClr val="64748B"/>
-          </a:solidFill>
-          <a:ln>
-            <a:noFill/>
-          </a:ln>
-        </p:spPr>
-        <p:style>
-          <a:lnRef idx="1">
-            <a:schemeClr val="accent1"/>
-          </a:lnRef>
-          <a:fillRef idx="3">
-            <a:schemeClr val="accent1"/>
-          </a:fillRef>
-          <a:effectRef idx="2">
-            <a:schemeClr val="accent1"/>
-          </a:effectRef>
-          <a:fontRef idx="minor">
-            <a:schemeClr val="lt1"/>
-          </a:fontRef>
-        </p:style>
-        <p:txBody>
-          <a:bodyPr rtlCol="0" anchor="ctr"/>
-          <a:lstStyle/>
-          <a:p>
-            <a:pPr algn="ctr"/>
-          </a:p>
-        </p:txBody>
-      </p:sp>
-      <p:sp>
-        <p:nvSpPr>
-          <p:cNvPr id="30" name="Rounded Rectangle 29"/>
-          <p:cNvSpPr/>
-          <p:nvPr/>
-        </p:nvSpPr>
-        <p:spPr>
-          <a:xfrm>
-            <a:off x="1645920" y="5824727"/>
-            <a:ext cx="1005840" cy="292608"/>
-          </a:xfrm>
-          <a:prstGeom prst="roundRect">
-            <a:avLst/>
-          </a:prstGeom>
-          <a:solidFill>
-            <a:srgbClr val="14171B"/>
-          </a:solidFill>
-          <a:ln>
-            <a:noFill/>
-          </a:ln>
-        </p:spPr>
-        <p:style>
-          <a:lnRef idx="1">
-            <a:schemeClr val="accent1"/>
-          </a:lnRef>
-          <a:fillRef idx="3">
-            <a:schemeClr val="accent1"/>
-          </a:fillRef>
-          <a:effectRef idx="2">
-            <a:schemeClr val="accent1"/>
-          </a:effectRef>
-          <a:fontRef idx="minor">
-            <a:schemeClr val="lt1"/>
-          </a:fontRef>
-        </p:style>
-        <p:txBody>
-          <a:bodyPr rtlCol="0" anchor="ctr"/>
-          <a:lstStyle/>
-          <a:p>
-            <a:pPr algn="ctr">
-              <a:defRPr sz="1000" b="1">
-                <a:solidFill>
-                  <a:srgbClr val="64748B"/>
-                </a:solidFill>
-                <a:latin typeface="Calibri"/>
-              </a:defRPr>
-            </a:pPr>
-            <a:r>
-              <a:t>FAZ 5</a:t>
-            </a:r>
-          </a:p>
-        </p:txBody>
-      </p:sp>
-      <p:sp>
-        <p:nvSpPr>
-          <p:cNvPr id="31" name="TextBox 30"/>
-          <p:cNvSpPr txBox="1"/>
-          <p:nvPr/>
-        </p:nvSpPr>
-        <p:spPr>
-          <a:xfrm>
-            <a:off x="2926080" y="5669279"/>
-            <a:ext cx="3657600" cy="320040"/>
-          </a:xfrm>
-          <a:prstGeom prst="rect">
-            <a:avLst/>
-          </a:prstGeom>
-          <a:noFill/>
-        </p:spPr>
-        <p:txBody>
-          <a:bodyPr wrap="square">
-            <a:spAutoFit/>
-          </a:bodyPr>
-          <a:lstStyle/>
-          <a:p>
-            <a:pPr algn="l">
-              <a:defRPr sz="1600" b="1">
-                <a:solidFill>
-                  <a:srgbClr val="E2E8F0"/>
-                </a:solidFill>
-                <a:latin typeface="Calibri"/>
-              </a:defRPr>
-            </a:pPr>
-            <a:r>
-              <a:t>Gerçek Veri Entegrasyonu &amp; API</a:t>
-            </a:r>
-          </a:p>
-        </p:txBody>
-      </p:sp>
-      <p:sp>
-        <p:nvSpPr>
-          <p:cNvPr id="32" name="TextBox 31"/>
-          <p:cNvSpPr txBox="1"/>
-          <p:nvPr/>
-        </p:nvSpPr>
-        <p:spPr>
-          <a:xfrm>
-            <a:off x="2926080" y="6007607"/>
-            <a:ext cx="5029200" cy="274320"/>
-          </a:xfrm>
-          <a:prstGeom prst="rect">
-            <a:avLst/>
-          </a:prstGeom>
-          <a:noFill/>
-        </p:spPr>
-        <p:txBody>
-          <a:bodyPr wrap="square">
-            <a:spAutoFit/>
-          </a:bodyPr>
-          <a:lstStyle/>
-          <a:p>
-            <a:pPr algn="l">
-              <a:defRPr sz="1100" b="0">
-                <a:solidFill>
-                  <a:srgbClr val="94A3B8"/>
-                </a:solidFill>
-                <a:latin typeface="Calibri"/>
-              </a:defRPr>
-            </a:pPr>
-            <a:r>
-              <a:t>Meta/Google/DV360 API bağlantısı, otomatik veri çekme, canlı rapor.</a:t>
-            </a:r>
-          </a:p>
-        </p:txBody>
-      </p:sp>
-      <p:sp>
-        <p:nvSpPr>
-          <p:cNvPr id="33" name="TextBox 32"/>
-          <p:cNvSpPr txBox="1"/>
-          <p:nvPr/>
-        </p:nvSpPr>
-        <p:spPr>
-          <a:xfrm>
-            <a:off x="8503920" y="5824727"/>
-            <a:ext cx="2011680" cy="274320"/>
-          </a:xfrm>
-          <a:prstGeom prst="rect">
-            <a:avLst/>
-          </a:prstGeom>
-          <a:noFill/>
-        </p:spPr>
-        <p:txBody>
-          <a:bodyPr wrap="square">
-            <a:spAutoFit/>
-          </a:bodyPr>
-          <a:lstStyle/>
-          <a:p>
-            <a:pPr algn="l">
-              <a:defRPr sz="1300" b="1">
-                <a:solidFill>
-                  <a:srgbClr val="64748B"/>
-                </a:solidFill>
-                <a:latin typeface="Calibri"/>
-              </a:defRPr>
-            </a:pPr>
-            <a:r>
-              <a:t>Planlanıyor</a:t>
-            </a:r>
-          </a:p>
-        </p:txBody>
-      </p:sp>
-      <p:sp>
-        <p:nvSpPr>
-          <p:cNvPr id="34" name="TextBox 33"/>
           <p:cNvSpPr txBox="1"/>
           <p:nvPr/>
         </p:nvSpPr>
@@ -6790,7 +7028,7 @@
               </a:defRPr>
             </a:pPr>
             <a:r>
-              <a:t>12 / 13</a:t>
+              <a:t>12 / 14</a:t>
             </a:r>
           </a:p>
         </p:txBody>
@@ -6829,6 +7067,1390 @@
         </p:nvSpPr>
         <p:spPr>
           <a:xfrm>
+            <a:off x="731520" y="457200"/>
+            <a:ext cx="3657600" cy="365760"/>
+          </a:xfrm>
+          <a:prstGeom prst="rect">
+            <a:avLst/>
+          </a:prstGeom>
+          <a:noFill/>
+        </p:spPr>
+        <p:txBody>
+          <a:bodyPr wrap="square">
+            <a:spAutoFit/>
+          </a:bodyPr>
+          <a:lstStyle/>
+          <a:p>
+            <a:pPr algn="l">
+              <a:defRPr sz="1200" b="1">
+                <a:solidFill>
+                  <a:srgbClr val="F97316"/>
+                </a:solidFill>
+                <a:latin typeface="Calibri"/>
+              </a:defRPr>
+            </a:pPr>
+            <a:r>
+              <a:t>YOL HARİTASI</a:t>
+            </a:r>
+          </a:p>
+        </p:txBody>
+      </p:sp>
+      <p:sp>
+        <p:nvSpPr>
+          <p:cNvPr id="3" name="TextBox 2"/>
+          <p:cNvSpPr txBox="1"/>
+          <p:nvPr/>
+        </p:nvSpPr>
+        <p:spPr>
+          <a:xfrm>
+            <a:off x="731520" y="914400"/>
+            <a:ext cx="9144000" cy="640080"/>
+          </a:xfrm>
+          <a:prstGeom prst="rect">
+            <a:avLst/>
+          </a:prstGeom>
+          <a:noFill/>
+        </p:spPr>
+        <p:txBody>
+          <a:bodyPr wrap="square">
+            <a:spAutoFit/>
+          </a:bodyPr>
+          <a:lstStyle/>
+          <a:p>
+            <a:pPr algn="l">
+              <a:defRPr sz="3200" b="1">
+                <a:solidFill>
+                  <a:srgbClr val="E2E8F0"/>
+                </a:solidFill>
+                <a:latin typeface="Calibri"/>
+              </a:defRPr>
+            </a:pPr>
+            <a:r>
+              <a:t>Geliştirme fazları</a:t>
+            </a:r>
+          </a:p>
+        </p:txBody>
+      </p:sp>
+      <p:sp>
+        <p:nvSpPr>
+          <p:cNvPr id="4" name="Rounded Rectangle 3"/>
+          <p:cNvSpPr/>
+          <p:nvPr/>
+        </p:nvSpPr>
+        <p:spPr>
+          <a:xfrm>
+            <a:off x="1371600" y="1737360"/>
+            <a:ext cx="9418320" cy="777240"/>
+          </a:xfrm>
+          <a:prstGeom prst="roundRect">
+            <a:avLst/>
+          </a:prstGeom>
+          <a:solidFill>
+            <a:srgbClr val="111827"/>
+          </a:solidFill>
+          <a:ln w="12700">
+            <a:solidFill>
+              <a:srgbClr val="1E293B"/>
+            </a:solidFill>
+          </a:ln>
+          <a:effectLst/>
+        </p:spPr>
+        <p:style>
+          <a:lnRef idx="1">
+            <a:schemeClr val="accent1"/>
+          </a:lnRef>
+          <a:fillRef idx="3">
+            <a:schemeClr val="accent1"/>
+          </a:fillRef>
+          <a:effectRef idx="2">
+            <a:schemeClr val="accent1"/>
+          </a:effectRef>
+          <a:fontRef idx="minor">
+            <a:schemeClr val="lt1"/>
+          </a:fontRef>
+        </p:style>
+        <p:txBody>
+          <a:bodyPr rtlCol="0" anchor="ctr"/>
+          <a:lstStyle/>
+          <a:p>
+            <a:pPr algn="ctr"/>
+          </a:p>
+        </p:txBody>
+      </p:sp>
+      <p:sp>
+        <p:nvSpPr>
+          <p:cNvPr id="5" name="Rectangle 4"/>
+          <p:cNvSpPr/>
+          <p:nvPr/>
+        </p:nvSpPr>
+        <p:spPr>
+          <a:xfrm>
+            <a:off x="1371600" y="1737360"/>
+            <a:ext cx="50800" cy="777240"/>
+          </a:xfrm>
+          <a:prstGeom prst="rect">
+            <a:avLst/>
+          </a:prstGeom>
+          <a:solidFill>
+            <a:srgbClr val="4ADE80"/>
+          </a:solidFill>
+          <a:ln>
+            <a:noFill/>
+          </a:ln>
+        </p:spPr>
+        <p:style>
+          <a:lnRef idx="1">
+            <a:schemeClr val="accent1"/>
+          </a:lnRef>
+          <a:fillRef idx="3">
+            <a:schemeClr val="accent1"/>
+          </a:fillRef>
+          <a:effectRef idx="2">
+            <a:schemeClr val="accent1"/>
+          </a:effectRef>
+          <a:fontRef idx="minor">
+            <a:schemeClr val="lt1"/>
+          </a:fontRef>
+        </p:style>
+        <p:txBody>
+          <a:bodyPr rtlCol="0" anchor="ctr"/>
+          <a:lstStyle/>
+          <a:p>
+            <a:pPr algn="ctr"/>
+          </a:p>
+        </p:txBody>
+      </p:sp>
+      <p:sp>
+        <p:nvSpPr>
+          <p:cNvPr id="6" name="Rounded Rectangle 5"/>
+          <p:cNvSpPr/>
+          <p:nvPr/>
+        </p:nvSpPr>
+        <p:spPr>
+          <a:xfrm>
+            <a:off x="1645920" y="1984248"/>
+            <a:ext cx="1005840" cy="292608"/>
+          </a:xfrm>
+          <a:prstGeom prst="roundRect">
+            <a:avLst/>
+          </a:prstGeom>
+          <a:solidFill>
+            <a:srgbClr val="0E2C19"/>
+          </a:solidFill>
+          <a:ln>
+            <a:noFill/>
+          </a:ln>
+        </p:spPr>
+        <p:style>
+          <a:lnRef idx="1">
+            <a:schemeClr val="accent1"/>
+          </a:lnRef>
+          <a:fillRef idx="3">
+            <a:schemeClr val="accent1"/>
+          </a:fillRef>
+          <a:effectRef idx="2">
+            <a:schemeClr val="accent1"/>
+          </a:effectRef>
+          <a:fontRef idx="minor">
+            <a:schemeClr val="lt1"/>
+          </a:fontRef>
+        </p:style>
+        <p:txBody>
+          <a:bodyPr rtlCol="0" anchor="ctr"/>
+          <a:lstStyle/>
+          <a:p>
+            <a:pPr algn="ctr">
+              <a:defRPr sz="1000" b="1">
+                <a:solidFill>
+                  <a:srgbClr val="4ADE80"/>
+                </a:solidFill>
+                <a:latin typeface="Calibri"/>
+              </a:defRPr>
+            </a:pPr>
+            <a:r>
+              <a:t>FAZ 1</a:t>
+            </a:r>
+          </a:p>
+        </p:txBody>
+      </p:sp>
+      <p:sp>
+        <p:nvSpPr>
+          <p:cNvPr id="7" name="TextBox 6"/>
+          <p:cNvSpPr txBox="1"/>
+          <p:nvPr/>
+        </p:nvSpPr>
+        <p:spPr>
+          <a:xfrm>
+            <a:off x="2926080" y="1828800"/>
+            <a:ext cx="3657600" cy="320040"/>
+          </a:xfrm>
+          <a:prstGeom prst="rect">
+            <a:avLst/>
+          </a:prstGeom>
+          <a:noFill/>
+        </p:spPr>
+        <p:txBody>
+          <a:bodyPr wrap="square">
+            <a:spAutoFit/>
+          </a:bodyPr>
+          <a:lstStyle/>
+          <a:p>
+            <a:pPr algn="l">
+              <a:defRPr sz="1600" b="1">
+                <a:solidFill>
+                  <a:srgbClr val="E2E8F0"/>
+                </a:solidFill>
+                <a:latin typeface="Calibri"/>
+              </a:defRPr>
+            </a:pPr>
+            <a:r>
+              <a:t>Veri Altyapısı + MMM</a:t>
+            </a:r>
+          </a:p>
+        </p:txBody>
+      </p:sp>
+      <p:sp>
+        <p:nvSpPr>
+          <p:cNvPr id="8" name="TextBox 7"/>
+          <p:cNvSpPr txBox="1"/>
+          <p:nvPr/>
+        </p:nvSpPr>
+        <p:spPr>
+          <a:xfrm>
+            <a:off x="2926080" y="2167128"/>
+            <a:ext cx="5029200" cy="274320"/>
+          </a:xfrm>
+          <a:prstGeom prst="rect">
+            <a:avLst/>
+          </a:prstGeom>
+          <a:noFill/>
+        </p:spPr>
+        <p:txBody>
+          <a:bodyPr wrap="square">
+            <a:spAutoFit/>
+          </a:bodyPr>
+          <a:lstStyle/>
+          <a:p>
+            <a:pPr algn="l">
+              <a:defRPr sz="1100" b="0">
+                <a:solidFill>
+                  <a:srgbClr val="94A3B8"/>
+                </a:solidFill>
+                <a:latin typeface="Calibri"/>
+              </a:defRPr>
+            </a:pPr>
+            <a:r>
+              <a:t>Haftalık CSV yükleme, adstock/saturation/response model, kanal decomposition.</a:t>
+            </a:r>
+          </a:p>
+        </p:txBody>
+      </p:sp>
+      <p:sp>
+        <p:nvSpPr>
+          <p:cNvPr id="9" name="TextBox 8"/>
+          <p:cNvSpPr txBox="1"/>
+          <p:nvPr/>
+        </p:nvSpPr>
+        <p:spPr>
+          <a:xfrm>
+            <a:off x="8503920" y="1984248"/>
+            <a:ext cx="2011680" cy="274320"/>
+          </a:xfrm>
+          <a:prstGeom prst="rect">
+            <a:avLst/>
+          </a:prstGeom>
+          <a:noFill/>
+        </p:spPr>
+        <p:txBody>
+          <a:bodyPr wrap="square">
+            <a:spAutoFit/>
+          </a:bodyPr>
+          <a:lstStyle/>
+          <a:p>
+            <a:pPr algn="l">
+              <a:defRPr sz="1300" b="1">
+                <a:solidFill>
+                  <a:srgbClr val="4ADE80"/>
+                </a:solidFill>
+                <a:latin typeface="Calibri"/>
+              </a:defRPr>
+            </a:pPr>
+            <a:r>
+              <a:t>✓ Tamamlandı</a:t>
+            </a:r>
+          </a:p>
+        </p:txBody>
+      </p:sp>
+      <p:sp>
+        <p:nvSpPr>
+          <p:cNvPr id="10" name="Rounded Rectangle 9"/>
+          <p:cNvSpPr/>
+          <p:nvPr/>
+        </p:nvSpPr>
+        <p:spPr>
+          <a:xfrm>
+            <a:off x="1371600" y="2697480"/>
+            <a:ext cx="9418320" cy="777240"/>
+          </a:xfrm>
+          <a:prstGeom prst="roundRect">
+            <a:avLst/>
+          </a:prstGeom>
+          <a:solidFill>
+            <a:srgbClr val="111827"/>
+          </a:solidFill>
+          <a:ln w="12700">
+            <a:solidFill>
+              <a:srgbClr val="1E293B"/>
+            </a:solidFill>
+          </a:ln>
+          <a:effectLst/>
+        </p:spPr>
+        <p:style>
+          <a:lnRef idx="1">
+            <a:schemeClr val="accent1"/>
+          </a:lnRef>
+          <a:fillRef idx="3">
+            <a:schemeClr val="accent1"/>
+          </a:fillRef>
+          <a:effectRef idx="2">
+            <a:schemeClr val="accent1"/>
+          </a:effectRef>
+          <a:fontRef idx="minor">
+            <a:schemeClr val="lt1"/>
+          </a:fontRef>
+        </p:style>
+        <p:txBody>
+          <a:bodyPr rtlCol="0" anchor="ctr"/>
+          <a:lstStyle/>
+          <a:p>
+            <a:pPr algn="ctr"/>
+          </a:p>
+        </p:txBody>
+      </p:sp>
+      <p:sp>
+        <p:nvSpPr>
+          <p:cNvPr id="11" name="Rectangle 10"/>
+          <p:cNvSpPr/>
+          <p:nvPr/>
+        </p:nvSpPr>
+        <p:spPr>
+          <a:xfrm>
+            <a:off x="1371600" y="2697480"/>
+            <a:ext cx="50800" cy="777240"/>
+          </a:xfrm>
+          <a:prstGeom prst="rect">
+            <a:avLst/>
+          </a:prstGeom>
+          <a:solidFill>
+            <a:srgbClr val="4ADE80"/>
+          </a:solidFill>
+          <a:ln>
+            <a:noFill/>
+          </a:ln>
+        </p:spPr>
+        <p:style>
+          <a:lnRef idx="1">
+            <a:schemeClr val="accent1"/>
+          </a:lnRef>
+          <a:fillRef idx="3">
+            <a:schemeClr val="accent1"/>
+          </a:fillRef>
+          <a:effectRef idx="2">
+            <a:schemeClr val="accent1"/>
+          </a:effectRef>
+          <a:fontRef idx="minor">
+            <a:schemeClr val="lt1"/>
+          </a:fontRef>
+        </p:style>
+        <p:txBody>
+          <a:bodyPr rtlCol="0" anchor="ctr"/>
+          <a:lstStyle/>
+          <a:p>
+            <a:pPr algn="ctr"/>
+          </a:p>
+        </p:txBody>
+      </p:sp>
+      <p:sp>
+        <p:nvSpPr>
+          <p:cNvPr id="12" name="Rounded Rectangle 11"/>
+          <p:cNvSpPr/>
+          <p:nvPr/>
+        </p:nvSpPr>
+        <p:spPr>
+          <a:xfrm>
+            <a:off x="1645920" y="2944368"/>
+            <a:ext cx="1005840" cy="292608"/>
+          </a:xfrm>
+          <a:prstGeom prst="roundRect">
+            <a:avLst/>
+          </a:prstGeom>
+          <a:solidFill>
+            <a:srgbClr val="0E2C19"/>
+          </a:solidFill>
+          <a:ln>
+            <a:noFill/>
+          </a:ln>
+        </p:spPr>
+        <p:style>
+          <a:lnRef idx="1">
+            <a:schemeClr val="accent1"/>
+          </a:lnRef>
+          <a:fillRef idx="3">
+            <a:schemeClr val="accent1"/>
+          </a:fillRef>
+          <a:effectRef idx="2">
+            <a:schemeClr val="accent1"/>
+          </a:effectRef>
+          <a:fontRef idx="minor">
+            <a:schemeClr val="lt1"/>
+          </a:fontRef>
+        </p:style>
+        <p:txBody>
+          <a:bodyPr rtlCol="0" anchor="ctr"/>
+          <a:lstStyle/>
+          <a:p>
+            <a:pPr algn="ctr">
+              <a:defRPr sz="1000" b="1">
+                <a:solidFill>
+                  <a:srgbClr val="4ADE80"/>
+                </a:solidFill>
+                <a:latin typeface="Calibri"/>
+              </a:defRPr>
+            </a:pPr>
+            <a:r>
+              <a:t>FAZ 2</a:t>
+            </a:r>
+          </a:p>
+        </p:txBody>
+      </p:sp>
+      <p:sp>
+        <p:nvSpPr>
+          <p:cNvPr id="13" name="TextBox 12"/>
+          <p:cNvSpPr txBox="1"/>
+          <p:nvPr/>
+        </p:nvSpPr>
+        <p:spPr>
+          <a:xfrm>
+            <a:off x="2926080" y="2788920"/>
+            <a:ext cx="3657600" cy="320040"/>
+          </a:xfrm>
+          <a:prstGeom prst="rect">
+            <a:avLst/>
+          </a:prstGeom>
+          <a:noFill/>
+        </p:spPr>
+        <p:txBody>
+          <a:bodyPr wrap="square">
+            <a:spAutoFit/>
+          </a:bodyPr>
+          <a:lstStyle/>
+          <a:p>
+            <a:pPr algn="l">
+              <a:defRPr sz="1600" b="1">
+                <a:solidFill>
+                  <a:srgbClr val="E2E8F0"/>
+                </a:solidFill>
+                <a:latin typeface="Calibri"/>
+              </a:defRPr>
+            </a:pPr>
+            <a:r>
+              <a:t>DDA Markov + Shapley</a:t>
+            </a:r>
+          </a:p>
+        </p:txBody>
+      </p:sp>
+      <p:sp>
+        <p:nvSpPr>
+          <p:cNvPr id="14" name="TextBox 13"/>
+          <p:cNvSpPr txBox="1"/>
+          <p:nvPr/>
+        </p:nvSpPr>
+        <p:spPr>
+          <a:xfrm>
+            <a:off x="2926080" y="3127248"/>
+            <a:ext cx="5029200" cy="274320"/>
+          </a:xfrm>
+          <a:prstGeom prst="rect">
+            <a:avLst/>
+          </a:prstGeom>
+          <a:noFill/>
+        </p:spPr>
+        <p:txBody>
+          <a:bodyPr wrap="square">
+            <a:spAutoFit/>
+          </a:bodyPr>
+          <a:lstStyle/>
+          <a:p>
+            <a:pPr algn="l">
+              <a:defRPr sz="1100" b="0">
+                <a:solidFill>
+                  <a:srgbClr val="94A3B8"/>
+                </a:solidFill>
+                <a:latin typeface="Calibri"/>
+              </a:defRPr>
+            </a:pPr>
+            <a:r>
+              <a:t>CRM touchpoint analizi, Markov chain, Shapley value, DDA blend.</a:t>
+            </a:r>
+          </a:p>
+        </p:txBody>
+      </p:sp>
+      <p:sp>
+        <p:nvSpPr>
+          <p:cNvPr id="15" name="TextBox 14"/>
+          <p:cNvSpPr txBox="1"/>
+          <p:nvPr/>
+        </p:nvSpPr>
+        <p:spPr>
+          <a:xfrm>
+            <a:off x="8503920" y="2944368"/>
+            <a:ext cx="2011680" cy="274320"/>
+          </a:xfrm>
+          <a:prstGeom prst="rect">
+            <a:avLst/>
+          </a:prstGeom>
+          <a:noFill/>
+        </p:spPr>
+        <p:txBody>
+          <a:bodyPr wrap="square">
+            <a:spAutoFit/>
+          </a:bodyPr>
+          <a:lstStyle/>
+          <a:p>
+            <a:pPr algn="l">
+              <a:defRPr sz="1300" b="1">
+                <a:solidFill>
+                  <a:srgbClr val="4ADE80"/>
+                </a:solidFill>
+                <a:latin typeface="Calibri"/>
+              </a:defRPr>
+            </a:pPr>
+            <a:r>
+              <a:t>✓ Tamamlandı</a:t>
+            </a:r>
+          </a:p>
+        </p:txBody>
+      </p:sp>
+      <p:sp>
+        <p:nvSpPr>
+          <p:cNvPr id="16" name="Rounded Rectangle 15"/>
+          <p:cNvSpPr/>
+          <p:nvPr/>
+        </p:nvSpPr>
+        <p:spPr>
+          <a:xfrm>
+            <a:off x="1371600" y="3657600"/>
+            <a:ext cx="9418320" cy="777240"/>
+          </a:xfrm>
+          <a:prstGeom prst="roundRect">
+            <a:avLst/>
+          </a:prstGeom>
+          <a:solidFill>
+            <a:srgbClr val="111827"/>
+          </a:solidFill>
+          <a:ln w="12700">
+            <a:solidFill>
+              <a:srgbClr val="1E293B"/>
+            </a:solidFill>
+          </a:ln>
+          <a:effectLst/>
+        </p:spPr>
+        <p:style>
+          <a:lnRef idx="1">
+            <a:schemeClr val="accent1"/>
+          </a:lnRef>
+          <a:fillRef idx="3">
+            <a:schemeClr val="accent1"/>
+          </a:fillRef>
+          <a:effectRef idx="2">
+            <a:schemeClr val="accent1"/>
+          </a:effectRef>
+          <a:fontRef idx="minor">
+            <a:schemeClr val="lt1"/>
+          </a:fontRef>
+        </p:style>
+        <p:txBody>
+          <a:bodyPr rtlCol="0" anchor="ctr"/>
+          <a:lstStyle/>
+          <a:p>
+            <a:pPr algn="ctr"/>
+          </a:p>
+        </p:txBody>
+      </p:sp>
+      <p:sp>
+        <p:nvSpPr>
+          <p:cNvPr id="17" name="Rectangle 16"/>
+          <p:cNvSpPr/>
+          <p:nvPr/>
+        </p:nvSpPr>
+        <p:spPr>
+          <a:xfrm>
+            <a:off x="1371600" y="3657600"/>
+            <a:ext cx="50800" cy="777240"/>
+          </a:xfrm>
+          <a:prstGeom prst="rect">
+            <a:avLst/>
+          </a:prstGeom>
+          <a:solidFill>
+            <a:srgbClr val="4ADE80"/>
+          </a:solidFill>
+          <a:ln>
+            <a:noFill/>
+          </a:ln>
+        </p:spPr>
+        <p:style>
+          <a:lnRef idx="1">
+            <a:schemeClr val="accent1"/>
+          </a:lnRef>
+          <a:fillRef idx="3">
+            <a:schemeClr val="accent1"/>
+          </a:fillRef>
+          <a:effectRef idx="2">
+            <a:schemeClr val="accent1"/>
+          </a:effectRef>
+          <a:fontRef idx="minor">
+            <a:schemeClr val="lt1"/>
+          </a:fontRef>
+        </p:style>
+        <p:txBody>
+          <a:bodyPr rtlCol="0" anchor="ctr"/>
+          <a:lstStyle/>
+          <a:p>
+            <a:pPr algn="ctr"/>
+          </a:p>
+        </p:txBody>
+      </p:sp>
+      <p:sp>
+        <p:nvSpPr>
+          <p:cNvPr id="18" name="Rounded Rectangle 17"/>
+          <p:cNvSpPr/>
+          <p:nvPr/>
+        </p:nvSpPr>
+        <p:spPr>
+          <a:xfrm>
+            <a:off x="1645920" y="3904487"/>
+            <a:ext cx="1005840" cy="292608"/>
+          </a:xfrm>
+          <a:prstGeom prst="roundRect">
+            <a:avLst/>
+          </a:prstGeom>
+          <a:solidFill>
+            <a:srgbClr val="0E2C19"/>
+          </a:solidFill>
+          <a:ln>
+            <a:noFill/>
+          </a:ln>
+        </p:spPr>
+        <p:style>
+          <a:lnRef idx="1">
+            <a:schemeClr val="accent1"/>
+          </a:lnRef>
+          <a:fillRef idx="3">
+            <a:schemeClr val="accent1"/>
+          </a:fillRef>
+          <a:effectRef idx="2">
+            <a:schemeClr val="accent1"/>
+          </a:effectRef>
+          <a:fontRef idx="minor">
+            <a:schemeClr val="lt1"/>
+          </a:fontRef>
+        </p:style>
+        <p:txBody>
+          <a:bodyPr rtlCol="0" anchor="ctr"/>
+          <a:lstStyle/>
+          <a:p>
+            <a:pPr algn="ctr">
+              <a:defRPr sz="1000" b="1">
+                <a:solidFill>
+                  <a:srgbClr val="4ADE80"/>
+                </a:solidFill>
+                <a:latin typeface="Calibri"/>
+              </a:defRPr>
+            </a:pPr>
+            <a:r>
+              <a:t>FAZ 3</a:t>
+            </a:r>
+          </a:p>
+        </p:txBody>
+      </p:sp>
+      <p:sp>
+        <p:nvSpPr>
+          <p:cNvPr id="19" name="TextBox 18"/>
+          <p:cNvSpPr txBox="1"/>
+          <p:nvPr/>
+        </p:nvSpPr>
+        <p:spPr>
+          <a:xfrm>
+            <a:off x="2926080" y="3749039"/>
+            <a:ext cx="3657600" cy="320040"/>
+          </a:xfrm>
+          <a:prstGeom prst="rect">
+            <a:avLst/>
+          </a:prstGeom>
+          <a:noFill/>
+        </p:spPr>
+        <p:txBody>
+          <a:bodyPr wrap="square">
+            <a:spAutoFit/>
+          </a:bodyPr>
+          <a:lstStyle/>
+          <a:p>
+            <a:pPr algn="l">
+              <a:defRPr sz="1600" b="1">
+                <a:solidFill>
+                  <a:srgbClr val="E2E8F0"/>
+                </a:solidFill>
+                <a:latin typeface="Calibri"/>
+              </a:defRPr>
+            </a:pPr>
+            <a:r>
+              <a:t>Unified Scoring Dashboard</a:t>
+            </a:r>
+          </a:p>
+        </p:txBody>
+      </p:sp>
+      <p:sp>
+        <p:nvSpPr>
+          <p:cNvPr id="20" name="TextBox 19"/>
+          <p:cNvSpPr txBox="1"/>
+          <p:nvPr/>
+        </p:nvSpPr>
+        <p:spPr>
+          <a:xfrm>
+            <a:off x="2926080" y="4087368"/>
+            <a:ext cx="5029200" cy="274320"/>
+          </a:xfrm>
+          <a:prstGeom prst="rect">
+            <a:avLst/>
+          </a:prstGeom>
+          <a:noFill/>
+        </p:spPr>
+        <p:txBody>
+          <a:bodyPr wrap="square">
+            <a:spAutoFit/>
+          </a:bodyPr>
+          <a:lstStyle/>
+          <a:p>
+            <a:pPr algn="l">
+              <a:defRPr sz="1100" b="0">
+                <a:solidFill>
+                  <a:srgbClr val="94A3B8"/>
+                </a:solidFill>
+                <a:latin typeface="Calibri"/>
+              </a:defRPr>
+            </a:pPr>
+            <a:r>
+              <a:t>Unified rapor, cross-validation, bütçe reallocation, multi-client workspace, güvenlik.</a:t>
+            </a:r>
+          </a:p>
+        </p:txBody>
+      </p:sp>
+      <p:sp>
+        <p:nvSpPr>
+          <p:cNvPr id="21" name="TextBox 20"/>
+          <p:cNvSpPr txBox="1"/>
+          <p:nvPr/>
+        </p:nvSpPr>
+        <p:spPr>
+          <a:xfrm>
+            <a:off x="8503920" y="3904487"/>
+            <a:ext cx="2011680" cy="274320"/>
+          </a:xfrm>
+          <a:prstGeom prst="rect">
+            <a:avLst/>
+          </a:prstGeom>
+          <a:noFill/>
+        </p:spPr>
+        <p:txBody>
+          <a:bodyPr wrap="square">
+            <a:spAutoFit/>
+          </a:bodyPr>
+          <a:lstStyle/>
+          <a:p>
+            <a:pPr algn="l">
+              <a:defRPr sz="1300" b="1">
+                <a:solidFill>
+                  <a:srgbClr val="4ADE80"/>
+                </a:solidFill>
+                <a:latin typeface="Calibri"/>
+              </a:defRPr>
+            </a:pPr>
+            <a:r>
+              <a:t>✓ Tamamlandı</a:t>
+            </a:r>
+          </a:p>
+        </p:txBody>
+      </p:sp>
+      <p:sp>
+        <p:nvSpPr>
+          <p:cNvPr id="22" name="Rounded Rectangle 21"/>
+          <p:cNvSpPr/>
+          <p:nvPr/>
+        </p:nvSpPr>
+        <p:spPr>
+          <a:xfrm>
+            <a:off x="1371600" y="4617720"/>
+            <a:ext cx="9418320" cy="777240"/>
+          </a:xfrm>
+          <a:prstGeom prst="roundRect">
+            <a:avLst/>
+          </a:prstGeom>
+          <a:solidFill>
+            <a:srgbClr val="111827"/>
+          </a:solidFill>
+          <a:ln w="12700">
+            <a:solidFill>
+              <a:srgbClr val="1E293B"/>
+            </a:solidFill>
+          </a:ln>
+          <a:effectLst/>
+        </p:spPr>
+        <p:style>
+          <a:lnRef idx="1">
+            <a:schemeClr val="accent1"/>
+          </a:lnRef>
+          <a:fillRef idx="3">
+            <a:schemeClr val="accent1"/>
+          </a:fillRef>
+          <a:effectRef idx="2">
+            <a:schemeClr val="accent1"/>
+          </a:effectRef>
+          <a:fontRef idx="minor">
+            <a:schemeClr val="lt1"/>
+          </a:fontRef>
+        </p:style>
+        <p:txBody>
+          <a:bodyPr rtlCol="0" anchor="ctr"/>
+          <a:lstStyle/>
+          <a:p>
+            <a:pPr algn="ctr"/>
+          </a:p>
+        </p:txBody>
+      </p:sp>
+      <p:sp>
+        <p:nvSpPr>
+          <p:cNvPr id="23" name="Rectangle 22"/>
+          <p:cNvSpPr/>
+          <p:nvPr/>
+        </p:nvSpPr>
+        <p:spPr>
+          <a:xfrm>
+            <a:off x="1371600" y="4617720"/>
+            <a:ext cx="50800" cy="777240"/>
+          </a:xfrm>
+          <a:prstGeom prst="rect">
+            <a:avLst/>
+          </a:prstGeom>
+          <a:solidFill>
+            <a:srgbClr val="F97316"/>
+          </a:solidFill>
+          <a:ln>
+            <a:noFill/>
+          </a:ln>
+        </p:spPr>
+        <p:style>
+          <a:lnRef idx="1">
+            <a:schemeClr val="accent1"/>
+          </a:lnRef>
+          <a:fillRef idx="3">
+            <a:schemeClr val="accent1"/>
+          </a:fillRef>
+          <a:effectRef idx="2">
+            <a:schemeClr val="accent1"/>
+          </a:effectRef>
+          <a:fontRef idx="minor">
+            <a:schemeClr val="lt1"/>
+          </a:fontRef>
+        </p:style>
+        <p:txBody>
+          <a:bodyPr rtlCol="0" anchor="ctr"/>
+          <a:lstStyle/>
+          <a:p>
+            <a:pPr algn="ctr"/>
+          </a:p>
+        </p:txBody>
+      </p:sp>
+      <p:sp>
+        <p:nvSpPr>
+          <p:cNvPr id="24" name="Rounded Rectangle 23"/>
+          <p:cNvSpPr/>
+          <p:nvPr/>
+        </p:nvSpPr>
+        <p:spPr>
+          <a:xfrm>
+            <a:off x="1645920" y="4864608"/>
+            <a:ext cx="1005840" cy="292608"/>
+          </a:xfrm>
+          <a:prstGeom prst="roundRect">
+            <a:avLst/>
+          </a:prstGeom>
+          <a:solidFill>
+            <a:srgbClr val="311704"/>
+          </a:solidFill>
+          <a:ln>
+            <a:noFill/>
+          </a:ln>
+        </p:spPr>
+        <p:style>
+          <a:lnRef idx="1">
+            <a:schemeClr val="accent1"/>
+          </a:lnRef>
+          <a:fillRef idx="3">
+            <a:schemeClr val="accent1"/>
+          </a:fillRef>
+          <a:effectRef idx="2">
+            <a:schemeClr val="accent1"/>
+          </a:effectRef>
+          <a:fontRef idx="minor">
+            <a:schemeClr val="lt1"/>
+          </a:fontRef>
+        </p:style>
+        <p:txBody>
+          <a:bodyPr rtlCol="0" anchor="ctr"/>
+          <a:lstStyle/>
+          <a:p>
+            <a:pPr algn="ctr">
+              <a:defRPr sz="1000" b="1">
+                <a:solidFill>
+                  <a:srgbClr val="F97316"/>
+                </a:solidFill>
+                <a:latin typeface="Calibri"/>
+              </a:defRPr>
+            </a:pPr>
+            <a:r>
+              <a:t>FAZ 4</a:t>
+            </a:r>
+          </a:p>
+        </p:txBody>
+      </p:sp>
+      <p:sp>
+        <p:nvSpPr>
+          <p:cNvPr id="25" name="TextBox 24"/>
+          <p:cNvSpPr txBox="1"/>
+          <p:nvPr/>
+        </p:nvSpPr>
+        <p:spPr>
+          <a:xfrm>
+            <a:off x="2926080" y="4709160"/>
+            <a:ext cx="3657600" cy="320040"/>
+          </a:xfrm>
+          <a:prstGeom prst="rect">
+            <a:avLst/>
+          </a:prstGeom>
+          <a:noFill/>
+        </p:spPr>
+        <p:txBody>
+          <a:bodyPr wrap="square">
+            <a:spAutoFit/>
+          </a:bodyPr>
+          <a:lstStyle/>
+          <a:p>
+            <a:pPr algn="l">
+              <a:defRPr sz="1600" b="1">
+                <a:solidFill>
+                  <a:srgbClr val="E2E8F0"/>
+                </a:solidFill>
+                <a:latin typeface="Calibri"/>
+              </a:defRPr>
+            </a:pPr>
+            <a:r>
+              <a:t>Incrementality Testing Framework</a:t>
+            </a:r>
+          </a:p>
+        </p:txBody>
+      </p:sp>
+      <p:sp>
+        <p:nvSpPr>
+          <p:cNvPr id="26" name="TextBox 25"/>
+          <p:cNvSpPr txBox="1"/>
+          <p:nvPr/>
+        </p:nvSpPr>
+        <p:spPr>
+          <a:xfrm>
+            <a:off x="2926080" y="5047488"/>
+            <a:ext cx="5029200" cy="274320"/>
+          </a:xfrm>
+          <a:prstGeom prst="rect">
+            <a:avLst/>
+          </a:prstGeom>
+          <a:noFill/>
+        </p:spPr>
+        <p:txBody>
+          <a:bodyPr wrap="square">
+            <a:spAutoFit/>
+          </a:bodyPr>
+          <a:lstStyle/>
+          <a:p>
+            <a:pPr algn="l">
+              <a:defRPr sz="1100" b="0">
+                <a:solidFill>
+                  <a:srgbClr val="94A3B8"/>
+                </a:solidFill>
+                <a:latin typeface="Calibri"/>
+              </a:defRPr>
+            </a:pPr>
+            <a:r>
+              <a:t>Geo-lift, holdout, PSA test motoru, otomatik kalibrasyon.</a:t>
+            </a:r>
+          </a:p>
+        </p:txBody>
+      </p:sp>
+      <p:sp>
+        <p:nvSpPr>
+          <p:cNvPr id="27" name="TextBox 26"/>
+          <p:cNvSpPr txBox="1"/>
+          <p:nvPr/>
+        </p:nvSpPr>
+        <p:spPr>
+          <a:xfrm>
+            <a:off x="8503920" y="4864608"/>
+            <a:ext cx="2011680" cy="274320"/>
+          </a:xfrm>
+          <a:prstGeom prst="rect">
+            <a:avLst/>
+          </a:prstGeom>
+          <a:noFill/>
+        </p:spPr>
+        <p:txBody>
+          <a:bodyPr wrap="square">
+            <a:spAutoFit/>
+          </a:bodyPr>
+          <a:lstStyle/>
+          <a:p>
+            <a:pPr algn="l">
+              <a:defRPr sz="1300" b="1">
+                <a:solidFill>
+                  <a:srgbClr val="F97316"/>
+                </a:solidFill>
+                <a:latin typeface="Calibri"/>
+              </a:defRPr>
+            </a:pPr>
+            <a:r>
+              <a:t>Sırada</a:t>
+            </a:r>
+          </a:p>
+        </p:txBody>
+      </p:sp>
+      <p:sp>
+        <p:nvSpPr>
+          <p:cNvPr id="28" name="Rounded Rectangle 27"/>
+          <p:cNvSpPr/>
+          <p:nvPr/>
+        </p:nvSpPr>
+        <p:spPr>
+          <a:xfrm>
+            <a:off x="1371600" y="5577840"/>
+            <a:ext cx="9418320" cy="777240"/>
+          </a:xfrm>
+          <a:prstGeom prst="roundRect">
+            <a:avLst/>
+          </a:prstGeom>
+          <a:solidFill>
+            <a:srgbClr val="111827"/>
+          </a:solidFill>
+          <a:ln w="12700">
+            <a:solidFill>
+              <a:srgbClr val="1E293B"/>
+            </a:solidFill>
+          </a:ln>
+          <a:effectLst/>
+        </p:spPr>
+        <p:style>
+          <a:lnRef idx="1">
+            <a:schemeClr val="accent1"/>
+          </a:lnRef>
+          <a:fillRef idx="3">
+            <a:schemeClr val="accent1"/>
+          </a:fillRef>
+          <a:effectRef idx="2">
+            <a:schemeClr val="accent1"/>
+          </a:effectRef>
+          <a:fontRef idx="minor">
+            <a:schemeClr val="lt1"/>
+          </a:fontRef>
+        </p:style>
+        <p:txBody>
+          <a:bodyPr rtlCol="0" anchor="ctr"/>
+          <a:lstStyle/>
+          <a:p>
+            <a:pPr algn="ctr"/>
+          </a:p>
+        </p:txBody>
+      </p:sp>
+      <p:sp>
+        <p:nvSpPr>
+          <p:cNvPr id="29" name="Rectangle 28"/>
+          <p:cNvSpPr/>
+          <p:nvPr/>
+        </p:nvSpPr>
+        <p:spPr>
+          <a:xfrm>
+            <a:off x="1371600" y="5577840"/>
+            <a:ext cx="50800" cy="777240"/>
+          </a:xfrm>
+          <a:prstGeom prst="rect">
+            <a:avLst/>
+          </a:prstGeom>
+          <a:solidFill>
+            <a:srgbClr val="64748B"/>
+          </a:solidFill>
+          <a:ln>
+            <a:noFill/>
+          </a:ln>
+        </p:spPr>
+        <p:style>
+          <a:lnRef idx="1">
+            <a:schemeClr val="accent1"/>
+          </a:lnRef>
+          <a:fillRef idx="3">
+            <a:schemeClr val="accent1"/>
+          </a:fillRef>
+          <a:effectRef idx="2">
+            <a:schemeClr val="accent1"/>
+          </a:effectRef>
+          <a:fontRef idx="minor">
+            <a:schemeClr val="lt1"/>
+          </a:fontRef>
+        </p:style>
+        <p:txBody>
+          <a:bodyPr rtlCol="0" anchor="ctr"/>
+          <a:lstStyle/>
+          <a:p>
+            <a:pPr algn="ctr"/>
+          </a:p>
+        </p:txBody>
+      </p:sp>
+      <p:sp>
+        <p:nvSpPr>
+          <p:cNvPr id="30" name="Rounded Rectangle 29"/>
+          <p:cNvSpPr/>
+          <p:nvPr/>
+        </p:nvSpPr>
+        <p:spPr>
+          <a:xfrm>
+            <a:off x="1645920" y="5824727"/>
+            <a:ext cx="1005840" cy="292608"/>
+          </a:xfrm>
+          <a:prstGeom prst="roundRect">
+            <a:avLst/>
+          </a:prstGeom>
+          <a:solidFill>
+            <a:srgbClr val="14171B"/>
+          </a:solidFill>
+          <a:ln>
+            <a:noFill/>
+          </a:ln>
+        </p:spPr>
+        <p:style>
+          <a:lnRef idx="1">
+            <a:schemeClr val="accent1"/>
+          </a:lnRef>
+          <a:fillRef idx="3">
+            <a:schemeClr val="accent1"/>
+          </a:fillRef>
+          <a:effectRef idx="2">
+            <a:schemeClr val="accent1"/>
+          </a:effectRef>
+          <a:fontRef idx="minor">
+            <a:schemeClr val="lt1"/>
+          </a:fontRef>
+        </p:style>
+        <p:txBody>
+          <a:bodyPr rtlCol="0" anchor="ctr"/>
+          <a:lstStyle/>
+          <a:p>
+            <a:pPr algn="ctr">
+              <a:defRPr sz="1000" b="1">
+                <a:solidFill>
+                  <a:srgbClr val="64748B"/>
+                </a:solidFill>
+                <a:latin typeface="Calibri"/>
+              </a:defRPr>
+            </a:pPr>
+            <a:r>
+              <a:t>FAZ 5</a:t>
+            </a:r>
+          </a:p>
+        </p:txBody>
+      </p:sp>
+      <p:sp>
+        <p:nvSpPr>
+          <p:cNvPr id="31" name="TextBox 30"/>
+          <p:cNvSpPr txBox="1"/>
+          <p:nvPr/>
+        </p:nvSpPr>
+        <p:spPr>
+          <a:xfrm>
+            <a:off x="2926080" y="5669279"/>
+            <a:ext cx="3657600" cy="320040"/>
+          </a:xfrm>
+          <a:prstGeom prst="rect">
+            <a:avLst/>
+          </a:prstGeom>
+          <a:noFill/>
+        </p:spPr>
+        <p:txBody>
+          <a:bodyPr wrap="square">
+            <a:spAutoFit/>
+          </a:bodyPr>
+          <a:lstStyle/>
+          <a:p>
+            <a:pPr algn="l">
+              <a:defRPr sz="1600" b="1">
+                <a:solidFill>
+                  <a:srgbClr val="E2E8F0"/>
+                </a:solidFill>
+                <a:latin typeface="Calibri"/>
+              </a:defRPr>
+            </a:pPr>
+            <a:r>
+              <a:t>Gerçek Veri Entegrasyonu &amp; API</a:t>
+            </a:r>
+          </a:p>
+        </p:txBody>
+      </p:sp>
+      <p:sp>
+        <p:nvSpPr>
+          <p:cNvPr id="32" name="TextBox 31"/>
+          <p:cNvSpPr txBox="1"/>
+          <p:nvPr/>
+        </p:nvSpPr>
+        <p:spPr>
+          <a:xfrm>
+            <a:off x="2926080" y="6007607"/>
+            <a:ext cx="5029200" cy="274320"/>
+          </a:xfrm>
+          <a:prstGeom prst="rect">
+            <a:avLst/>
+          </a:prstGeom>
+          <a:noFill/>
+        </p:spPr>
+        <p:txBody>
+          <a:bodyPr wrap="square">
+            <a:spAutoFit/>
+          </a:bodyPr>
+          <a:lstStyle/>
+          <a:p>
+            <a:pPr algn="l">
+              <a:defRPr sz="1100" b="0">
+                <a:solidFill>
+                  <a:srgbClr val="94A3B8"/>
+                </a:solidFill>
+                <a:latin typeface="Calibri"/>
+              </a:defRPr>
+            </a:pPr>
+            <a:r>
+              <a:t>Meta/Google/DV360 API bağlantısı, otomatik veri çekme, canlı rapor.</a:t>
+            </a:r>
+          </a:p>
+        </p:txBody>
+      </p:sp>
+      <p:sp>
+        <p:nvSpPr>
+          <p:cNvPr id="33" name="TextBox 32"/>
+          <p:cNvSpPr txBox="1"/>
+          <p:nvPr/>
+        </p:nvSpPr>
+        <p:spPr>
+          <a:xfrm>
+            <a:off x="8503920" y="5824727"/>
+            <a:ext cx="2011680" cy="274320"/>
+          </a:xfrm>
+          <a:prstGeom prst="rect">
+            <a:avLst/>
+          </a:prstGeom>
+          <a:noFill/>
+        </p:spPr>
+        <p:txBody>
+          <a:bodyPr wrap="square">
+            <a:spAutoFit/>
+          </a:bodyPr>
+          <a:lstStyle/>
+          <a:p>
+            <a:pPr algn="l">
+              <a:defRPr sz="1300" b="1">
+                <a:solidFill>
+                  <a:srgbClr val="64748B"/>
+                </a:solidFill>
+                <a:latin typeface="Calibri"/>
+              </a:defRPr>
+            </a:pPr>
+            <a:r>
+              <a:t>Planlanıyor</a:t>
+            </a:r>
+          </a:p>
+        </p:txBody>
+      </p:sp>
+      <p:sp>
+        <p:nvSpPr>
+          <p:cNvPr id="34" name="TextBox 33"/>
+          <p:cNvSpPr txBox="1"/>
+          <p:nvPr/>
+        </p:nvSpPr>
+        <p:spPr>
+          <a:xfrm>
+            <a:off x="457200" y="6400800"/>
+            <a:ext cx="1828800" cy="320040"/>
+          </a:xfrm>
+          <a:prstGeom prst="rect">
+            <a:avLst/>
+          </a:prstGeom>
+          <a:noFill/>
+        </p:spPr>
+        <p:txBody>
+          <a:bodyPr wrap="square">
+            <a:spAutoFit/>
+          </a:bodyPr>
+          <a:lstStyle/>
+          <a:p>
+            <a:pPr algn="l">
+              <a:defRPr sz="1000" b="0">
+                <a:solidFill>
+                  <a:srgbClr val="64748B"/>
+                </a:solidFill>
+                <a:latin typeface="Calibri"/>
+              </a:defRPr>
+            </a:pPr>
+            <a:r>
+              <a:t>13 / 14</a:t>
+            </a:r>
+          </a:p>
+        </p:txBody>
+      </p:sp>
+    </p:spTree>
+  </p:cSld>
+  <p:clrMapOvr>
+    <a:masterClrMapping/>
+  </p:clrMapOvr>
+</p:sld>
+</file>
+
+<file path=ppt/slides/slide14.xml><?xml version="1.0" encoding="utf-8"?>
+<p:sld xmlns:a="http://schemas.openxmlformats.org/drawingml/2006/main" xmlns:p="http://schemas.openxmlformats.org/presentationml/2006/main" xmlns:r="http://schemas.openxmlformats.org/officeDocument/2006/relationships">
+  <p:cSld>
+    <p:bg>
+      <p:bgPr>
+        <a:solidFill>
+          <a:srgbClr val="0B1120"/>
+        </a:solidFill>
+        <a:effectLst/>
+      </p:bgPr>
+    </p:bg>
+    <p:spTree>
+      <p:nvGrpSpPr>
+        <p:cNvPr id="1" name=""/>
+        <p:cNvGrpSpPr/>
+        <p:nvPr/>
+      </p:nvGrpSpPr>
+      <p:grpSpPr/>
+      <p:sp>
+        <p:nvSpPr>
+          <p:cNvPr id="2" name="TextBox 1"/>
+          <p:cNvSpPr txBox="1"/>
+          <p:nvPr/>
+        </p:nvSpPr>
+        <p:spPr>
+          <a:xfrm>
             <a:off x="0" y="1828800"/>
             <a:ext cx="12191695" cy="914400"/>
           </a:xfrm>
@@ -7216,7 +8838,7 @@
               </a:defRPr>
             </a:pPr>
             <a:r>
-              <a:t>13 / 13</a:t>
+              <a:t>14 / 14</a:t>
             </a:r>
           </a:p>
         </p:txBody>
@@ -7783,7 +9405,7 @@
               </a:defRPr>
             </a:pPr>
             <a:r>
-              <a:t>2 / 13</a:t>
+              <a:t>2 / 14</a:t>
             </a:r>
           </a:p>
         </p:txBody>
@@ -8608,7 +10230,7 @@
               </a:defRPr>
             </a:pPr>
             <a:r>
-              <a:t>3 / 13</a:t>
+              <a:t>3 / 14</a:t>
             </a:r>
           </a:p>
         </p:txBody>
@@ -9530,7 +11152,7 @@
               </a:defRPr>
             </a:pPr>
             <a:r>
-              <a:t>4 / 13</a:t>
+              <a:t>4 / 14</a:t>
             </a:r>
           </a:p>
         </p:txBody>
@@ -10724,7 +12346,7 @@
               </a:defRPr>
             </a:pPr>
             <a:r>
-              <a:t>5 / 13</a:t>
+              <a:t>5 / 14</a:t>
             </a:r>
           </a:p>
         </p:txBody>
@@ -11448,7 +13070,7 @@
               </a:defRPr>
             </a:pPr>
             <a:r>
-              <a:t>6 / 13</a:t>
+              <a:t>6 / 14</a:t>
             </a:r>
           </a:p>
         </p:txBody>
@@ -12593,7 +14215,7 @@
               </a:defRPr>
             </a:pPr>
             <a:r>
-              <a:t>7 / 13</a:t>
+              <a:t>7 / 14</a:t>
             </a:r>
           </a:p>
         </p:txBody>
@@ -13630,7 +15252,7 @@
               </a:defRPr>
             </a:pPr>
             <a:r>
-              <a:t>8 / 13</a:t>
+              <a:t>8 / 14</a:t>
             </a:r>
           </a:p>
         </p:txBody>
@@ -14687,7 +16309,7 @@
               </a:defRPr>
             </a:pPr>
             <a:r>
-              <a:t>9 / 13</a:t>
+              <a:t>9 / 14</a:t>
             </a:r>
           </a:p>
         </p:txBody>
